--- a/course/lectures/act-3-software-in-the-world/03-technical-debt-architecture-and-supply-chains/3-3-Agentic-Technical-Debt-Architecture-and-Dependencies.pptx
+++ b/course/lectures/act-3-software-in-the-world/03-technical-debt-architecture-and-supply-chains/3-3-Agentic-Technical-Debt-Architecture-and-Dependencies.pptx
@@ -11,23 +11,17 @@
     <p:sldId id="256" r:id="rId100"/>
     <p:sldId id="257" r:id="rId101"/>
     <p:sldId id="258" r:id="rId102"/>
+    <p:sldId id="288" r:id="rId39"/>
     <p:sldId id="259" r:id="rId103"/>
     <p:sldId id="260" r:id="rId104"/>
     <p:sldId id="261" r:id="rId105"/>
     <p:sldId id="262" r:id="rId106"/>
-    <p:sldId id="263" r:id="rId107"/>
-    <p:sldId id="264" r:id="rId108"/>
     <p:sldId id="265" r:id="rId109"/>
     <p:sldId id="266" r:id="rId110"/>
     <p:sldId id="267" r:id="rId111"/>
-    <p:sldId id="268" r:id="rId112"/>
-    <p:sldId id="269" r:id="rId113"/>
-    <p:sldId id="270" r:id="rId114"/>
-    <p:sldId id="271" r:id="rId115"/>
     <p:sldId id="272" r:id="rId116"/>
     <p:sldId id="273" r:id="rId117"/>
-    <p:sldId id="274" r:id="rId118"/>
-    <p:sldId id="275" r:id="rId119"/>
+    <p:sldId id="263" r:id="rId107"/>
     <p:sldId id="276" r:id="rId120"/>
     <p:sldId id="277" r:id="rId121"/>
     <p:sldId id="278" r:id="rId122"/>
@@ -36,8 +30,9 @@
     <p:sldId id="281" r:id="rId125"/>
     <p:sldId id="282" r:id="rId126"/>
     <p:sldId id="283" r:id="rId127"/>
+    <p:sldId id="285" r:id="rId129"/>
+    <p:sldId id="275" r:id="rId119"/>
     <p:sldId id="284" r:id="rId128"/>
-    <p:sldId id="285" r:id="rId129"/>
     <p:sldId id="286" r:id="rId130"/>
     <p:sldId id="287" r:id="rId131"/>
   </p:sldIdLst>
@@ -283,39 +278,25 @@
             <ns0:sldId id="256"/>
             <ns0:sldId id="257"/>
             <ns0:sldId id="258"/>
+            <ns0:sldId id="288"/>
           </ns0:sldIdLst>
         </ns0:section>
-        <ns0:section name="Mud, erosion and debt" id="{4964CCBA-909F-4226-9E1B-E8417909C23E}">
+        <ns0:section name="What structure did we build, and what will it cost to change?" id="{4964CCBA-909F-4226-9E1B-E8417909C23E}">
           <ns0:sldIdLst>
             <ns0:sldId id="259"/>
             <ns0:sldId id="260"/>
             <ns0:sldId id="261"/>
             <ns0:sldId id="262"/>
-            <ns0:sldId id="263"/>
-          </ns0:sldIdLst>
-        </ns0:section>
-        <ns0:section name="The architecture we built" id="{0E3E55DE-55E9-4670-A403-F037B024D9ED}">
-          <ns0:sldIdLst>
-            <ns0:sldId id="264"/>
             <ns0:sldId id="265"/>
             <ns0:sldId id="266"/>
             <ns0:sldId id="267"/>
-          </ns0:sldIdLst>
-        </ns0:section>
-        <ns0:section name="Architectural alternatives" id="{6237A54F-13CA-4FC5-B9A0-CD59B627FE64}">
-          <ns0:sldIdLst>
-            <ns0:sldId id="268"/>
-            <ns0:sldId id="269"/>
-            <ns0:sldId id="270"/>
-            <ns0:sldId id="271"/>
             <ns0:sldId id="272"/>
             <ns0:sldId id="273"/>
-            <ns0:sldId id="274"/>
-            <ns0:sldId id="275"/>
+            <ns0:sldId id="263"/>
             <ns0:sldId id="276"/>
           </ns0:sldIdLst>
         </ns0:section>
-        <ns0:section name="Software supply chains" id="{44DE4778-7E4A-4CC6-A647-49CFB666050D}">
+        <ns0:section name="What components and obligations did we inherit?" id="{0E3E55DE-55E9-4670-A403-F037B024D9ED}">
           <ns0:sldIdLst>
             <ns0:sldId id="277"/>
             <ns0:sldId id="278"/>
@@ -324,12 +305,13 @@
             <ns0:sldId id="281"/>
             <ns0:sldId id="282"/>
             <ns0:sldId id="283"/>
-            <ns0:sldId id="284"/>
           </ns0:sldIdLst>
         </ns0:section>
-        <ns0:section name="Judgment and controls" id="{9059176B-AB16-4F51-AB5C-269294B2F154}">
+        <ns0:section name="What evidence and controls justify continued reliance?" id="{6237A54F-13CA-4FC5-B9A0-CD59B627FE64}">
           <ns0:sldIdLst>
             <ns0:sldId id="285"/>
+            <ns0:sldId id="275"/>
+            <ns0:sldId id="284"/>
             <ns0:sldId id="286"/>
             <ns0:sldId id="287"/>
           </ns0:sldIdLst>
@@ -1585,7 +1567,7 @@
           <a:lstStyle/>
           <a:p>
             <a:r>
-              <a:t>TIMING: 2 minutes. Orient: the system works; today asks whether it is worthy of reliance as an evolving engineered system.</a:t>
+              <a:t>TIMING: 2 minutes. Orient: the system works; today asks what we inherited by accepting it.</a:t>
             </a:r>
           </a:p>
           <a:p/>
@@ -1597,19 +1579,19 @@
           <a:p/>
           <a:p>
             <a:r>
-              <a:t>THE TITLE: agentic technical debt. A coding agent produced the working implementation cheaply, and cheap implementation changes the economics of taking on debt AND of repaying it; that thread runs through the debt pricing, the pattern decision, and the inherited-dependency judgments.</a:t>
+              <a:t>THE TITLE: (Agentic) Technical Debt. The parentheses are deliberate: technical debt, architecture, and dependency risk are old problems; agents change their economics. A coding agent produced the working implementation cheaply, and cheap implementation changes the cost of taking on debt AND of repaying it; that thread runs through the debt pricing, the restructuring decision, and the inherited-dependency judgments.</a:t>
             </a:r>
           </a:p>
           <a:p/>
           <a:p>
             <a:r>
-              <a:t>THE GOVERNING QUESTION (subtitle): it works, but is it reliable? Define "reliable" carefully: worthy of reliance as an evolving engineered system. Two objects of examination today: the architecture we created, and the dependencies we inherited.</a:t>
+              <a:t>THE SUBTITLE: it works. What did we inherit? Accepting a working implementation means inheriting two things we may not yet understand: an internal structure we did not design in detail, and an external dependency graph we did not choose. Today is about maintainability, evolvability, and inherited obligations.</a:t>
             </a:r>
           </a:p>
           <a:p/>
           <a:p>
             <a:r>
-              <a:t>DISTINGUISH from the next unit now, so the word does not blur: Performance &amp; Reliability treats reliability in the narrower quantitative operational sense (load, failure rates). Today is the structural half of the question.</a:t>
+              <a:t>DISTINGUISH from the next unit now: Performance and Reliability asks whether behavior satisfies quantitative requirements under load and failure. Today is the structural half: can we understand and change what we accepted?</a:t>
             </a:r>
           </a:p>
           <a:p/>
@@ -1685,7 +1667,13 @@
           <a:lstStyle/>
           <a:p>
             <a:r>
-              <a:t>TIMING: 3 minutes. Reverse Act I: recover one actual-structure model and read the change against it.</a:t>
+              <a:t>TIMING: 3.5 minutes. Reverse Act I: recover one actual-structure model and read the change against it.</a:t>
+            </a:r>
+          </a:p>
+          <a:p/>
+          <a:p>
+            <a:r>
+              <a:t>DWELL ON THE CHIPS FIRST: Act I went intended model to code; today goes code to recovered model. This reversal is the distinctive activity of the whole first movement: the implementation exists, and the model is evidence we construct about it.</a:t>
             </a:r>
           </a:p>
           <a:p/>
@@ -1791,7 +1779,7 @@
           <a:p/>
           <a:p>
             <a:r>
-              <a:t>WALK THE TABLE: fan-out counts what a module depends on; fan-in counts its dependents. Handlers fan out to three modules and nothing depends on them; persistence has fan-in three, so it is load-bearing. The last column is the consequential one: four of five components are touched by one representative policy change.</a:t>
+              <a:t>WALK THE TABLE: fan-out counts what a module depends on; fan-in counts its dependents. Handlers fan out to three modules and nothing depends on them; persistence has fan-in three, so it is load-bearing. The last column is the consequential one, and it distinguishes MUST from MAY: policy must change, because the request lands there; handlers, persistence, and the database schema may be affected, because they format, store, and shape policy decisions. Say aloud that the schema is counted as a component here: Data Management taught us the database is part of the design.</a:t>
             </a:r>
           </a:p>
           <a:p/>
@@ -1803,7 +1791,7 @@
           <a:p/>
           <a:p>
             <a:r>
-              <a:t>THE NON-CLAIM, firmly: these are indicators, not quality scores. High fan-in on persistence is the design working. The Design lecture rule returns as the footer: measure the consequence that could change the decision; a scalar nobody acts on is decoration.</a:t>
+              <a:t>THE NON-CLAIM, firmly: these are indicators, not quality scores. High fan-in on persistence is the design working. A MAY is a prediction read off the recovered model; an implementation probe or the commit history confirms or refutes it. The Design lecture rule returns as the footer: measure the consequence that could change the decision; a scalar nobody acts on is decoration.</a:t>
             </a:r>
           </a:p>
           <a:p/>
@@ -1885,7 +1873,7 @@
           <a:lstStyle/>
           <a:p>
             <a:r>
-              <a:t>TIMING: 3 minutes. Erosion is invisible to functional tests; boundaries hold only if something checks them.</a:t>
+              <a:t>TIMING: 3.5 minutes. Erosion is invisible to functional tests; boundaries hold only if something checks them.</a:t>
             </a:r>
           </a:p>
           <a:p/>
@@ -1921,383 +1909,7 @@
           <a:p/>
           <a:p>
             <a:r>
-              <a:t>TRANSITION into Section 3: we can now see and measure structure. Which structures could we have chosen, and against what requirements?</a:t>
-            </a:r>
-          </a:p>
-        </p:txBody>
-      </p:sp>
-      <p:sp>
-        <p:nvSpPr>
-          <p:cNvPr id="4" name="Slide Number Placeholder 3"/>
-          <p:cNvSpPr>
-            <a:spLocks noGrp="1"/>
-          </p:cNvSpPr>
-          <p:nvPr>
-            <p:ph type="sldNum" idx="12"/>
-          </p:nvPr>
-        </p:nvSpPr>
-        <p:spPr/>
-      </p:sp>
-    </p:spTree>
-  </p:cSld>
-  <p:clrMapOvr>
-    <a:masterClrMapping/>
-  </p:clrMapOvr>
-</p:notes>
-</file>
-
-<file path=ppt/notesSlides/notesSlide13.xml><?xml version="1.0" encoding="utf-8"?>
-<p:notes xmlns:a="http://schemas.openxmlformats.org/drawingml/2006/main" xmlns:p="http://schemas.openxmlformats.org/presentationml/2006/main" xmlns:r="http://schemas.openxmlformats.org/officeDocument/2006/relationships">
-  <p:cSld>
-    <p:spTree>
-      <p:nvGrpSpPr>
-        <p:cNvPr id="1" name=""/>
-        <p:cNvGrpSpPr/>
-        <p:nvPr/>
-      </p:nvGrpSpPr>
-      <p:grpSpPr>
-        <a:xfrm>
-          <a:off x="0" y="0"/>
-          <a:ext cx="0" cy="0"/>
-          <a:chOff x="0" y="0"/>
-          <a:chExt cx="0" cy="0"/>
-        </a:xfrm>
-      </p:grpSpPr>
-      <p:sp>
-        <p:nvSpPr>
-          <p:cNvPr id="2" name="Slide Image Placeholder 1"/>
-          <p:cNvSpPr>
-            <a:spLocks noGrp="1"/>
-          </p:cNvSpPr>
-          <p:nvPr>
-            <p:ph type="sldImg" idx="3"/>
-          </p:nvPr>
-        </p:nvSpPr>
-        <p:spPr/>
-      </p:sp>
-      <p:sp>
-        <p:nvSpPr>
-          <p:cNvPr id="3" name="Notes Placeholder 2"/>
-          <p:cNvSpPr>
-            <a:spLocks noGrp="1"/>
-          </p:cNvSpPr>
-          <p:nvPr>
-            <p:ph type="body" idx="1"/>
-          </p:nvPr>
-        </p:nvSpPr>
-        <p:spPr/>
-        <p:txBody>
-          <a:bodyPr/>
-          <a:lstStyle/>
-          <a:p>
-            <a:r>
-              <a:t>TIMING: 1 minutes. Open the technical center of the lecture: patterns as choices under requirements.</a:t>
-            </a:r>
-          </a:p>
-          <a:p/>
-          <a:p>
-            <a:r>
-              <a:t>FRAME the section contract: every alternative is evaluated on the SAME reservation service with the SAME stated requirements. No pattern is graded in the abstract.</a:t>
-            </a:r>
-          </a:p>
-          <a:p/>
-          <a:p>
-            <a:r>
-              <a:t>Act I introduced the pattern idea (recurring problem, recurring answers, expectations attached). We do not repeat that catalogue; we apply it to deployment-scale organization.</a:t>
-            </a:r>
-          </a:p>
-          <a:p/>
-          <a:p>
-            <a:r>
-              <a:t>Do not pause for discussion.</a:t>
-            </a:r>
-          </a:p>
-        </p:txBody>
-      </p:sp>
-      <p:sp>
-        <p:nvSpPr>
-          <p:cNvPr id="4" name="Slide Number Placeholder 3"/>
-          <p:cNvSpPr>
-            <a:spLocks noGrp="1"/>
-          </p:cNvSpPr>
-          <p:nvPr>
-            <p:ph type="sldNum" idx="12"/>
-          </p:nvPr>
-        </p:nvSpPr>
-        <p:spPr/>
-      </p:sp>
-    </p:spTree>
-  </p:cSld>
-  <p:clrMapOvr>
-    <a:masterClrMapping/>
-  </p:clrMapOvr>
-</p:notes>
-</file>
-
-<file path=ppt/notesSlides/notesSlide14.xml><?xml version="1.0" encoding="utf-8"?>
-<p:notes xmlns:a="http://schemas.openxmlformats.org/drawingml/2006/main" xmlns:p="http://schemas.openxmlformats.org/presentationml/2006/main" xmlns:r="http://schemas.openxmlformats.org/officeDocument/2006/relationships">
-  <p:cSld>
-    <p:spTree>
-      <p:nvGrpSpPr>
-        <p:cNvPr id="1" name=""/>
-        <p:cNvGrpSpPr/>
-        <p:nvPr/>
-      </p:nvGrpSpPr>
-      <p:grpSpPr>
-        <a:xfrm>
-          <a:off x="0" y="0"/>
-          <a:ext cx="0" cy="0"/>
-          <a:chOff x="0" y="0"/>
-          <a:chExt cx="0" cy="0"/>
-        </a:xfrm>
-      </p:grpSpPr>
-      <p:sp>
-        <p:nvSpPr>
-          <p:cNvPr id="2" name="Slide Image Placeholder 1"/>
-          <p:cNvSpPr>
-            <a:spLocks noGrp="1"/>
-          </p:cNvSpPr>
-          <p:nvPr>
-            <p:ph type="sldImg" idx="3"/>
-          </p:nvPr>
-        </p:nvSpPr>
-        <p:spPr/>
-      </p:sp>
-      <p:sp>
-        <p:nvSpPr>
-          <p:cNvPr id="3" name="Notes Placeholder 2"/>
-          <p:cNvSpPr>
-            <a:spLocks noGrp="1"/>
-          </p:cNvSpPr>
-          <p:nvPr>
-            <p:ph type="body" idx="1"/>
-          </p:nvPr>
-        </p:nvSpPr>
-        <p:spPr/>
-        <p:txBody>
-          <a:bodyPr/>
-          <a:lstStyle/>
-          <a:p>
-            <a:r>
-              <a:t>TIMING: 2 minutes. Untangle three orthogonal questions that students collapse into one axis.</a:t>
-            </a:r>
-          </a:p>
-          <a:p/>
-          <a:p>
-            <a:r>
-              <a:t>WALK THE ROWS: interaction and placement (client/server versus a local application); deployable-unit count (monolith versus services); internal organization (the Act I patterns: layers, repository, pipeline, RPC, events, ports and adapters).</a:t>
-            </a:r>
-          </a:p>
-          <a:p/>
-          <a:p>
-            <a:r>
-              <a:t>THE BAND is the payoff and the common exam error: our reservation service is client/server AND a monolith AND can be layered and modular inside. These are independent coordinates, not rungs on a maturity ladder.</a:t>
-            </a:r>
-          </a:p>
-          <a:p/>
-          <a:p>
-            <a:r>
-              <a:t>Keep Act I references light: students have seen the internal-organization patterns; today adds the deployment dimensions and the decision discipline.</a:t>
-            </a:r>
-          </a:p>
-          <a:p/>
-          <a:p>
-            <a:r>
-              <a:t>TRANSITION: take the dimensions one at a time; interaction first.</a:t>
-            </a:r>
-          </a:p>
-        </p:txBody>
-      </p:sp>
-      <p:sp>
-        <p:nvSpPr>
-          <p:cNvPr id="4" name="Slide Number Placeholder 3"/>
-          <p:cNvSpPr>
-            <a:spLocks noGrp="1"/>
-          </p:cNvSpPr>
-          <p:nvPr>
-            <p:ph type="sldNum" idx="12"/>
-          </p:nvPr>
-        </p:nvSpPr>
-        <p:spPr/>
-      </p:sp>
-    </p:spTree>
-  </p:cSld>
-  <p:clrMapOvr>
-    <a:masterClrMapping/>
-  </p:clrMapOvr>
-</p:notes>
-</file>
-
-<file path=ppt/notesSlides/notesSlide15.xml><?xml version="1.0" encoding="utf-8"?>
-<p:notes xmlns:a="http://schemas.openxmlformats.org/drawingml/2006/main" xmlns:p="http://schemas.openxmlformats.org/presentationml/2006/main" xmlns:r="http://schemas.openxmlformats.org/officeDocument/2006/relationships">
-  <p:cSld>
-    <p:spTree>
-      <p:nvGrpSpPr>
-        <p:cNvPr id="1" name=""/>
-        <p:cNvGrpSpPr/>
-        <p:nvPr/>
-      </p:nvGrpSpPr>
-      <p:grpSpPr>
-        <a:xfrm>
-          <a:off x="0" y="0"/>
-          <a:ext cx="0" cy="0"/>
-          <a:chOff x="0" y="0"/>
-          <a:chExt cx="0" cy="0"/>
-        </a:xfrm>
-      </p:grpSpPr>
-      <p:sp>
-        <p:nvSpPr>
-          <p:cNvPr id="2" name="Slide Image Placeholder 1"/>
-          <p:cNvSpPr>
-            <a:spLocks noGrp="1"/>
-          </p:cNvSpPr>
-          <p:nvPr>
-            <p:ph type="sldImg" idx="3"/>
-          </p:nvPr>
-        </p:nvSpPr>
-        <p:spPr/>
-      </p:sp>
-      <p:sp>
-        <p:nvSpPr>
-          <p:cNvPr id="3" name="Notes Placeholder 2"/>
-          <p:cNvSpPr>
-            <a:spLocks noGrp="1"/>
-          </p:cNvSpPr>
-          <p:nvPr>
-            <p:ph type="body" idx="1"/>
-          </p:nvPr>
-        </p:nvSpPr>
-        <p:spPr/>
-        <p:txBody>
-          <a:bodyPr/>
-          <a:lstStyle/>
-          <a:p>
-            <a:r>
-              <a:t>TIMING: 2.5 minutes. Client/server is a boundary choice with a bill, not a default.</a:t>
-            </a:r>
-          </a:p>
-          <a:p/>
-          <a:p>
-            <a:r>
-              <a:t>WALK LEFT: the browser reaches the HTTP API across a network edge that is also a trust boundary. Three standing costs: latency on every call, network failure as a normal state, and API compatibility across deployed versions.</a:t>
-            </a:r>
-          </a:p>
-          <a:p/>
-          <a:p>
-            <a:r>
-              <a:t>WALK RIGHT: the same capabilities as one local application. Offline works; updates must visit every machine; and the moment two users share rooms, shared state needs a new answer (Data Management gave us that vocabulary).</a:t>
-            </a:r>
-          </a:p>
-          <a:p/>
-          <a:p>
-            <a:r>
-              <a:t>ASK: where do authorization, secrets, and offline behavior live in each? Expected: server-side auth and secrets in client/server (clients are untrusted); in the local app, secrets sit on user machines and authorization enforcement weakens; offline inverts.</a:t>
-            </a:r>
-          </a:p>
-          <a:p/>
-          <a:p>
-            <a:r>
-              <a:t>This row of the dimension table was settled for our service by the deployment lecture (hundreds of users, central updates), but settled BY REQUIREMENTS, and the lab request does not reopen it.</a:t>
-            </a:r>
-          </a:p>
-          <a:p/>
-          <a:p>
-            <a:r>
-              <a:t>TRANSITION: within the server, how many deployable units?</a:t>
-            </a:r>
-          </a:p>
-        </p:txBody>
-      </p:sp>
-      <p:sp>
-        <p:nvSpPr>
-          <p:cNvPr id="4" name="Slide Number Placeholder 3"/>
-          <p:cNvSpPr>
-            <a:spLocks noGrp="1"/>
-          </p:cNvSpPr>
-          <p:nvPr>
-            <p:ph type="sldNum" idx="12"/>
-          </p:nvPr>
-        </p:nvSpPr>
-        <p:spPr/>
-      </p:sp>
-    </p:spTree>
-  </p:cSld>
-  <p:clrMapOvr>
-    <a:masterClrMapping/>
-  </p:clrMapOvr>
-</p:notes>
-</file>
-
-<file path=ppt/notesSlides/notesSlide16.xml><?xml version="1.0" encoding="utf-8"?>
-<p:notes xmlns:a="http://schemas.openxmlformats.org/drawingml/2006/main" xmlns:p="http://schemas.openxmlformats.org/presentationml/2006/main" xmlns:r="http://schemas.openxmlformats.org/officeDocument/2006/relationships">
-  <p:cSld>
-    <p:spTree>
-      <p:nvGrpSpPr>
-        <p:cNvPr id="1" name=""/>
-        <p:cNvGrpSpPr/>
-        <p:nvPr/>
-      </p:nvGrpSpPr>
-      <p:grpSpPr>
-        <a:xfrm>
-          <a:off x="0" y="0"/>
-          <a:ext cx="0" cy="0"/>
-          <a:chOff x="0" y="0"/>
-          <a:chExt cx="0" cy="0"/>
-        </a:xfrm>
-      </p:grpSpPr>
-      <p:sp>
-        <p:nvSpPr>
-          <p:cNvPr id="2" name="Slide Image Placeholder 1"/>
-          <p:cNvSpPr>
-            <a:spLocks noGrp="1"/>
-          </p:cNvSpPr>
-          <p:nvPr>
-            <p:ph type="sldImg" idx="3"/>
-          </p:nvPr>
-        </p:nvSpPr>
-        <p:spPr/>
-      </p:sp>
-      <p:sp>
-        <p:nvSpPr>
-          <p:cNvPr id="3" name="Notes Placeholder 2"/>
-          <p:cNvSpPr>
-            <a:spLocks noGrp="1"/>
-          </p:cNvSpPr>
-          <p:nvPr>
-            <p:ph type="body" idx="1"/>
-          </p:nvPr>
-        </p:nvSpPr>
-        <p:spPr/>
-        <p:txBody>
-          <a:bodyPr/>
-          <a:lstStyle/>
-          <a:p>
-            <a:r>
-              <a:t>TIMING: 3 minutes. Separate modularity from deployment count: a monolith can carry real boundaries.</a:t>
-            </a:r>
-          </a:p>
-          <a:p/>
-          <a:p>
-            <a:r>
-              <a:t>WALK LEFT: one deployable whose insides grew without declared boundaries. This is where mud lives when it lives in a monolith. Note it still works, ships, and scales horizontally by replication.</a:t>
-            </a:r>
-          </a:p>
-          <a:p/>
-          <a:p>
-            <a:r>
-              <a:t>WALK RIGHT: the SAME deployable with four named modules, explicit interface edges, and a declared forbidden edge: HTTP must not import persistence internals. The forbidden edge is exactly what the erosion slide taught us to CHECK rather than hope.</a:t>
-            </a:r>
-          </a:p>
-          <a:p/>
-          <a:p>
-            <a:r>
-              <a:t>NON-CLAIM, twice if needed: monolith is not a synonym for mud, and splitting into services is not the only road to modularity. The modular monolith buys change locality without buying a network.</a:t>
-            </a:r>
-          </a:p>
-          <a:p/>
-          <a:p>
-            <a:r>
-              <a:t>TRANSITION: what if we DO want more than one deployable? Draw the same capabilities with the boundary moved.</a:t>
+              <a:t>TRANSITION: we can now see and measure the structure we have. Next: the deployment-scale shapes it could take, and what each one costs.</a:t>
             </a:r>
           </a:p>
         </p:txBody>
@@ -2367,19 +1979,31 @@
           <a:lstStyle/>
           <a:p>
             <a:r>
-              <a:t>TIMING: 3 minutes. Hold capabilities fixed and move only the boundary; the consequential change is the call becoming a contract.</a:t>
+              <a:t>TIMING: 4.5 minutes. Kill the monolith-equals-blob misconception, then hold capabilities fixed and move only the deployment boundary.</a:t>
             </a:r>
           </a:p>
           <a:p/>
           <a:p>
             <a:r>
-              <a:t>WALK A, B, C briskly; A and B are the previous slide compressed. The new object is C: booking and identity/policy as separately deployed services, each owning its own data.</a:t>
+              <a:t>WALK A: one deployable whose insides grew without declared boundaries. This is where mud lives when it lives in a monolith. Note it still works, ships, and scales horizontally by replication.</a:t>
             </a:r>
           </a:p>
           <a:p/>
           <a:p>
             <a:r>
-              <a:t>DWELL on the red caption: between B and C, a function call became a NETWORK CONTRACT. It can time out, be retried, be versioned, be down. Ownership also moved: policy data now lives with the policy service, and booking cannot peek at it.</a:t>
+              <a:t>WALK B: the SAME deployable with named modules, explicit interface edges, and a declared forbidden edge: HTTP must not import persistence internals. The forbidden edge is exactly what the erosion slide taught us to CHECK rather than hope. A and B are BOTH one deployable unit, and both can be replicated; the difference is declared interfaces, not deployment count.</a:t>
+            </a:r>
+          </a:p>
+          <a:p/>
+          <a:p>
+            <a:r>
+              <a:t>NON-CLAIM, twice if needed: monolith is not a synonym for mud, and splitting into services is not the only road to modularity. The modular monolith buys change locality without buying a network.</a:t>
+            </a:r>
+          </a:p>
+          <a:p/>
+          <a:p>
+            <a:r>
+              <a:t>WALK C: booking and identity/policy as separately deployed services, each owning its own data. DWELL on the red caption: between B and C, a function call became a NETWORK CONTRACT. It can time out, be retried, be versioned, be down. Ownership also moved: policy data now lives with the policy service, and booking cannot peek at it.</a:t>
             </a:r>
           </a:p>
           <a:p/>
@@ -2491,7 +2115,7 @@
           <a:p/>
           <a:p>
             <a:r>
-              <a:t>TRANSITION: put the three organizations side by side against named properties.</a:t>
+              <a:t>TRANSITION: that bill is one side of an economic comparison. Price the trade in general.</a:t>
             </a:r>
           </a:p>
         </p:txBody>
@@ -2561,37 +2185,31 @@
           <a:lstStyle/>
           <a:p>
             <a:r>
-              <a:t>TIMING: 3 minutes. One readable table, qualified wording; SOA and granularity framed without inventing categories.</a:t>
+              <a:t>TIMING: 2.5 minutes. The conceptual spine of the lecture, stated before any analysis: one system, two graphs, neither yet understood.</a:t>
             </a:r>
           </a:p>
           <a:p/>
           <a:p>
             <a:r>
-              <a:t>WALK TWO ROWS, let them read the rest: failure isolation (shared fate for both monolith forms; partial for services, and only IF designed for, since a synchronous chain re-couples fates) and change locality (the modular monolith already buys bounded change; services re-buy it at network prices).</a:t>
+              <a:t>NAME THE TWO GRAPHS: the internal architecture is the structure of the code we accepted: modules and the dependencies among them. The external dependency graph is the components we inherited: packages at versions, with maintainers, licenses, and build pipelines attached. Same kind of object (nodes and directed edges), different epistemics: the internal graph we can refactor; the inherited graph we can only select, wrap, or replace.</a:t>
             </a:r>
           </a:p>
           <a:p/>
           <a:p>
             <a:r>
-              <a:t>SOA, one breath: service-oriented architecture is the broad contract-first approach dating to the 2000s; microservices are one family within it favoring small, independently deployable services. "Macroservices" is informal shorthand for coarser services, not a standardized category; do not teach it as a fourth column.</a:t>
+              <a:t>STATE THE SPINE and promise to return to this exact picture at the end: we begin with two graphs we do not yet understand. We recover the internal graph. We examine the inherited graph. We decide which obligations require controls.</a:t>
             </a:r>
           </a:p>
           <a:p/>
           <a:p>
             <a:r>
-              <a:t>GRANULARITY rule of thumb: boundaries follow what changes together and who owns it, never LOC counts.</a:t>
+              <a:t>POINT AT THE DELTA: the lab-policy change must land somewhere in the left graph, and it may be constrained by edges in the right one. Neither claim can be evaluated yet; that is the day's work.</a:t>
             </a:r>
           </a:p>
           <a:p/>
           <a:p>
             <a:r>
-              <a:t>NON-CLAIM: every cell is a tendency; a counterexample exists for each. The table is for comparing against requirements, not for crowning a winner.</a:t>
-            </a:r>
-          </a:p>
-          <a:p/>
-          <a:p>
-            <a:r>
-              <a:t>TRANSITION: suppose judgment says restructure. How do we move without breaking what works?</a:t>
+              <a:t>TRANSITION: first movement, the internal graph. Question 1.</a:t>
             </a:r>
           </a:p>
         </p:txBody>
@@ -2661,25 +2279,19 @@
           <a:lstStyle/>
           <a:p>
             <a:r>
-              <a:t>TIMING: 2 minutes. A lecture map of five movements; not chronological phases.</a:t>
+              <a:t>TIMING: 2 minutes. A lecture map of three questions; two movements plus a closing judgment.</a:t>
             </a:r>
           </a:p>
           <a:p/>
           <a:p>
             <a:r>
-              <a:t>WALK the five questions in one breath each. The first three interrogate the structure we created; the fourth interrogates the components we inherited; the fifth makes the resulting judgments durable through evidence and controls.</a:t>
+              <a:t>WALK the three questions in one breath each. The first interrogates the structure we created: what shape did the implementation take, and what will changing it cost? The second interrogates the components we inherited: packages, licenses, provenance. The third makes the resulting judgments durable through evidence and controls.</a:t>
             </a:r>
           </a:p>
           <a:p/>
           <a:p>
             <a:r>
-              <a:t>SAY: architecture and its patterns get the largest share of the clock; supply chains get a real section, not a teaser. Both halves answer the same question from the cover.</a:t>
-            </a:r>
-          </a:p>
-          <a:p/>
-          <a:p>
-            <a:r>
-              <a:t>The work of the "working implementation" movement happens on the next slide: what the passing tests do and do not establish.</a:t>
+              <a:t>SAY: the distinctive Act III activity today is evaluating an implementation that already exists. We are not choosing an architecture on a blank page; we are deciding whether to keep, restructure, or replace one we accepted.</a:t>
             </a:r>
           </a:p>
           <a:p/>
@@ -2755,7 +2367,7 @@
           <a:lstStyle/>
           <a:p>
             <a:r>
-              <a:t>TIMING: 2.5 minutes. Restructuring is governed change: pin behavior, hold the invariant, move in reversible slices.</a:t>
+              <a:t>TIMING: 3.5 minutes. Restructuring is governed change: pin behavior, hold the invariant, move in reversible slices.</a:t>
             </a:r>
           </a:p>
           <a:p/>
@@ -2773,7 +2385,7 @@
           <a:p/>
           <a:p>
             <a:r>
-              <a:t>SCOPE: IDE-level refactorings (rename, extract) are assumed mechanics from earlier courses; today is about boundary-scale moves. Refactoring is not a synonym for service extraction.</a:t>
+              <a:t>SCOPE: IDE-level refactorings (rename, extract) are assumed mechanics from earlier courses; today is about boundary-scale moves. Refactoring is not a synonym for service extraction. If the exercise's answer was "restructure," THIS is what that answer obligates you to.</a:t>
             </a:r>
           </a:p>
           <a:p/>
@@ -2785,7 +2397,7 @@
           <a:p/>
           <a:p>
             <a:r>
-              <a:t>TRANSITION: you now have the alternatives, the prices, and the migration discipline. Decide.</a:t>
+              <a:t>TRANSITION: the same move for inherited obligations: convert one-off judgments into standing controls.</a:t>
             </a:r>
           </a:p>
         </p:txBody>
@@ -2855,37 +2467,37 @@
           <a:lstStyle/>
           <a:p>
             <a:r>
-              <a:t>TIMING: 3 minutes. Students make the section’s judgment call against stated requirements, then watch it move under perturbation.</a:t>
+              <a:t>TIMING: 5 minutes. The movement's judgment call, made against an implementation that already exists: not which architecture to pick, but whether restructuring is justified.</a:t>
             </a:r>
           </a:p>
           <a:p/>
           <a:p>
             <a:r>
-              <a:t>RUN IT: two minutes in pairs against the stated requirements, one minute of answers. Grade answers by the argument from requirements, not by the conclusion.</a:t>
+              <a:t>SET THE SCENE: your agent produced a working reservation service with weak internal boundaries, and the laboratory-policy change now touches four of five components (the measurement slide's table). More policy changes arrive every semester.</a:t>
             </a:r>
           </a:p>
           <a:p/>
           <a:p>
             <a:r>
-              <a:t>EXPECTED CENTER OF MASS: the modular monolith is plausible (change locality for the policy churn, no distribution bill, atomic bookings in one database). It is NOT prescribed; a defended monolith-and-discipline or a defended split is acceptable if it cites the requirements.</a:t>
+              <a:t>RUN IT: two to three minutes in pairs, two minutes of answers. The choice: retain the current structure, refactor into a modular monolith, or extract services. Grade answers by the argument from expected change and by the evidence offered, not by the conclusion.</a:t>
             </a:r>
           </a:p>
           <a:p/>
           <a:p>
             <a:r>
-              <a:t>EVIDENCE answers to fish for: measured change coupling (do policy changes actually spill?), load measurements, team interviews. An answer with no evidence that could change it is taste, not judgment.</a:t>
+              <a:t>EXPECTED CENTER OF MASS: refactoring toward a modular monolith is plausible (change locality for the policy churn, no distribution bill, atomic bookings in one database). Retain-with-discipline is defensible if the policy churn is doubted; extraction needs organizational forces we have not stated. Any answer must name EVIDENCE that would justify the restructuring cost: measured change coupling (do policy changes actually spill?), what the last policy change cost, characterization-test coverage before anything moves.</a:t>
             </a:r>
           </a:p>
           <a:p/>
           <a:p>
             <a:r>
-              <a:t>PERTURB: separate owning teams and a 100x read asymmetry are exactly the forces that make a service boundary start paying (Conway pressure, independent scaling). Watch who flips and make them say which requirement moved them.</a:t>
+              <a:t>PERTURB: if only one more policy change is ever expected, retaining wins (the pricing slide's horizon flip). If a second owning team takes over approvals, a service boundary starts paying (Conway pressure, independent deployment). Watch who flips and make them say which force moved them.</a:t>
             </a:r>
           </a:p>
           <a:p/>
           <a:p>
             <a:r>
-              <a:t>TRANSITION: everything so far examined code we WROTE. The service also ships code nobody in the room wrote. Section 4.</a:t>
+              <a:t>TRANSITION: everything so far examined code we WROTE. The service also ships code nobody in the room wrote. Question 2.</a:t>
             </a:r>
           </a:p>
         </p:txBody>
@@ -2961,7 +2573,7 @@
           <a:p/>
           <a:p>
             <a:r>
-              <a:t>FRAME: the recovered internal graph and the external package graph are the same kind of object (nodes, directed edges) with different epistemics: we can read our own code; we INHERIT other people’s, with its maintainers, vulnerabilities, licenses, and build pipelines.</a:t>
+              <a:t>FRAME: the recovered internal graph and the external package graph are the same kind of object (nodes, directed edges) with different epistemics: we can read our own code; we INHERIT other people's, with its maintainers, vulnerabilities, licenses, and build pipelines.</a:t>
             </a:r>
           </a:p>
           <a:p/>
@@ -3149,7 +2761,13 @@
           <a:p/>
           <a:p>
             <a:r>
-              <a:t>WALK THE LADDER: manifest (requested), lockfile (resolved and pinned), dependency graph (relations), SBOM (a shareable inventory of what ships, including things the manifest never saw). Four artifacts, not one.</a:t>
+              <a:t>WALK THE LADDER: manifest (requested), lockfile (resolved and pinned), dependency graph (relations), SBOM (a GENERATED, shareable inventory of what ships, including things the manifest never saw). Four artifacts, not one.</a:t>
+            </a:r>
+          </a:p>
+          <a:p/>
+          <a:p>
+            <a:r>
+              <a:t>QUALIFY, per the review: an SBOM is a generated inventory, not necessarily a complete inventory of what ships; it is only as complete as the generator's view of the build. Vendored code, base images, and system libraries can still escape it (previous slide).</a:t>
             </a:r>
           </a:p>
           <a:p/>
@@ -3237,7 +2855,7 @@
           <a:lstStyle/>
           <a:p>
             <a:r>
-              <a:t>TIMING: 3 minutes. Students judge two plausible libraries against requirements; neither column is the planted answer.</a:t>
+              <a:t>TIMING: 3.5 minutes. Students judge two plausible libraries against requirements; neither column is the planted answer.</a:t>
             </a:r>
           </a:p>
           <a:p/>
@@ -3437,25 +3055,31 @@
           <a:lstStyle/>
           <a:p>
             <a:r>
-              <a:t>TIMING: 2 minutes. Separate identity from origin; each mechanism buys a different, narrow guarantee.</a:t>
+              <a:t>TIMING: 3.5 minutes. Separate identity from origin, then read every mechanism as a conditional assurance.</a:t>
             </a:r>
           </a:p>
           <a:p/>
           <a:p>
             <a:r>
-              <a:t>THE DISTINCTION (left card): the SBOM told us WHAT ships. Provenance asks WHERE the artifact came from and HOW it was built: was this wheel built from the tagged source, by the project’s pipeline, or by whoever got to the registry first?</a:t>
+              <a:t>THE DISTINCTION (left card): the SBOM told us WHAT ships. Provenance asks WHERE the artifact came from and HOW it was built: was this wheel built from the tagged source, by the project's pipeline, or by whoever got to the registry first?</a:t>
             </a:r>
           </a:p>
           <a:p/>
           <a:p>
             <a:r>
-              <a:t>WALK THE TABLE: pinning stops surprise updates; hashes catch tampering in transit; signatures tie the artifact to a key holder; build attestations tie it to a build process; trusted registries reduce typosquatting and registry compromise. Different mechanisms, different risks: that is why "we pin versions" is not a provenance story.</a:t>
+              <a:t>WALK THE TABLE, two columns per row: the assurance each mechanism PROVIDES, and the assumption that assurance RESTS ON. Pinning assures no surprise updates, assuming the pinned bytes were right in the first place. Hashes assure the bytes match the record, assuming the recorded hash is authentic. Signatures assure that a key holder endorsed the artifact, assuming identities and keys are uncompromised. Attestations tie the artifact to a described build, assuming the attesting pipeline is honest.</a:t>
             </a:r>
           </a:p>
           <a:p/>
           <a:p>
             <a:r>
-              <a:t>THE RED LINE: none of these, alone or together, proves the absence of malicious code; a signed, attested artifact can faithfully deliver a maintainer’s own backdoor. They bound substitution risks.</a:t>
+              <a:t>DWELL ON THE LAST ROW: a trusted registry narrows substitution paths (typosquatting, look-alike packages), but it is itself a trust dependency; it establishes no protection against its own compromise. No mechanism on this slide discharges trust; each one relocates it to a named assumption, and naming the assumption is what makes it auditable.</a:t>
+            </a:r>
+          </a:p>
+          <a:p/>
+          <a:p>
+            <a:r>
+              <a:t>THE RED LINE: none of these, alone or together, proves the absence of malicious code; a signed, attested artifact can faithfully deliver a maintainer's own backdoor. They bound substitution risks.</a:t>
             </a:r>
           </a:p>
           <a:p/>
@@ -3531,7 +3155,7 @@
           <a:lstStyle/>
           <a:p>
             <a:r>
-              <a:t>TIMING: 2 minutes. A fast, forced decision among five real options, priced by exposure, compatibility, license, and urgency.</a:t>
+              <a:t>TIMING: 2.5 minutes. A fast, forced decision among five real options, priced by exposure, compatibility, license, and urgency.</a:t>
             </a:r>
           </a:p>
           <a:p/>
@@ -3555,7 +3179,7 @@
           <a:p/>
           <a:p>
             <a:r>
-              <a:t>TRANSITION: we have now made four supply-chain judgments by hand. The last slide of the section makes them durable.</a:t>
+              <a:t>TRANSITION: we have now made four supply-chain judgments by hand. Question 3 asks what makes such judgments durable.</a:t>
             </a:r>
           </a:p>
         </p:txBody>
@@ -3625,7 +3249,7 @@
           <a:lstStyle/>
           <a:p>
             <a:r>
-              <a:t>TIMING: 2 minutes. Convert the section’s one-off judgments into standing controls, each with its failure mode named.</a:t>
+              <a:t>TIMING: 2.5 minutes. Convert the section's one-off judgments into standing controls, each with its failure mode named.</a:t>
             </a:r>
           </a:p>
           <a:p/>
@@ -3743,19 +3367,25 @@
           <a:p/>
           <a:p>
             <a:r>
-              <a:t>WALK THE SKETCH: in the implementation we accepted, handlers call policy, auth, and storage; policy calls storage; everything meets at storage. The sketch is illustrative, not a claim about a real generated repository. Do NOT say agents inherently produce mud; the question is what we KNOW about the structure, which is nothing yet.</a:t>
+              <a:t>WALK THE SKETCH and NAME THE DISTINCTION: inside the accepted implementation sits an INTERNAL architecture (handlers call policy, auth, and storage; everything meets at storage), and alongside it an EXTERNAL dependency graph (the packages those modules import) that we did not draw at all. The sketch is illustrative, not a claim about a real generated repository. Do NOT say agents inherently produce mud; the question is what we KNOW about either graph, which is nothing yet.</a:t>
             </a:r>
           </a:p>
           <a:p/>
           <a:p>
             <a:r>
-              <a:t>ASK (footer): which files and obligations must change? What third-party packages does this code rely on? How would we know whether we can trust and update them? Take two or three answers; the honest answer is "we cannot tell from the tests."</a:t>
+              <a:t>ASK (footer): which modules must change? What third-party packages does this code rely on? How would we know whether we can trust and update them? Take two or three answers; the honest answer is "we cannot tell from the tests."</a:t>
             </a:r>
           </a:p>
           <a:p/>
           <a:p>
             <a:r>
               <a:t>ENGINEERING POINT: agents regenerate code quickly; engineers still need to know which architectural obligations survive a change, what must be revalidated, and whether changes propagate across boundaries. This is a question, not a verdict.</a:t>
+            </a:r>
+          </a:p>
+          <a:p/>
+          <a:p>
+            <a:r>
+              <a:t>TRANSITION: hold that picture; the next slide names its two halves.</a:t>
             </a:r>
           </a:p>
         </p:txBody>
@@ -3825,13 +3455,13 @@
           <a:lstStyle/>
           <a:p>
             <a:r>
-              <a:t>TIMING: 1 minutes. Open the synthesis: both graphs in one frame, then the Act III loop.</a:t>
+              <a:t>TIMING: 1 minutes. Open the closing movement: evidence and controls for both graphs.</a:t>
             </a:r>
           </a:p>
           <a:p/>
           <a:p>
             <a:r>
-              <a:t>SAY: reliable, in this lecture’s sense, means worthy of reliance as an evolving engineered system. We have evidence about structure and inheritance now; this section composes it.</a:t>
+              <a:t>SAY: we have judged the structure and the inheritance. Neither judgment survives on its own: restructuring needs a safety net of evidence, inherited obligations need standing controls, and both graphs need to be read together. This section supplies all three.</a:t>
             </a:r>
           </a:p>
           <a:p/>
@@ -3907,7 +3537,13 @@
           <a:lstStyle/>
           <a:p>
             <a:r>
-              <a:t>TIMING: 2.5 minutes. Compose both graphs with typed edges and read the lab change across them.</a:t>
+              <a:t>TIMING: 3.5 minutes. Compose both graphs with typed edges and read the lab change across them.</a:t>
+            </a:r>
+          </a:p>
+          <a:p/>
+          <a:p>
+            <a:r>
+              <a:t>CALL BACK to the opening: this is the same two-graph picture from the start of the lecture, now readable. There we could not say what either graph contained; now every edge names an obligation.</a:t>
             </a:r>
           </a:p>
           <a:p/>
@@ -4007,7 +3643,7 @@
           <a:lstStyle/>
           <a:p>
             <a:r>
-              <a:t>TIMING: 2.5 minutes. Re-walk the Act III loop with every box filled by one of today’s decisions; close the handoff.</a:t>
+              <a:t>TIMING: 2.5 minutes. Re-walk the Act III loop with every box filled by one of today's decisions; close the handoff.</a:t>
             </a:r>
           </a:p>
           <a:p/>
@@ -4025,19 +3661,19 @@
           <a:p/>
           <a:p>
             <a:r>
-              <a:t>ALIGNMENT runs ALONGSIDE realize and evidence, not after acceptance: dependency rules, architectural checks, CI gates, and release gates constrain what may happen and evaluate what did. Same geometry as Data Management’s closing chart; students should recognize it before reading a word.</a:t>
+              <a:t>ALIGNMENT runs ALONGSIDE realize and evidence, not after acceptance: dependency rules, architectural checks, CI gates, and release gates constrain what may happen and evaluate what did. Same geometry as Data Management's closing chart; students should recognize it before reading a word.</a:t>
             </a:r>
           </a:p>
           <a:p/>
           <a:p>
             <a:r>
-              <a:t>CLOSE (footer): structure and inheritance examined. The next lecture asks the narrower quantitative question: performance and reliability under load and failure. Do NOT trail into supply chains; that material lived here, today.</a:t>
+              <a:t>CLOSE (footer, say it as written): we have examined the system's structure and dependencies. Next we ask whether its behavior satisfies quantitative requirements under load and failure. Do NOT trail into dependency material; it lived here, today.</a:t>
             </a:r>
           </a:p>
           <a:p/>
           <a:p>
             <a:r>
-              <a:t>The cover’s question gets its answer shape: reliable means the obligations are stated, evidenced, and controlled: never a vibe.</a:t>
+              <a:t>The cover's question gets its answer shape: we inherited a structure and a set of obligations; reliance is justified when both are stated, evidenced, and controlled: never a vibe.</a:t>
             </a:r>
           </a:p>
         </p:txBody>
@@ -4107,13 +3743,13 @@
           <a:lstStyle/>
           <a:p>
             <a:r>
-              <a:t>TIMING: 1 minutes. Name the first movement: three diagnoses, not synonyms.</a:t>
+              <a:t>TIMING: 1 minutes. Name the first movement and the reversal it rests on.</a:t>
             </a:r>
           </a:p>
           <a:p/>
           <a:p>
             <a:r>
-              <a:t>SAY: before we can judge the architecture we built, we need vocabulary for the ways working software goes wrong structurally. Three terms, often blurred together, that diagnose different conditions and call for different responses.</a:t>
+              <a:t>SAY: Act I drew the model first and realized it second. Today the realization exists first, so the arrow reverses: we name the failure shapes working software takes (mud, erosion, debt), recover the structure from the code, measure it, and then decide whether restructuring is worth its cost.</a:t>
             </a:r>
           </a:p>
           <a:p/>
@@ -4189,13 +3825,19 @@
           <a:lstStyle/>
           <a:p>
             <a:r>
-              <a:t>TIMING: 2.5 minutes. Separate three conditions students conflate; each gets a tiny figure, not a prose card.</a:t>
+              <a:t>TIMING: 3 minutes. Separate three conditions students conflate; each gets a tiny figure, not a prose card.</a:t>
             </a:r>
           </a:p>
           <a:p/>
           <a:p>
             <a:r>
               <a:t>WALK THE THREE: mud is the ABSENCE of discernible boundaries (Foote &amp; Yoder); erosion PRESUPPOSES an intended boundary and names its bypass; debt is an economic claim about EXPECTED FUTURE COST, which may be a prudent trade.</a:t>
+            </a:r>
+          </a:p>
+          <a:p/>
+          <a:p>
+            <a:r>
+              <a:t>SAY EXPLICITLY: architectural erosion presupposes an intended architecture that is being violated; a big ball of mud need not: mud can arise where no coherent architecture was ever intended. That asymmetry is why the diagnoses call for different responses.</a:t>
             </a:r>
           </a:p>
           <a:p/>
@@ -4401,7 +4043,7 @@
           <a:p/>
           <a:p>
             <a:r>
-              <a:t>TRANSITION: if deliberate debt is a trade, we should be able to price it. Next slide prices one.</a:t>
+              <a:t>TRANSITION: judging our own debt requires seeing the structure we actually built. Next: recover it.</a:t>
             </a:r>
           </a:p>
         </p:txBody>
@@ -4501,7 +4143,7 @@
           <a:p/>
           <a:p>
             <a:r>
-              <a:t>QUALIFY: the horizon and the steady servicing rate are stated assumptions, not facts; real interest is lumpy. And the agent point: when an agent writes the code, the 10 and the 2 both shrink, but servicing, verification, and integration costs are dominated by humans understanding consequences, so the RATIO moves against shortcuts less than it appears.</a:t>
+              <a:t>QUALIFY: the horizon and the steady servicing rate are stated assumptions, not facts; real interest is lumpy. THE AGENT POINT, carefully: agentic development changes the economics; implementation becomes cheaper, but future maintenance costs need not decline proportionally, because servicing, verification, and integration are dominated by humans understanding consequences. Two edges to name: agents may make it cheaper to RETIRE debt (a mechanical refactor is cheap to dispatch), and they also make it easier to ACCUMULATE debt faster than engineers recognize it.</a:t>
             </a:r>
           </a:p>
           <a:p/>
@@ -4510,92 +4152,10 @@
               <a:t>SOURCE: McConnell 2008 via the ECE 595 Maintenance deck (rebuilt figure, attribution preserved).</a:t>
             </a:r>
           </a:p>
-        </p:txBody>
-      </p:sp>
-      <p:sp>
-        <p:nvSpPr>
-          <p:cNvPr id="4" name="Slide Number Placeholder 3"/>
-          <p:cNvSpPr>
-            <a:spLocks noGrp="1"/>
-          </p:cNvSpPr>
-          <p:nvPr>
-            <p:ph type="sldNum" idx="12"/>
-          </p:nvPr>
-        </p:nvSpPr>
-        <p:spPr/>
-      </p:sp>
-    </p:spTree>
-  </p:cSld>
-  <p:clrMapOvr>
-    <a:masterClrMapping/>
-  </p:clrMapOvr>
-</p:notes>
-</file>
-
-<file path=ppt/notesSlides/notesSlide9.xml><?xml version="1.0" encoding="utf-8"?>
-<p:notes xmlns:a="http://schemas.openxmlformats.org/drawingml/2006/main" xmlns:p="http://schemas.openxmlformats.org/presentationml/2006/main" xmlns:r="http://schemas.openxmlformats.org/officeDocument/2006/relationships">
-  <p:cSld>
-    <p:spTree>
-      <p:nvGrpSpPr>
-        <p:cNvPr id="1" name=""/>
-        <p:cNvGrpSpPr/>
-        <p:nvPr/>
-      </p:nvGrpSpPr>
-      <p:grpSpPr>
-        <a:xfrm>
-          <a:off x="0" y="0"/>
-          <a:ext cx="0" cy="0"/>
-          <a:chOff x="0" y="0"/>
-          <a:chExt cx="0" cy="0"/>
-        </a:xfrm>
-      </p:grpSpPr>
-      <p:sp>
-        <p:nvSpPr>
-          <p:cNvPr id="2" name="Slide Image Placeholder 1"/>
-          <p:cNvSpPr>
-            <a:spLocks noGrp="1"/>
-          </p:cNvSpPr>
-          <p:nvPr>
-            <p:ph type="sldImg" idx="3"/>
-          </p:nvPr>
-        </p:nvSpPr>
-        <p:spPr/>
-      </p:sp>
-      <p:sp>
-        <p:nvSpPr>
-          <p:cNvPr id="3" name="Notes Placeholder 2"/>
-          <p:cNvSpPr>
-            <a:spLocks noGrp="1"/>
-          </p:cNvSpPr>
-          <p:nvPr>
-            <p:ph type="body" idx="1"/>
-          </p:nvPr>
-        </p:nvSpPr>
-        <p:spPr/>
-        <p:txBody>
-          <a:bodyPr/>
-          <a:lstStyle/>
-          <a:p>
-            <a:r>
-              <a:t>TIMING: 1 minutes. Mark the reversal of direction from Act I: recover a model from the realization.</a:t>
-            </a:r>
-          </a:p>
           <a:p/>
           <a:p>
             <a:r>
-              <a:t>RECALL Act I in one sentence: architecture allocates responsibilities, boundaries, interactions, and coupling; design chooses mechanisms. There we drew the model first and realized it second.</a:t>
-            </a:r>
-          </a:p>
-          <a:p/>
-          <a:p>
-            <a:r>
-              <a:t>TODAY the realization exists first, so the arrow reverses: we recover a model from the code, then measure it, then check whether intended boundaries survived.</a:t>
-            </a:r>
-          </a:p>
-          <a:p/>
-          <a:p>
-            <a:r>
-              <a:t>Do not pause for discussion.</a:t>
+              <a:t>TRANSITION: you now have the structures, the bill, and the pricing discipline. Decide for OUR system.</a:t>
             </a:r>
           </a:p>
         </p:txBody>
@@ -11826,7 +11386,7 @@
                 </a:solidFill>
                 <a:latin typeface="Calibri"/>
               </a:rPr>
-              <a:t>Agentic technical debt:</a:t>
+              <a:t>(Agentic) Technical Debt:</a:t>
             </a:r>
           </a:p>
           <a:p>
@@ -11842,7 +11402,7 @@
                 </a:solidFill>
                 <a:latin typeface="Calibri"/>
               </a:rPr>
-              <a:t>Architecture and supply chains</a:t>
+              <a:t>Architecture and Dependencies</a:t>
             </a:r>
           </a:p>
         </p:txBody>
@@ -11887,7 +11447,7 @@
                 </a:solidFill>
                 <a:latin typeface="Calibri"/>
               </a:rPr>
-              <a:t>It works, but is it reliable?</a:t>
+              <a:t>It works. What did we inherit?</a:t>
             </a:r>
           </a:p>
         </p:txBody>
@@ -12194,9 +11754,9 @@
               <a:t>TODAY   </a:t>
             </a:r>
             <a:r>
-              <a:rPr sz="2000" b="0">
-                <a:solidFill>
-                  <a:srgbClr val="555960"/>
+              <a:rPr sz="2000" b="1">
+                <a:solidFill>
+                  <a:srgbClr val="5C4826"/>
                 </a:solidFill>
                 <a:latin typeface="Calibri"/>
               </a:rPr>
@@ -13068,7 +12628,7 @@
       </p:sp>
       <p:graphicFrame>
         <p:nvGraphicFramePr>
-          <p:cNvPr id="3" name="MetricsTable" descr="Fan-in and fan-out for each module of the recovered graph; four of five components are touched by the laboratory policy change"/>
+          <p:cNvPr id="3" name="MetricsTable" descr="Fan-in and fan-out for each module of the recovered graph; policy must change, and handlers, persistence, and the database schema may be affected by the laboratory policy change"/>
           <p:cNvGraphicFramePr/>
           <p:nvPr/>
         </p:nvGraphicFramePr>
@@ -13083,10 +12643,10 @@
                 <a:tableStyleId>{5C22544A-7EE6-4342-B048-85BDC9FD1C3A}</a:tableStyleId>
               </a:tblPr>
               <a:tblGrid>
-                <a:gridCol w="2011680"/>
-                <a:gridCol w="1051560"/>
-                <a:gridCol w="1051560"/>
-                <a:gridCol w="1280160"/>
+                <a:gridCol w="1965960"/>
+                <a:gridCol w="1143000"/>
+                <a:gridCol w="1143000"/>
+                <a:gridCol w="1143000"/>
               </a:tblGrid>
               <a:tr h="475488">
                 <a:tc>
@@ -13167,7 +12727,7 @@
                           </a:solidFill>
                           <a:latin typeface="Calibri"/>
                         </a:rPr>
-                        <a:t>touched?</a:t>
+                        <a:t>change?</a:t>
                       </a:r>
                     </a:p>
                   </a:txBody>
@@ -13257,7 +12817,7 @@
                           </a:solidFill>
                           <a:latin typeface="Calibri"/>
                         </a:rPr>
-                        <a:t>yes</a:t>
+                        <a:t>may</a:t>
                       </a:r>
                     </a:p>
                   </a:txBody>
@@ -13347,7 +12907,7 @@
                           </a:solidFill>
                           <a:latin typeface="Calibri"/>
                         </a:rPr>
-                        <a:t>yes Δ</a:t>
+                        <a:t>must Δ</a:t>
                       </a:r>
                     </a:p>
                   </a:txBody>
@@ -13527,7 +13087,7 @@
                           </a:solidFill>
                           <a:latin typeface="Calibri"/>
                         </a:rPr>
-                        <a:t>yes</a:t>
+                        <a:t>may</a:t>
                       </a:r>
                     </a:p>
                   </a:txBody>
@@ -13617,7 +13177,7 @@
                           </a:solidFill>
                           <a:latin typeface="Calibri"/>
                         </a:rPr>
-                        <a:t>schema</a:t>
+                        <a:t>may</a:t>
                       </a:r>
                     </a:p>
                   </a:txBody>
@@ -13640,8 +13200,8 @@
         </p:nvSpPr>
         <p:spPr>
           <a:xfrm>
-            <a:off x="411480" y="3977640"/>
-            <a:ext cx="5394960" cy="411480"/>
+            <a:off x="411480" y="3858768"/>
+            <a:ext cx="5394960" cy="603504"/>
           </a:xfrm>
           <a:prstGeom prst="rect">
             <a:avLst/>
@@ -13668,7 +13228,7 @@
                 </a:solidFill>
                 <a:latin typeface="Calibri"/>
               </a:rPr>
-              <a:t>4 of 5 components touched by one policy change</a:t>
+              <a:t>policy must change; handlers, persistence, and the database schema may follow</a:t>
             </a:r>
           </a:p>
         </p:txBody>
@@ -13798,7 +13358,7 @@
         </p:nvSpPr>
         <p:spPr>
           <a:xfrm>
-            <a:off x="411480" y="4526280"/>
+            <a:off x="411480" y="4572000"/>
             <a:ext cx="8321040" cy="1115568"/>
           </a:xfrm>
           <a:prstGeom prst="rect">
@@ -13826,7 +13386,7 @@
         </p:nvSpPr>
         <p:spPr>
           <a:xfrm>
-            <a:off x="557784" y="4599432"/>
+            <a:off x="557784" y="4645152"/>
             <a:ext cx="8046720" cy="1005840"/>
           </a:xfrm>
           <a:prstGeom prst="rect">
@@ -15051,2407 +14611,6 @@
 </p:sld>
 </file>
 
-<file path=ppt/slides/slide13.xml><?xml version="1.0" encoding="utf-8"?>
-<p:sld xmlns:a="http://schemas.openxmlformats.org/drawingml/2006/main" xmlns:p="http://schemas.openxmlformats.org/presentationml/2006/main" xmlns:r="http://schemas.openxmlformats.org/officeDocument/2006/relationships">
-  <p:cSld>
-    <p:spTree>
-      <p:nvGrpSpPr>
-        <p:cNvPr id="1" name=""/>
-        <p:cNvGrpSpPr/>
-        <p:nvPr/>
-      </p:nvGrpSpPr>
-      <p:grpSpPr>
-        <a:xfrm>
-          <a:off x="0" y="0"/>
-          <a:ext cx="0" cy="0"/>
-          <a:chOff x="0" y="0"/>
-          <a:chExt cx="0" cy="0"/>
-        </a:xfrm>
-      </p:grpSpPr>
-      <p:sp>
-        <p:nvSpPr>
-          <p:cNvPr id="2" name="Title"/>
-          <p:cNvSpPr>
-            <a:spLocks noGrp="1"/>
-          </p:cNvSpPr>
-          <p:nvPr>
-            <p:ph type="title"/>
-          </p:nvPr>
-        </p:nvSpPr>
-        <p:spPr>
-          <a:xfrm>
-            <a:off x="274320" y="128016"/>
-            <a:ext cx="8595360" cy="594360"/>
-          </a:xfrm>
-          <a:prstGeom prst="rect">
-            <a:avLst/>
-          </a:prstGeom>
-          <a:noFill/>
-          <a:ln>
-            <a:noFill/>
-          </a:ln>
-          <a:effectLst/>
-        </p:spPr>
-        <p:txBody>
-          <a:bodyPr rtlCol="0" anchor="ctr" wrap="square"/>
-          <a:lstStyle/>
-          <a:p>
-            <a:pPr algn="l">
-              <a:spcAft>
-                <a:spcPts val="0"/>
-              </a:spcAft>
-            </a:pPr>
-            <a:r>
-              <a:rPr sz="2400" b="0">
-                <a:solidFill>
-                  <a:srgbClr val="2D2D2D"/>
-                </a:solidFill>
-                <a:latin typeface="Calibri"/>
-              </a:rPr>
-              <a:t>Which architectural patterns fit our problem?</a:t>
-            </a:r>
-          </a:p>
-        </p:txBody>
-      </p:sp>
-      <p:sp>
-        <p:nvSpPr>
-          <p:cNvPr id="3" name="SectionLabel"/>
-          <p:cNvSpPr/>
-          <p:nvPr/>
-        </p:nvSpPr>
-        <p:spPr>
-          <a:xfrm>
-            <a:off x="640080" y="2240280"/>
-            <a:ext cx="7863840" cy="868680"/>
-          </a:xfrm>
-          <a:prstGeom prst="rect">
-            <a:avLst/>
-          </a:prstGeom>
-          <a:noFill/>
-          <a:ln>
-            <a:noFill/>
-          </a:ln>
-          <a:effectLst/>
-        </p:spPr>
-        <p:txBody>
-          <a:bodyPr rtlCol="0" anchor="ctr" wrap="square"/>
-          <a:lstStyle/>
-          <a:p>
-            <a:pPr algn="ctr">
-              <a:spcAft>
-                <a:spcPts val="0"/>
-              </a:spcAft>
-            </a:pPr>
-            <a:r>
-              <a:rPr sz="3600" b="1">
-                <a:solidFill>
-                  <a:srgbClr val="8E6F3E"/>
-                </a:solidFill>
-                <a:latin typeface="Calibri"/>
-              </a:rPr>
-              <a:t>SECTION 3</a:t>
-            </a:r>
-          </a:p>
-        </p:txBody>
-      </p:sp>
-      <p:sp>
-        <p:nvSpPr>
-          <p:cNvPr id="4" name="OrientingSentence"/>
-          <p:cNvSpPr/>
-          <p:nvPr/>
-        </p:nvSpPr>
-        <p:spPr>
-          <a:xfrm>
-            <a:off x="914400" y="3474720"/>
-            <a:ext cx="7315200" cy="1097280"/>
-          </a:xfrm>
-          <a:prstGeom prst="rect">
-            <a:avLst/>
-          </a:prstGeom>
-          <a:noFill/>
-          <a:ln>
-            <a:noFill/>
-          </a:ln>
-          <a:effectLst/>
-        </p:spPr>
-        <p:txBody>
-          <a:bodyPr rtlCol="0" anchor="t" wrap="square"/>
-          <a:lstStyle/>
-          <a:p>
-            <a:pPr algn="ctr">
-              <a:spcAft>
-                <a:spcPts val="0"/>
-              </a:spcAft>
-            </a:pPr>
-            <a:r>
-              <a:rPr sz="2200" b="0">
-                <a:solidFill>
-                  <a:srgbClr val="555960"/>
-                </a:solidFill>
-                <a:latin typeface="Calibri"/>
-              </a:rPr>
-              <a:t>The same service and the same requirements, held against each alternative. A pattern is a choice with expected consequences, not a ranking.</a:t>
-            </a:r>
-          </a:p>
-        </p:txBody>
-      </p:sp>
-    </p:spTree>
-  </p:cSld>
-  <p:clrMapOvr>
-    <a:masterClrMapping/>
-  </p:clrMapOvr>
-</p:sld>
-</file>
-
-<file path=ppt/slides/slide14.xml><?xml version="1.0" encoding="utf-8"?>
-<p:sld xmlns:a="http://schemas.openxmlformats.org/drawingml/2006/main" xmlns:p="http://schemas.openxmlformats.org/presentationml/2006/main" xmlns:r="http://schemas.openxmlformats.org/officeDocument/2006/relationships">
-  <p:cSld>
-    <p:spTree>
-      <p:nvGrpSpPr>
-        <p:cNvPr id="1" name=""/>
-        <p:cNvGrpSpPr/>
-        <p:nvPr/>
-      </p:nvGrpSpPr>
-      <p:grpSpPr>
-        <a:xfrm>
-          <a:off x="0" y="0"/>
-          <a:ext cx="0" cy="0"/>
-          <a:chOff x="0" y="0"/>
-          <a:chExt cx="0" cy="0"/>
-        </a:xfrm>
-      </p:grpSpPr>
-      <p:sp>
-        <p:nvSpPr>
-          <p:cNvPr id="2" name="Title"/>
-          <p:cNvSpPr>
-            <a:spLocks noGrp="1"/>
-          </p:cNvSpPr>
-          <p:nvPr>
-            <p:ph type="title"/>
-          </p:nvPr>
-        </p:nvSpPr>
-        <p:spPr>
-          <a:xfrm>
-            <a:off x="274320" y="128016"/>
-            <a:ext cx="8595360" cy="594360"/>
-          </a:xfrm>
-          <a:prstGeom prst="rect">
-            <a:avLst/>
-          </a:prstGeom>
-          <a:noFill/>
-          <a:ln>
-            <a:noFill/>
-          </a:ln>
-          <a:effectLst/>
-        </p:spPr>
-        <p:txBody>
-          <a:bodyPr rtlCol="0" anchor="ctr" wrap="square"/>
-          <a:lstStyle/>
-          <a:p>
-            <a:pPr algn="l">
-              <a:spcAft>
-                <a:spcPts val="0"/>
-              </a:spcAft>
-            </a:pPr>
-            <a:r>
-              <a:rPr sz="2400" b="0">
-                <a:solidFill>
-                  <a:srgbClr val="2D2D2D"/>
-                </a:solidFill>
-                <a:latin typeface="Calibri"/>
-              </a:rPr>
-              <a:t>Separate the dimensions before comparing patterns</a:t>
-            </a:r>
-          </a:p>
-        </p:txBody>
-      </p:sp>
-      <p:sp>
-        <p:nvSpPr>
-          <p:cNvPr id="3" name="DimCard"/>
-          <p:cNvSpPr/>
-          <p:nvPr/>
-        </p:nvSpPr>
-        <p:spPr>
-          <a:xfrm>
-            <a:off x="411480" y="1005840"/>
-            <a:ext cx="8321040" cy="1143000"/>
-          </a:xfrm>
-          <a:prstGeom prst="rect">
-            <a:avLst/>
-          </a:prstGeom>
-          <a:solidFill>
-            <a:srgbClr val="F5F1E8"/>
-          </a:solidFill>
-          <a:ln>
-            <a:noFill/>
-          </a:ln>
-          <a:effectLst/>
-        </p:spPr>
-        <p:txBody>
-          <a:bodyPr rtlCol="0" anchor="ctr" wrap="square"/>
-          <a:lstStyle/>
-          <a:p/>
-        </p:txBody>
-      </p:sp>
-      <p:sp>
-        <p:nvSpPr>
-          <p:cNvPr id="4" name="DimLabel"/>
-          <p:cNvSpPr/>
-          <p:nvPr/>
-        </p:nvSpPr>
-        <p:spPr>
-          <a:xfrm>
-            <a:off x="557784" y="1069848"/>
-            <a:ext cx="2926080" cy="1005840"/>
-          </a:xfrm>
-          <a:prstGeom prst="rect">
-            <a:avLst/>
-          </a:prstGeom>
-          <a:noFill/>
-          <a:ln>
-            <a:noFill/>
-          </a:ln>
-          <a:effectLst/>
-        </p:spPr>
-        <p:txBody>
-          <a:bodyPr rtlCol="0" anchor="ctr" wrap="square"/>
-          <a:lstStyle/>
-          <a:p>
-            <a:pPr algn="l">
-              <a:spcAft>
-                <a:spcPts val="0"/>
-              </a:spcAft>
-            </a:pPr>
-            <a:r>
-              <a:rPr sz="2000" b="1">
-                <a:solidFill>
-                  <a:srgbClr val="8E6F3E"/>
-                </a:solidFill>
-                <a:latin typeface="Calibri"/>
-              </a:rPr>
-              <a:t>WHO INTERACTS WITH WHOM</a:t>
-            </a:r>
-          </a:p>
-        </p:txBody>
-      </p:sp>
-      <p:sp>
-        <p:nvSpPr>
-          <p:cNvPr id="5" name="DimBody"/>
-          <p:cNvSpPr/>
-          <p:nvPr/>
-        </p:nvSpPr>
-        <p:spPr>
-          <a:xfrm>
-            <a:off x="3611880" y="1069848"/>
-            <a:ext cx="4983480" cy="1005840"/>
-          </a:xfrm>
-          <a:prstGeom prst="rect">
-            <a:avLst/>
-          </a:prstGeom>
-          <a:noFill/>
-          <a:ln>
-            <a:noFill/>
-          </a:ln>
-          <a:effectLst/>
-        </p:spPr>
-        <p:txBody>
-          <a:bodyPr rtlCol="0" anchor="ctr" wrap="square"/>
-          <a:lstStyle/>
-          <a:p>
-            <a:pPr algn="l">
-              <a:spcAft>
-                <a:spcPts val="0"/>
-              </a:spcAft>
-            </a:pPr>
-            <a:r>
-              <a:rPr sz="2000" b="0">
-                <a:solidFill>
-                  <a:srgbClr val="555960"/>
-                </a:solidFill>
-                <a:latin typeface="Calibri"/>
-              </a:rPr>
-              <a:t>Client/server names an interaction and deployment relationship between user and service</a:t>
-            </a:r>
-          </a:p>
-        </p:txBody>
-      </p:sp>
-      <p:sp>
-        <p:nvSpPr>
-          <p:cNvPr id="6" name="DimCard"/>
-          <p:cNvSpPr/>
-          <p:nvPr/>
-        </p:nvSpPr>
-        <p:spPr>
-          <a:xfrm>
-            <a:off x="411480" y="2286000"/>
-            <a:ext cx="8321040" cy="1143000"/>
-          </a:xfrm>
-          <a:prstGeom prst="rect">
-            <a:avLst/>
-          </a:prstGeom>
-          <a:solidFill>
-            <a:srgbClr val="FCFAF6"/>
-          </a:solidFill>
-          <a:ln>
-            <a:noFill/>
-          </a:ln>
-          <a:effectLst/>
-        </p:spPr>
-        <p:txBody>
-          <a:bodyPr rtlCol="0" anchor="ctr" wrap="square"/>
-          <a:lstStyle/>
-          <a:p/>
-        </p:txBody>
-      </p:sp>
-      <p:sp>
-        <p:nvSpPr>
-          <p:cNvPr id="7" name="DimLabel"/>
-          <p:cNvSpPr/>
-          <p:nvPr/>
-        </p:nvSpPr>
-        <p:spPr>
-          <a:xfrm>
-            <a:off x="557784" y="2350008"/>
-            <a:ext cx="2926080" cy="1005840"/>
-          </a:xfrm>
-          <a:prstGeom prst="rect">
-            <a:avLst/>
-          </a:prstGeom>
-          <a:noFill/>
-          <a:ln>
-            <a:noFill/>
-          </a:ln>
-          <a:effectLst/>
-        </p:spPr>
-        <p:txBody>
-          <a:bodyPr rtlCol="0" anchor="ctr" wrap="square"/>
-          <a:lstStyle/>
-          <a:p>
-            <a:pPr algn="l">
-              <a:spcAft>
-                <a:spcPts val="0"/>
-              </a:spcAft>
-            </a:pPr>
-            <a:r>
-              <a:rPr sz="2000" b="1">
-                <a:solidFill>
-                  <a:srgbClr val="8E6F3E"/>
-                </a:solidFill>
-                <a:latin typeface="Calibri"/>
-              </a:rPr>
-              <a:t>HOW MANY DEPLOYABLE UNITS</a:t>
-            </a:r>
-          </a:p>
-        </p:txBody>
-      </p:sp>
-      <p:sp>
-        <p:nvSpPr>
-          <p:cNvPr id="8" name="DimBody"/>
-          <p:cNvSpPr/>
-          <p:nvPr/>
-        </p:nvSpPr>
-        <p:spPr>
-          <a:xfrm>
-            <a:off x="3611880" y="2350008"/>
-            <a:ext cx="4983480" cy="1005840"/>
-          </a:xfrm>
-          <a:prstGeom prst="rect">
-            <a:avLst/>
-          </a:prstGeom>
-          <a:noFill/>
-          <a:ln>
-            <a:noFill/>
-          </a:ln>
-          <a:effectLst/>
-        </p:spPr>
-        <p:txBody>
-          <a:bodyPr rtlCol="0" anchor="ctr" wrap="square"/>
-          <a:lstStyle/>
-          <a:p>
-            <a:pPr algn="l">
-              <a:spcAft>
-                <a:spcPts val="0"/>
-              </a:spcAft>
-            </a:pPr>
-            <a:r>
-              <a:rPr sz="2000" b="0">
-                <a:solidFill>
-                  <a:srgbClr val="555960"/>
-                </a:solidFill>
-                <a:latin typeface="Calibri"/>
-              </a:rPr>
-              <a:t>Monolith versus services counts independently deployable server units</a:t>
-            </a:r>
-          </a:p>
-        </p:txBody>
-      </p:sp>
-      <p:sp>
-        <p:nvSpPr>
-          <p:cNvPr id="9" name="DimCard"/>
-          <p:cNvSpPr/>
-          <p:nvPr/>
-        </p:nvSpPr>
-        <p:spPr>
-          <a:xfrm>
-            <a:off x="411480" y="3566160"/>
-            <a:ext cx="8321040" cy="1143000"/>
-          </a:xfrm>
-          <a:prstGeom prst="rect">
-            <a:avLst/>
-          </a:prstGeom>
-          <a:solidFill>
-            <a:srgbClr val="F5F1E8"/>
-          </a:solidFill>
-          <a:ln>
-            <a:noFill/>
-          </a:ln>
-          <a:effectLst/>
-        </p:spPr>
-        <p:txBody>
-          <a:bodyPr rtlCol="0" anchor="ctr" wrap="square"/>
-          <a:lstStyle/>
-          <a:p/>
-        </p:txBody>
-      </p:sp>
-      <p:sp>
-        <p:nvSpPr>
-          <p:cNvPr id="10" name="DimLabel"/>
-          <p:cNvSpPr/>
-          <p:nvPr/>
-        </p:nvSpPr>
-        <p:spPr>
-          <a:xfrm>
-            <a:off x="557784" y="3630168"/>
-            <a:ext cx="2926080" cy="1005840"/>
-          </a:xfrm>
-          <a:prstGeom prst="rect">
-            <a:avLst/>
-          </a:prstGeom>
-          <a:noFill/>
-          <a:ln>
-            <a:noFill/>
-          </a:ln>
-          <a:effectLst/>
-        </p:spPr>
-        <p:txBody>
-          <a:bodyPr rtlCol="0" anchor="ctr" wrap="square"/>
-          <a:lstStyle/>
-          <a:p>
-            <a:pPr algn="l">
-              <a:spcAft>
-                <a:spcPts val="0"/>
-              </a:spcAft>
-            </a:pPr>
-            <a:r>
-              <a:rPr sz="2000" b="1">
-                <a:solidFill>
-                  <a:srgbClr val="8E6F3E"/>
-                </a:solidFill>
-                <a:latin typeface="Calibri"/>
-              </a:rPr>
-              <a:t>HOW IS THE INSIDE ORGANIZED</a:t>
-            </a:r>
-          </a:p>
-        </p:txBody>
-      </p:sp>
-      <p:sp>
-        <p:nvSpPr>
-          <p:cNvPr id="11" name="DimBody"/>
-          <p:cNvSpPr/>
-          <p:nvPr/>
-        </p:nvSpPr>
-        <p:spPr>
-          <a:xfrm>
-            <a:off x="3611880" y="3630168"/>
-            <a:ext cx="4983480" cy="1005840"/>
-          </a:xfrm>
-          <a:prstGeom prst="rect">
-            <a:avLst/>
-          </a:prstGeom>
-          <a:noFill/>
-          <a:ln>
-            <a:noFill/>
-          </a:ln>
-          <a:effectLst/>
-        </p:spPr>
-        <p:txBody>
-          <a:bodyPr rtlCol="0" anchor="ctr" wrap="square"/>
-          <a:lstStyle/>
-          <a:p>
-            <a:pPr algn="l">
-              <a:spcAft>
-                <a:spcPts val="0"/>
-              </a:spcAft>
-            </a:pPr>
-            <a:r>
-              <a:rPr sz="2000" b="0">
-                <a:solidFill>
-                  <a:srgbClr val="555960"/>
-                </a:solidFill>
-                <a:latin typeface="Calibri"/>
-              </a:rPr>
-              <a:t>Layering, repository and pipeline, RPC and events, ports and adapters (Act I’s catalogue)</a:t>
-            </a:r>
-          </a:p>
-        </p:txBody>
-      </p:sp>
-      <p:sp>
-        <p:nvSpPr>
-          <p:cNvPr id="12" name="BandCard"/>
-          <p:cNvSpPr/>
-          <p:nvPr/>
-        </p:nvSpPr>
-        <p:spPr>
-          <a:xfrm>
-            <a:off x="411480" y="4892040"/>
-            <a:ext cx="8321040" cy="731520"/>
-          </a:xfrm>
-          <a:prstGeom prst="rect">
-            <a:avLst/>
-          </a:prstGeom>
-          <a:solidFill>
-            <a:srgbClr val="F5F1E8"/>
-          </a:solidFill>
-          <a:ln>
-            <a:noFill/>
-          </a:ln>
-          <a:effectLst/>
-        </p:spPr>
-        <p:txBody>
-          <a:bodyPr rtlCol="0" anchor="ctr" wrap="square"/>
-          <a:lstStyle/>
-          <a:p/>
-        </p:txBody>
-      </p:sp>
-      <p:sp>
-        <p:nvSpPr>
-          <p:cNvPr id="13" name="BandText"/>
-          <p:cNvSpPr/>
-          <p:nvPr/>
-        </p:nvSpPr>
-        <p:spPr>
-          <a:xfrm>
-            <a:off x="557784" y="4965192"/>
-            <a:ext cx="8046720" cy="594360"/>
-          </a:xfrm>
-          <a:prstGeom prst="rect">
-            <a:avLst/>
-          </a:prstGeom>
-          <a:noFill/>
-          <a:ln>
-            <a:noFill/>
-          </a:ln>
-          <a:effectLst/>
-        </p:spPr>
-        <p:txBody>
-          <a:bodyPr rtlCol="0" anchor="ctr" wrap="square"/>
-          <a:lstStyle/>
-          <a:p>
-            <a:pPr algn="ctr">
-              <a:spcAft>
-                <a:spcPts val="0"/>
-              </a:spcAft>
-            </a:pPr>
-            <a:r>
-              <a:rPr sz="2000" b="1">
-                <a:solidFill>
-                  <a:srgbClr val="5C4826"/>
-                </a:solidFill>
-                <a:latin typeface="Calibri"/>
-              </a:rPr>
-              <a:t>A monolith can be client/server, layered, and modular at the same time</a:t>
-            </a:r>
-          </a:p>
-        </p:txBody>
-      </p:sp>
-    </p:spTree>
-  </p:cSld>
-  <p:clrMapOvr>
-    <a:masterClrMapping/>
-  </p:clrMapOvr>
-</p:sld>
-</file>
-
-<file path=ppt/slides/slide15.xml><?xml version="1.0" encoding="utf-8"?>
-<p:sld xmlns:a="http://schemas.openxmlformats.org/drawingml/2006/main" xmlns:p="http://schemas.openxmlformats.org/presentationml/2006/main" xmlns:r="http://schemas.openxmlformats.org/officeDocument/2006/relationships">
-  <p:cSld>
-    <p:spTree>
-      <p:nvGrpSpPr>
-        <p:cNvPr id="1" name=""/>
-        <p:cNvGrpSpPr/>
-        <p:nvPr/>
-      </p:nvGrpSpPr>
-      <p:grpSpPr>
-        <a:xfrm>
-          <a:off x="0" y="0"/>
-          <a:ext cx="0" cy="0"/>
-          <a:chOff x="0" y="0"/>
-          <a:chExt cx="0" cy="0"/>
-        </a:xfrm>
-      </p:grpSpPr>
-      <p:sp>
-        <p:nvSpPr>
-          <p:cNvPr id="2" name="Title"/>
-          <p:cNvSpPr>
-            <a:spLocks noGrp="1"/>
-          </p:cNvSpPr>
-          <p:nvPr>
-            <p:ph type="title"/>
-          </p:nvPr>
-        </p:nvSpPr>
-        <p:spPr>
-          <a:xfrm>
-            <a:off x="274320" y="128016"/>
-            <a:ext cx="8595360" cy="594360"/>
-          </a:xfrm>
-          <a:prstGeom prst="rect">
-            <a:avLst/>
-          </a:prstGeom>
-          <a:noFill/>
-          <a:ln>
-            <a:noFill/>
-          </a:ln>
-          <a:effectLst/>
-        </p:spPr>
-        <p:txBody>
-          <a:bodyPr rtlCol="0" anchor="ctr" wrap="square"/>
-          <a:lstStyle/>
-          <a:p>
-            <a:pPr algn="l">
-              <a:spcAft>
-                <a:spcPts val="0"/>
-              </a:spcAft>
-            </a:pPr>
-            <a:r>
-              <a:rPr sz="2400" b="0">
-                <a:solidFill>
-                  <a:srgbClr val="2D2D2D"/>
-                </a:solidFill>
-                <a:latin typeface="Calibri"/>
-              </a:rPr>
-              <a:t>Where should the reservation logic meet its users?</a:t>
-            </a:r>
-          </a:p>
-        </p:txBody>
-      </p:sp>
-      <p:sp>
-        <p:nvSpPr>
-          <p:cNvPr id="3" name="PanelLabel"/>
-          <p:cNvSpPr/>
-          <p:nvPr/>
-        </p:nvSpPr>
-        <p:spPr>
-          <a:xfrm>
-            <a:off x="411480" y="868680"/>
-            <a:ext cx="4023360" cy="365760"/>
-          </a:xfrm>
-          <a:prstGeom prst="rect">
-            <a:avLst/>
-          </a:prstGeom>
-          <a:noFill/>
-          <a:ln>
-            <a:noFill/>
-          </a:ln>
-          <a:effectLst/>
-        </p:spPr>
-        <p:txBody>
-          <a:bodyPr rtlCol="0" anchor="t" wrap="square"/>
-          <a:lstStyle/>
-          <a:p>
-            <a:pPr algn="l">
-              <a:spcAft>
-                <a:spcPts val="0"/>
-              </a:spcAft>
-            </a:pPr>
-            <a:r>
-              <a:rPr sz="2000" b="1">
-                <a:solidFill>
-                  <a:srgbClr val="8E6F3E"/>
-                </a:solidFill>
-                <a:latin typeface="Calibri"/>
-              </a:rPr>
-              <a:t>CLIENT / SERVER</a:t>
-            </a:r>
-          </a:p>
-        </p:txBody>
-      </p:sp>
-      <p:sp>
-        <p:nvSpPr>
-          <p:cNvPr id="4" name="CsCard" descr="Client/server: a browser reaches the HTTP API across a network and trust boundary; latency, network failure, and API compatibility live on that edge"/>
-          <p:cNvSpPr/>
-          <p:nvPr/>
-        </p:nvSpPr>
-        <p:spPr>
-          <a:xfrm>
-            <a:off x="411480" y="1261872"/>
-            <a:ext cx="4023360" cy="2834640"/>
-          </a:xfrm>
-          <a:prstGeom prst="rect">
-            <a:avLst/>
-          </a:prstGeom>
-          <a:solidFill>
-            <a:srgbClr val="F5F1E8"/>
-          </a:solidFill>
-          <a:ln>
-            <a:noFill/>
-          </a:ln>
-          <a:effectLst/>
-        </p:spPr>
-        <p:txBody>
-          <a:bodyPr rtlCol="0" anchor="ctr" wrap="square"/>
-          <a:lstStyle/>
-          <a:p/>
-        </p:txBody>
-      </p:sp>
-      <p:sp>
-        <p:nvSpPr>
-          <p:cNvPr id="5" name="CsBrowser"/>
-          <p:cNvSpPr/>
-          <p:nvPr/>
-        </p:nvSpPr>
-        <p:spPr>
-          <a:xfrm>
-            <a:off x="685800" y="1463040"/>
-            <a:ext cx="1463040" cy="548640"/>
-          </a:xfrm>
-          <a:prstGeom prst="rect">
-            <a:avLst/>
-          </a:prstGeom>
-          <a:solidFill>
-            <a:srgbClr val="8E6F3E"/>
-          </a:solidFill>
-          <a:ln>
-            <a:noFill/>
-          </a:ln>
-          <a:effectLst/>
-        </p:spPr>
-        <p:style>
-          <a:lnRef idx="1">
-            <a:schemeClr val="accent1"/>
-          </a:lnRef>
-          <a:fillRef idx="3">
-            <a:schemeClr val="accent1"/>
-          </a:fillRef>
-          <a:effectRef idx="2">
-            <a:schemeClr val="accent1"/>
-          </a:effectRef>
-          <a:fontRef idx="minor">
-            <a:schemeClr val="lt1"/>
-          </a:fontRef>
-        </p:style>
-        <p:txBody>
-          <a:bodyPr rtlCol="0" anchor="ctr" wrap="square"/>
-          <a:lstStyle/>
-          <a:p>
-            <a:pPr algn="ctr">
-              <a:spcAft>
-                <a:spcPts val="0"/>
-              </a:spcAft>
-            </a:pPr>
-            <a:r>
-              <a:rPr sz="2000" b="1">
-                <a:solidFill>
-                  <a:srgbClr val="FFFFFF"/>
-                </a:solidFill>
-                <a:latin typeface="Calibri"/>
-              </a:rPr>
-              <a:t>BROWSER</a:t>
-            </a:r>
-          </a:p>
-        </p:txBody>
-      </p:sp>
-      <p:sp>
-        <p:nvSpPr>
-          <p:cNvPr id="6" name="CsApi"/>
-          <p:cNvSpPr/>
-          <p:nvPr/>
-        </p:nvSpPr>
-        <p:spPr>
-          <a:xfrm>
-            <a:off x="2743200" y="1463040"/>
-            <a:ext cx="1463040" cy="548640"/>
-          </a:xfrm>
-          <a:prstGeom prst="rect">
-            <a:avLst/>
-          </a:prstGeom>
-          <a:solidFill>
-            <a:srgbClr val="8E6F3E"/>
-          </a:solidFill>
-          <a:ln>
-            <a:noFill/>
-          </a:ln>
-          <a:effectLst/>
-        </p:spPr>
-        <p:style>
-          <a:lnRef idx="1">
-            <a:schemeClr val="accent1"/>
-          </a:lnRef>
-          <a:fillRef idx="3">
-            <a:schemeClr val="accent1"/>
-          </a:fillRef>
-          <a:effectRef idx="2">
-            <a:schemeClr val="accent1"/>
-          </a:effectRef>
-          <a:fontRef idx="minor">
-            <a:schemeClr val="lt1"/>
-          </a:fontRef>
-        </p:style>
-        <p:txBody>
-          <a:bodyPr rtlCol="0" anchor="ctr" wrap="square"/>
-          <a:lstStyle/>
-          <a:p>
-            <a:pPr algn="ctr">
-              <a:spcAft>
-                <a:spcPts val="0"/>
-              </a:spcAft>
-            </a:pPr>
-            <a:r>
-              <a:rPr sz="2000" b="1">
-                <a:solidFill>
-                  <a:srgbClr val="FFFFFF"/>
-                </a:solidFill>
-                <a:latin typeface="Calibri"/>
-              </a:rPr>
-              <a:t>HTTP API</a:t>
-            </a:r>
-          </a:p>
-        </p:txBody>
-      </p:sp>
-      <p:cxnSp>
-        <p:nvCxnSpPr>
-          <p:cNvPr id="7" name="CsEdge"/>
-          <p:cNvCxnSpPr/>
-          <p:nvPr/>
-        </p:nvCxnSpPr>
-        <p:spPr>
-          <a:xfrm>
-            <a:off x="2148840" y="1737360"/>
-            <a:ext cx="594360" cy="0"/>
-          </a:xfrm>
-          <a:prstGeom prst="line">
-            <a:avLst/>
-          </a:prstGeom>
-          <a:ln w="19050">
-            <a:solidFill>
-              <a:srgbClr val="8E6F3E"/>
-            </a:solidFill>
-            <a:headEnd type="triangle" w="med" len="med"/>
-            <a:tailEnd type="triangle" w="med" len="med"/>
-          </a:ln>
-        </p:spPr>
-      </p:cxnSp>
-      <p:cxnSp>
-        <p:nvCxnSpPr>
-          <p:cNvPr id="8" name="CsBoundary"/>
-          <p:cNvCxnSpPr/>
-          <p:nvPr/>
-        </p:nvCxnSpPr>
-        <p:spPr>
-          <a:xfrm>
-            <a:off x="2446020" y="1325880"/>
-            <a:ext cx="0" cy="1188720"/>
-          </a:xfrm>
-          <a:prstGeom prst="line">
-            <a:avLst/>
-          </a:prstGeom>
-          <a:ln w="19050">
-            <a:solidFill>
-              <a:srgbClr val="5C4826"/>
-            </a:solidFill>
-            <a:prstDash val="dash"/>
-          </a:ln>
-        </p:spPr>
-      </p:cxnSp>
-      <p:sp>
-        <p:nvSpPr>
-          <p:cNvPr id="9" name="CsBoundaryLabel"/>
-          <p:cNvSpPr/>
-          <p:nvPr/>
-        </p:nvSpPr>
-        <p:spPr>
-          <a:xfrm>
-            <a:off x="685800" y="2240280"/>
-            <a:ext cx="3520440" cy="365760"/>
-          </a:xfrm>
-          <a:prstGeom prst="rect">
-            <a:avLst/>
-          </a:prstGeom>
-          <a:noFill/>
-          <a:ln>
-            <a:noFill/>
-          </a:ln>
-          <a:effectLst/>
-        </p:spPr>
-        <p:txBody>
-          <a:bodyPr rtlCol="0" anchor="ctr" wrap="square"/>
-          <a:lstStyle/>
-          <a:p>
-            <a:pPr algn="ctr">
-              <a:spcAft>
-                <a:spcPts val="0"/>
-              </a:spcAft>
-            </a:pPr>
-            <a:r>
-              <a:rPr sz="2000" b="1">
-                <a:solidFill>
-                  <a:srgbClr val="5C4826"/>
-                </a:solidFill>
-                <a:latin typeface="Calibri"/>
-              </a:rPr>
-              <a:t>network · trust boundary</a:t>
-            </a:r>
-          </a:p>
-        </p:txBody>
-      </p:sp>
-      <p:sp>
-        <p:nvSpPr>
-          <p:cNvPr id="10" name="CsCosts"/>
-          <p:cNvSpPr/>
-          <p:nvPr/>
-        </p:nvSpPr>
-        <p:spPr>
-          <a:xfrm>
-            <a:off x="685800" y="2697480"/>
-            <a:ext cx="3520440" cy="1280160"/>
-          </a:xfrm>
-          <a:prstGeom prst="rect">
-            <a:avLst/>
-          </a:prstGeom>
-          <a:noFill/>
-          <a:ln>
-            <a:noFill/>
-          </a:ln>
-          <a:effectLst/>
-        </p:spPr>
-        <p:txBody>
-          <a:bodyPr rtlCol="0" anchor="t" wrap="square"/>
-          <a:lstStyle/>
-          <a:p>
-            <a:pPr algn="l">
-              <a:spcAft>
-                <a:spcPts val="0"/>
-              </a:spcAft>
-            </a:pPr>
-            <a:r>
-              <a:rPr sz="2000" b="0">
-                <a:solidFill>
-                  <a:srgbClr val="555960"/>
-                </a:solidFill>
-                <a:latin typeface="Calibri"/>
-              </a:rPr>
-              <a:t>latency on every call</a:t>
-            </a:r>
-          </a:p>
-          <a:p>
-            <a:pPr algn="l">
-              <a:spcAft>
-                <a:spcPts val="0"/>
-              </a:spcAft>
-            </a:pPr>
-            <a:r>
-              <a:rPr sz="2000" b="0">
-                <a:solidFill>
-                  <a:srgbClr val="555960"/>
-                </a:solidFill>
-                <a:latin typeface="Calibri"/>
-              </a:rPr>
-              <a:t>network failure is a normal state</a:t>
-            </a:r>
-          </a:p>
-          <a:p>
-            <a:pPr algn="l">
-              <a:spcAft>
-                <a:spcPts val="0"/>
-              </a:spcAft>
-            </a:pPr>
-            <a:r>
-              <a:rPr sz="2000" b="0">
-                <a:solidFill>
-                  <a:srgbClr val="555960"/>
-                </a:solidFill>
-                <a:latin typeface="Calibri"/>
-              </a:rPr>
-              <a:t>API compatibility across versions</a:t>
-            </a:r>
-          </a:p>
-        </p:txBody>
-      </p:sp>
-      <p:sp>
-        <p:nvSpPr>
-          <p:cNvPr id="11" name="PanelLabel"/>
-          <p:cNvSpPr/>
-          <p:nvPr/>
-        </p:nvSpPr>
-        <p:spPr>
-          <a:xfrm>
-            <a:off x="4617720" y="868680"/>
-            <a:ext cx="4114800" cy="365760"/>
-          </a:xfrm>
-          <a:prstGeom prst="rect">
-            <a:avLst/>
-          </a:prstGeom>
-          <a:noFill/>
-          <a:ln>
-            <a:noFill/>
-          </a:ln>
-          <a:effectLst/>
-        </p:spPr>
-        <p:txBody>
-          <a:bodyPr rtlCol="0" anchor="t" wrap="square"/>
-          <a:lstStyle/>
-          <a:p>
-            <a:pPr algn="l">
-              <a:spcAft>
-                <a:spcPts val="0"/>
-              </a:spcAft>
-            </a:pPr>
-            <a:r>
-              <a:rPr sz="2000" b="1">
-                <a:solidFill>
-                  <a:srgbClr val="8E6F3E"/>
-                </a:solidFill>
-                <a:latin typeface="Calibri"/>
-              </a:rPr>
-              <a:t>LOCAL APPLICATION</a:t>
-            </a:r>
-          </a:p>
-        </p:txBody>
-      </p:sp>
-      <p:sp>
-        <p:nvSpPr>
-          <p:cNvPr id="12" name="LocCard" descr="Local desktop application: user interface, booking rules, and stored data on one machine; offline works; updates reach each machine separately"/>
-          <p:cNvSpPr/>
-          <p:nvPr/>
-        </p:nvSpPr>
-        <p:spPr>
-          <a:xfrm>
-            <a:off x="4617720" y="1261872"/>
-            <a:ext cx="4114800" cy="2834640"/>
-          </a:xfrm>
-          <a:prstGeom prst="rect">
-            <a:avLst/>
-          </a:prstGeom>
-          <a:solidFill>
-            <a:srgbClr val="FCFAF6"/>
-          </a:solidFill>
-          <a:ln>
-            <a:noFill/>
-          </a:ln>
-          <a:effectLst/>
-        </p:spPr>
-        <p:txBody>
-          <a:bodyPr rtlCol="0" anchor="ctr" wrap="square"/>
-          <a:lstStyle/>
-          <a:p/>
-        </p:txBody>
-      </p:sp>
-      <p:sp>
-        <p:nvSpPr>
-          <p:cNvPr id="13" name="LocBox"/>
-          <p:cNvSpPr/>
-          <p:nvPr/>
-        </p:nvSpPr>
-        <p:spPr>
-          <a:xfrm>
-            <a:off x="4892040" y="1463040"/>
-            <a:ext cx="3566160" cy="868680"/>
-          </a:xfrm>
-          <a:prstGeom prst="rect">
-            <a:avLst/>
-          </a:prstGeom>
-          <a:solidFill>
-            <a:srgbClr val="F5F1E8"/>
-          </a:solidFill>
-          <a:ln w="19050">
-            <a:solidFill>
-              <a:srgbClr val="8E6F3E"/>
-            </a:solidFill>
-          </a:ln>
-          <a:effectLst/>
-        </p:spPr>
-        <p:txBody>
-          <a:bodyPr rtlCol="0" anchor="ctr" wrap="square"/>
-          <a:lstStyle/>
-          <a:p>
-            <a:pPr algn="ctr">
-              <a:spcAft>
-                <a:spcPts val="0"/>
-              </a:spcAft>
-            </a:pPr>
-            <a:r>
-              <a:rPr sz="2000" b="1">
-                <a:solidFill>
-                  <a:srgbClr val="2D2D2D"/>
-                </a:solidFill>
-                <a:latin typeface="Calibri"/>
-              </a:rPr>
-              <a:t>ONE MACHINE</a:t>
-            </a:r>
-          </a:p>
-          <a:p>
-            <a:pPr algn="ctr">
-              <a:spcAft>
-                <a:spcPts val="0"/>
-              </a:spcAft>
-            </a:pPr>
-            <a:r>
-              <a:rPr sz="2000" b="0">
-                <a:solidFill>
-                  <a:srgbClr val="555960"/>
-                </a:solidFill>
-                <a:latin typeface="Calibri"/>
-              </a:rPr>
-              <a:t>UI + booking rules + local data</a:t>
-            </a:r>
-          </a:p>
-        </p:txBody>
-      </p:sp>
-      <p:sp>
-        <p:nvSpPr>
-          <p:cNvPr id="14" name="LocCosts"/>
-          <p:cNvSpPr/>
-          <p:nvPr/>
-        </p:nvSpPr>
-        <p:spPr>
-          <a:xfrm>
-            <a:off x="4892040" y="2697480"/>
-            <a:ext cx="3566160" cy="1280160"/>
-          </a:xfrm>
-          <a:prstGeom prst="rect">
-            <a:avLst/>
-          </a:prstGeom>
-          <a:noFill/>
-          <a:ln>
-            <a:noFill/>
-          </a:ln>
-          <a:effectLst/>
-        </p:spPr>
-        <p:txBody>
-          <a:bodyPr rtlCol="0" anchor="t" wrap="square"/>
-          <a:lstStyle/>
-          <a:p>
-            <a:pPr algn="l">
-              <a:spcAft>
-                <a:spcPts val="0"/>
-              </a:spcAft>
-            </a:pPr>
-            <a:r>
-              <a:rPr sz="2000" b="0">
-                <a:solidFill>
-                  <a:srgbClr val="555960"/>
-                </a:solidFill>
-                <a:latin typeface="Calibri"/>
-              </a:rPr>
-              <a:t>offline keeps working</a:t>
-            </a:r>
-          </a:p>
-          <a:p>
-            <a:pPr algn="l">
-              <a:spcAft>
-                <a:spcPts val="0"/>
-              </a:spcAft>
-            </a:pPr>
-            <a:r>
-              <a:rPr sz="2000" b="0">
-                <a:solidFill>
-                  <a:srgbClr val="555960"/>
-                </a:solidFill>
-                <a:latin typeface="Calibri"/>
-              </a:rPr>
-              <a:t>updates visit every machine</a:t>
-            </a:r>
-          </a:p>
-          <a:p>
-            <a:pPr algn="l">
-              <a:spcAft>
-                <a:spcPts val="0"/>
-              </a:spcAft>
-            </a:pPr>
-            <a:r>
-              <a:rPr sz="2000" b="0">
-                <a:solidFill>
-                  <a:srgbClr val="555960"/>
-                </a:solidFill>
-                <a:latin typeface="Calibri"/>
-              </a:rPr>
-              <a:t>shared state needs a new answer</a:t>
-            </a:r>
-          </a:p>
-        </p:txBody>
-      </p:sp>
-      <p:sp>
-        <p:nvSpPr>
-          <p:cNvPr id="15" name="AskCard"/>
-          <p:cNvSpPr/>
-          <p:nvPr/>
-        </p:nvSpPr>
-        <p:spPr>
-          <a:xfrm>
-            <a:off x="411480" y="4343400"/>
-            <a:ext cx="8321040" cy="960120"/>
-          </a:xfrm>
-          <a:prstGeom prst="rect">
-            <a:avLst/>
-          </a:prstGeom>
-          <a:solidFill>
-            <a:srgbClr val="F5F1E8"/>
-          </a:solidFill>
-          <a:ln>
-            <a:noFill/>
-          </a:ln>
-          <a:effectLst/>
-        </p:spPr>
-        <p:txBody>
-          <a:bodyPr rtlCol="0" anchor="ctr" wrap="square"/>
-          <a:lstStyle/>
-          <a:p/>
-        </p:txBody>
-      </p:sp>
-      <p:sp>
-        <p:nvSpPr>
-          <p:cNvPr id="16" name="AskText"/>
-          <p:cNvSpPr/>
-          <p:nvPr/>
-        </p:nvSpPr>
-        <p:spPr>
-          <a:xfrm>
-            <a:off x="557784" y="4416552"/>
-            <a:ext cx="8046720" cy="822960"/>
-          </a:xfrm>
-          <a:prstGeom prst="rect">
-            <a:avLst/>
-          </a:prstGeom>
-          <a:noFill/>
-          <a:ln>
-            <a:noFill/>
-          </a:ln>
-          <a:effectLst/>
-        </p:spPr>
-        <p:txBody>
-          <a:bodyPr rtlCol="0" anchor="t" wrap="square"/>
-          <a:lstStyle/>
-          <a:p>
-            <a:pPr algn="l">
-              <a:spcAft>
-                <a:spcPts val="0"/>
-              </a:spcAft>
-            </a:pPr>
-            <a:r>
-              <a:rPr sz="2000" b="1">
-                <a:solidFill>
-                  <a:srgbClr val="2D2D2D"/>
-                </a:solidFill>
-                <a:latin typeface="Calibri"/>
-              </a:rPr>
-              <a:t>Where should authorization, secrets, and offline behavior live?</a:t>
-            </a:r>
-          </a:p>
-          <a:p>
-            <a:pPr algn="l">
-              <a:spcAft>
-                <a:spcPts val="0"/>
-              </a:spcAft>
-            </a:pPr>
-            <a:r>
-              <a:rPr sz="2000" b="0">
-                <a:solidFill>
-                  <a:srgbClr val="555960"/>
-                </a:solidFill>
-                <a:latin typeface="Calibri"/>
-              </a:rPr>
-              <a:t>Each answer moves with the boundary; none of them is free.</a:t>
-            </a:r>
-          </a:p>
-        </p:txBody>
-      </p:sp>
-      <p:sp>
-        <p:nvSpPr>
-          <p:cNvPr id="17" name="FooterBand"/>
-          <p:cNvSpPr/>
-          <p:nvPr/>
-        </p:nvSpPr>
-        <p:spPr>
-          <a:xfrm>
-            <a:off x="274320" y="5879592"/>
-            <a:ext cx="8595360" cy="502920"/>
-          </a:xfrm>
-          <a:prstGeom prst="rect">
-            <a:avLst/>
-          </a:prstGeom>
-          <a:solidFill>
-            <a:srgbClr val="8E6F3E"/>
-          </a:solidFill>
-          <a:ln>
-            <a:noFill/>
-          </a:ln>
-          <a:effectLst/>
-        </p:spPr>
-        <p:style>
-          <a:lnRef idx="1">
-            <a:schemeClr val="accent1"/>
-          </a:lnRef>
-          <a:fillRef idx="3">
-            <a:schemeClr val="accent1"/>
-          </a:fillRef>
-          <a:effectRef idx="2">
-            <a:schemeClr val="accent1"/>
-          </a:effectRef>
-          <a:fontRef idx="minor">
-            <a:schemeClr val="lt1"/>
-          </a:fontRef>
-        </p:style>
-        <p:txBody>
-          <a:bodyPr rtlCol="0" anchor="ctr" wrap="square"/>
-          <a:lstStyle/>
-          <a:p/>
-        </p:txBody>
-      </p:sp>
-      <p:sp>
-        <p:nvSpPr>
-          <p:cNvPr id="18" name="FooterBandText"/>
-          <p:cNvSpPr/>
-          <p:nvPr/>
-        </p:nvSpPr>
-        <p:spPr>
-          <a:xfrm>
-            <a:off x="384048" y="5897880"/>
-            <a:ext cx="8375904" cy="457200"/>
-          </a:xfrm>
-          <a:prstGeom prst="rect">
-            <a:avLst/>
-          </a:prstGeom>
-          <a:noFill/>
-          <a:ln>
-            <a:noFill/>
-          </a:ln>
-          <a:effectLst/>
-        </p:spPr>
-        <p:txBody>
-          <a:bodyPr rtlCol="0" anchor="ctr" wrap="square"/>
-          <a:lstStyle/>
-          <a:p>
-            <a:pPr algn="ctr">
-              <a:spcAft>
-                <a:spcPts val="0"/>
-              </a:spcAft>
-            </a:pPr>
-            <a:r>
-              <a:rPr sz="2000" b="1">
-                <a:solidFill>
-                  <a:srgbClr val="FFFFFF"/>
-                </a:solidFill>
-                <a:latin typeface="Calibri"/>
-              </a:rPr>
-              <a:t>The boundary placement decides which failures are yours to engineer</a:t>
-            </a:r>
-          </a:p>
-        </p:txBody>
-      </p:sp>
-    </p:spTree>
-  </p:cSld>
-  <p:clrMapOvr>
-    <a:masterClrMapping/>
-  </p:clrMapOvr>
-</p:sld>
-</file>
-
-<file path=ppt/slides/slide16.xml><?xml version="1.0" encoding="utf-8"?>
-<p:sld xmlns:a="http://schemas.openxmlformats.org/drawingml/2006/main" xmlns:p="http://schemas.openxmlformats.org/presentationml/2006/main" xmlns:r="http://schemas.openxmlformats.org/officeDocument/2006/relationships">
-  <p:cSld>
-    <p:spTree>
-      <p:nvGrpSpPr>
-        <p:cNvPr id="1" name=""/>
-        <p:cNvGrpSpPr/>
-        <p:nvPr/>
-      </p:nvGrpSpPr>
-      <p:grpSpPr>
-        <a:xfrm>
-          <a:off x="0" y="0"/>
-          <a:ext cx="0" cy="0"/>
-          <a:chOff x="0" y="0"/>
-          <a:chExt cx="0" cy="0"/>
-        </a:xfrm>
-      </p:grpSpPr>
-      <p:sp>
-        <p:nvSpPr>
-          <p:cNvPr id="2" name="Title"/>
-          <p:cNvSpPr>
-            <a:spLocks noGrp="1"/>
-          </p:cNvSpPr>
-          <p:nvPr>
-            <p:ph type="title"/>
-          </p:nvPr>
-        </p:nvSpPr>
-        <p:spPr>
-          <a:xfrm>
-            <a:off x="274320" y="128016"/>
-            <a:ext cx="8595360" cy="594360"/>
-          </a:xfrm>
-          <a:prstGeom prst="rect">
-            <a:avLst/>
-          </a:prstGeom>
-          <a:noFill/>
-          <a:ln>
-            <a:noFill/>
-          </a:ln>
-          <a:effectLst/>
-        </p:spPr>
-        <p:txBody>
-          <a:bodyPr rtlCol="0" anchor="ctr" wrap="square"/>
-          <a:lstStyle/>
-          <a:p>
-            <a:pPr algn="l">
-              <a:spcAft>
-                <a:spcPts val="0"/>
-              </a:spcAft>
-            </a:pPr>
-            <a:r>
-              <a:rPr sz="2400" b="0">
-                <a:solidFill>
-                  <a:srgbClr val="2D2D2D"/>
-                </a:solidFill>
-                <a:latin typeface="Calibri"/>
-              </a:rPr>
-              <a:t>A monolith is one deployable, not one blob</a:t>
-            </a:r>
-          </a:p>
-        </p:txBody>
-      </p:sp>
-      <p:sp>
-        <p:nvSpPr>
-          <p:cNvPr id="3" name="PanelLabel"/>
-          <p:cNvSpPr/>
-          <p:nvPr/>
-        </p:nvSpPr>
-        <p:spPr>
-          <a:xfrm>
-            <a:off x="411480" y="868680"/>
-            <a:ext cx="4023360" cy="365760"/>
-          </a:xfrm>
-          <a:prstGeom prst="rect">
-            <a:avLst/>
-          </a:prstGeom>
-          <a:noFill/>
-          <a:ln>
-            <a:noFill/>
-          </a:ln>
-          <a:effectLst/>
-        </p:spPr>
-        <p:txBody>
-          <a:bodyPr rtlCol="0" anchor="t" wrap="square"/>
-          <a:lstStyle/>
-          <a:p>
-            <a:pPr algn="l">
-              <a:spcAft>
-                <a:spcPts val="0"/>
-              </a:spcAft>
-            </a:pPr>
-            <a:r>
-              <a:rPr sz="2000" b="1">
-                <a:solidFill>
-                  <a:srgbClr val="8E6F3E"/>
-                </a:solidFill>
-                <a:latin typeface="Calibri"/>
-              </a:rPr>
-              <a:t>UNSTRUCTURED MONOLITH</a:t>
-            </a:r>
-          </a:p>
-        </p:txBody>
-      </p:sp>
-      <p:sp>
-        <p:nvSpPr>
-          <p:cNvPr id="4" name="UmCard" descr="Unstructured monolith: one deployable unit whose internal parts depend on each other without declared boundaries"/>
-          <p:cNvSpPr/>
-          <p:nvPr/>
-        </p:nvSpPr>
-        <p:spPr>
-          <a:xfrm>
-            <a:off x="411480" y="1261872"/>
-            <a:ext cx="4023360" cy="2971800"/>
-          </a:xfrm>
-          <a:prstGeom prst="rect">
-            <a:avLst/>
-          </a:prstGeom>
-          <a:solidFill>
-            <a:srgbClr val="F5F1E8"/>
-          </a:solidFill>
-          <a:ln>
-            <a:noFill/>
-          </a:ln>
-          <a:effectLst/>
-        </p:spPr>
-        <p:txBody>
-          <a:bodyPr rtlCol="0" anchor="ctr" wrap="square"/>
-          <a:lstStyle/>
-          <a:p/>
-        </p:txBody>
-      </p:sp>
-      <p:sp>
-        <p:nvSpPr>
-          <p:cNvPr id="5" name="UmOuter"/>
-          <p:cNvSpPr/>
-          <p:nvPr/>
-        </p:nvSpPr>
-        <p:spPr>
-          <a:xfrm>
-            <a:off x="640080" y="1444752"/>
-            <a:ext cx="3566160" cy="2560320"/>
-          </a:xfrm>
-          <a:prstGeom prst="rect">
-            <a:avLst/>
-          </a:prstGeom>
-          <a:solidFill>
-            <a:srgbClr val="FCFAF6"/>
-          </a:solidFill>
-          <a:ln w="19050">
-            <a:solidFill>
-              <a:srgbClr val="8E6F3E"/>
-            </a:solidFill>
-          </a:ln>
-          <a:effectLst/>
-        </p:spPr>
-        <p:txBody>
-          <a:bodyPr rtlCol="0" anchor="t" wrap="square"/>
-          <a:lstStyle/>
-          <a:p/>
-        </p:txBody>
-      </p:sp>
-      <p:sp>
-        <p:nvSpPr>
-          <p:cNvPr id="6" name="UmBox"/>
-          <p:cNvSpPr/>
-          <p:nvPr/>
-        </p:nvSpPr>
-        <p:spPr>
-          <a:xfrm>
-            <a:off x="914400" y="1691640"/>
-            <a:ext cx="914400" cy="411480"/>
-          </a:xfrm>
-          <a:prstGeom prst="rect">
-            <a:avLst/>
-          </a:prstGeom>
-          <a:solidFill>
-            <a:srgbClr val="F5F1E8"/>
-          </a:solidFill>
-          <a:ln w="15875">
-            <a:solidFill>
-              <a:srgbClr val="555960"/>
-            </a:solidFill>
-          </a:ln>
-          <a:effectLst/>
-        </p:spPr>
-        <p:txBody>
-          <a:bodyPr rtlCol="0" anchor="t" wrap="square"/>
-          <a:lstStyle/>
-          <a:p/>
-        </p:txBody>
-      </p:sp>
-      <p:sp>
-        <p:nvSpPr>
-          <p:cNvPr id="7" name="UmBox"/>
-          <p:cNvSpPr/>
-          <p:nvPr/>
-        </p:nvSpPr>
-        <p:spPr>
-          <a:xfrm>
-            <a:off x="2606040" y="1691640"/>
-            <a:ext cx="914400" cy="411480"/>
-          </a:xfrm>
-          <a:prstGeom prst="rect">
-            <a:avLst/>
-          </a:prstGeom>
-          <a:solidFill>
-            <a:srgbClr val="F5F1E8"/>
-          </a:solidFill>
-          <a:ln w="15875">
-            <a:solidFill>
-              <a:srgbClr val="555960"/>
-            </a:solidFill>
-          </a:ln>
-          <a:effectLst/>
-        </p:spPr>
-        <p:txBody>
-          <a:bodyPr rtlCol="0" anchor="t" wrap="square"/>
-          <a:lstStyle/>
-          <a:p/>
-        </p:txBody>
-      </p:sp>
-      <p:sp>
-        <p:nvSpPr>
-          <p:cNvPr id="8" name="UmBox"/>
-          <p:cNvSpPr/>
-          <p:nvPr/>
-        </p:nvSpPr>
-        <p:spPr>
-          <a:xfrm>
-            <a:off x="1143000" y="3154680"/>
-            <a:ext cx="914400" cy="411480"/>
-          </a:xfrm>
-          <a:prstGeom prst="rect">
-            <a:avLst/>
-          </a:prstGeom>
-          <a:solidFill>
-            <a:srgbClr val="F5F1E8"/>
-          </a:solidFill>
-          <a:ln w="15875">
-            <a:solidFill>
-              <a:srgbClr val="555960"/>
-            </a:solidFill>
-          </a:ln>
-          <a:effectLst/>
-        </p:spPr>
-        <p:txBody>
-          <a:bodyPr rtlCol="0" anchor="t" wrap="square"/>
-          <a:lstStyle/>
-          <a:p/>
-        </p:txBody>
-      </p:sp>
-      <p:sp>
-        <p:nvSpPr>
-          <p:cNvPr id="9" name="UmBox"/>
-          <p:cNvSpPr/>
-          <p:nvPr/>
-        </p:nvSpPr>
-        <p:spPr>
-          <a:xfrm>
-            <a:off x="2697480" y="3017520"/>
-            <a:ext cx="914400" cy="411480"/>
-          </a:xfrm>
-          <a:prstGeom prst="rect">
-            <a:avLst/>
-          </a:prstGeom>
-          <a:solidFill>
-            <a:srgbClr val="F5F1E8"/>
-          </a:solidFill>
-          <a:ln w="15875">
-            <a:solidFill>
-              <a:srgbClr val="555960"/>
-            </a:solidFill>
-          </a:ln>
-          <a:effectLst/>
-        </p:spPr>
-        <p:txBody>
-          <a:bodyPr rtlCol="0" anchor="t" wrap="square"/>
-          <a:lstStyle/>
-          <a:p/>
-        </p:txBody>
-      </p:sp>
-      <p:cxnSp>
-        <p:nvCxnSpPr>
-          <p:cNvPr id="10" name="UmEdge"/>
-          <p:cNvCxnSpPr/>
-          <p:nvPr/>
-        </p:nvCxnSpPr>
-        <p:spPr>
-          <a:xfrm>
-            <a:off x="1828800" y="1874520"/>
-            <a:ext cx="777240" cy="45720"/>
-          </a:xfrm>
-          <a:prstGeom prst="bentConnector3">
-            <a:avLst/>
-          </a:prstGeom>
-          <a:ln w="12700">
-            <a:solidFill>
-              <a:srgbClr val="555960"/>
-            </a:solidFill>
-          </a:ln>
-        </p:spPr>
-      </p:cxnSp>
-      <p:cxnSp>
-        <p:nvCxnSpPr>
-          <p:cNvPr id="11" name="UmEdge"/>
-          <p:cNvCxnSpPr/>
-          <p:nvPr/>
-        </p:nvCxnSpPr>
-        <p:spPr>
-          <a:xfrm>
-            <a:off x="1417320" y="2103120"/>
-            <a:ext cx="1600200" cy="914400"/>
-          </a:xfrm>
-          <a:prstGeom prst="bentConnector3">
-            <a:avLst/>
-          </a:prstGeom>
-          <a:ln w="12700">
-            <a:solidFill>
-              <a:srgbClr val="555960"/>
-            </a:solidFill>
-          </a:ln>
-        </p:spPr>
-      </p:cxnSp>
-      <p:cxnSp>
-        <p:nvCxnSpPr>
-          <p:cNvPr id="12" name="UmEdge"/>
-          <p:cNvCxnSpPr/>
-          <p:nvPr/>
-        </p:nvCxnSpPr>
-        <p:spPr>
-          <a:xfrm flipV="1">
-            <a:off x="2057400" y="2103120"/>
-            <a:ext cx="1005840" cy="1234440"/>
-          </a:xfrm>
-          <a:prstGeom prst="bentConnector3">
-            <a:avLst/>
-          </a:prstGeom>
-          <a:ln w="12700">
-            <a:solidFill>
-              <a:srgbClr val="555960"/>
-            </a:solidFill>
-          </a:ln>
-        </p:spPr>
-      </p:cxnSp>
-      <p:cxnSp>
-        <p:nvCxnSpPr>
-          <p:cNvPr id="13" name="UmEdge"/>
-          <p:cNvCxnSpPr/>
-          <p:nvPr/>
-        </p:nvCxnSpPr>
-        <p:spPr>
-          <a:xfrm flipV="1">
-            <a:off x="1371600" y="2084832"/>
-            <a:ext cx="1280160" cy="1069848"/>
-          </a:xfrm>
-          <a:prstGeom prst="bentConnector3">
-            <a:avLst/>
-          </a:prstGeom>
-          <a:ln w="12700">
-            <a:solidFill>
-              <a:srgbClr val="555960"/>
-            </a:solidFill>
-          </a:ln>
-        </p:spPr>
-      </p:cxnSp>
-      <p:sp>
-        <p:nvSpPr>
-          <p:cNvPr id="14" name="PanelLabel"/>
-          <p:cNvSpPr/>
-          <p:nvPr/>
-        </p:nvSpPr>
-        <p:spPr>
-          <a:xfrm>
-            <a:off x="4617720" y="868680"/>
-            <a:ext cx="4114800" cy="365760"/>
-          </a:xfrm>
-          <a:prstGeom prst="rect">
-            <a:avLst/>
-          </a:prstGeom>
-          <a:noFill/>
-          <a:ln>
-            <a:noFill/>
-          </a:ln>
-          <a:effectLst/>
-        </p:spPr>
-        <p:txBody>
-          <a:bodyPr rtlCol="0" anchor="t" wrap="square"/>
-          <a:lstStyle/>
-          <a:p>
-            <a:pPr algn="l">
-              <a:spcAft>
-                <a:spcPts val="0"/>
-              </a:spcAft>
-            </a:pPr>
-            <a:r>
-              <a:rPr sz="2000" b="1">
-                <a:solidFill>
-                  <a:srgbClr val="8E6F3E"/>
-                </a:solidFill>
-                <a:latin typeface="Calibri"/>
-              </a:rPr>
-              <a:t>MODULAR MONOLITH</a:t>
-            </a:r>
-          </a:p>
-        </p:txBody>
-      </p:sp>
-      <p:sp>
-        <p:nvSpPr>
-          <p:cNvPr id="15" name="MmCard" descr="Modular monolith: the same single deployable with four named modules, explicit interface edges, and a forbidden dependency marked"/>
-          <p:cNvSpPr/>
-          <p:nvPr/>
-        </p:nvSpPr>
-        <p:spPr>
-          <a:xfrm>
-            <a:off x="4617720" y="1261872"/>
-            <a:ext cx="4114800" cy="2971800"/>
-          </a:xfrm>
-          <a:prstGeom prst="rect">
-            <a:avLst/>
-          </a:prstGeom>
-          <a:solidFill>
-            <a:srgbClr val="F5F1E8"/>
-          </a:solidFill>
-          <a:ln>
-            <a:noFill/>
-          </a:ln>
-          <a:effectLst/>
-        </p:spPr>
-        <p:txBody>
-          <a:bodyPr rtlCol="0" anchor="ctr" wrap="square"/>
-          <a:lstStyle/>
-          <a:p/>
-        </p:txBody>
-      </p:sp>
-      <p:sp>
-        <p:nvSpPr>
-          <p:cNvPr id="16" name="MmOuter"/>
-          <p:cNvSpPr/>
-          <p:nvPr/>
-        </p:nvSpPr>
-        <p:spPr>
-          <a:xfrm>
-            <a:off x="4846320" y="1444752"/>
-            <a:ext cx="3657600" cy="2560320"/>
-          </a:xfrm>
-          <a:prstGeom prst="rect">
-            <a:avLst/>
-          </a:prstGeom>
-          <a:solidFill>
-            <a:srgbClr val="FCFAF6"/>
-          </a:solidFill>
-          <a:ln w="19050">
-            <a:solidFill>
-              <a:srgbClr val="8E6F3E"/>
-            </a:solidFill>
-          </a:ln>
-          <a:effectLst/>
-        </p:spPr>
-        <p:txBody>
-          <a:bodyPr rtlCol="0" anchor="t" wrap="square"/>
-          <a:lstStyle/>
-          <a:p/>
-        </p:txBody>
-      </p:sp>
-      <p:sp>
-        <p:nvSpPr>
-          <p:cNvPr id="17" name="MmBox"/>
-          <p:cNvSpPr/>
-          <p:nvPr/>
-        </p:nvSpPr>
-        <p:spPr>
-          <a:xfrm>
-            <a:off x="5074920" y="1645920"/>
-            <a:ext cx="1463040" cy="475488"/>
-          </a:xfrm>
-          <a:prstGeom prst="rect">
-            <a:avLst/>
-          </a:prstGeom>
-          <a:solidFill>
-            <a:srgbClr val="8E6F3E"/>
-          </a:solidFill>
-          <a:ln>
-            <a:noFill/>
-          </a:ln>
-          <a:effectLst/>
-        </p:spPr>
-        <p:style>
-          <a:lnRef idx="1">
-            <a:schemeClr val="accent1"/>
-          </a:lnRef>
-          <a:fillRef idx="3">
-            <a:schemeClr val="accent1"/>
-          </a:fillRef>
-          <a:effectRef idx="2">
-            <a:schemeClr val="accent1"/>
-          </a:effectRef>
-          <a:fontRef idx="minor">
-            <a:schemeClr val="lt1"/>
-          </a:fontRef>
-        </p:style>
-        <p:txBody>
-          <a:bodyPr rtlCol="0" anchor="ctr" wrap="square"/>
-          <a:lstStyle/>
-          <a:p>
-            <a:pPr algn="ctr">
-              <a:spcAft>
-                <a:spcPts val="0"/>
-              </a:spcAft>
-            </a:pPr>
-            <a:r>
-              <a:rPr sz="2000" b="1">
-                <a:solidFill>
-                  <a:srgbClr val="FFFFFF"/>
-                </a:solidFill>
-                <a:latin typeface="Calibri"/>
-              </a:rPr>
-              <a:t>HTTP</a:t>
-            </a:r>
-          </a:p>
-        </p:txBody>
-      </p:sp>
-      <p:sp>
-        <p:nvSpPr>
-          <p:cNvPr id="18" name="MmBox"/>
-          <p:cNvSpPr/>
-          <p:nvPr/>
-        </p:nvSpPr>
-        <p:spPr>
-          <a:xfrm>
-            <a:off x="6812280" y="1645920"/>
-            <a:ext cx="1463040" cy="475488"/>
-          </a:xfrm>
-          <a:prstGeom prst="rect">
-            <a:avLst/>
-          </a:prstGeom>
-          <a:solidFill>
-            <a:srgbClr val="8E6F3E"/>
-          </a:solidFill>
-          <a:ln>
-            <a:noFill/>
-          </a:ln>
-          <a:effectLst/>
-        </p:spPr>
-        <p:style>
-          <a:lnRef idx="1">
-            <a:schemeClr val="accent1"/>
-          </a:lnRef>
-          <a:fillRef idx="3">
-            <a:schemeClr val="accent1"/>
-          </a:fillRef>
-          <a:effectRef idx="2">
-            <a:schemeClr val="accent1"/>
-          </a:effectRef>
-          <a:fontRef idx="minor">
-            <a:schemeClr val="lt1"/>
-          </a:fontRef>
-        </p:style>
-        <p:txBody>
-          <a:bodyPr rtlCol="0" anchor="ctr" wrap="square"/>
-          <a:lstStyle/>
-          <a:p>
-            <a:pPr algn="ctr">
-              <a:spcAft>
-                <a:spcPts val="0"/>
-              </a:spcAft>
-            </a:pPr>
-            <a:r>
-              <a:rPr sz="2000" b="1">
-                <a:solidFill>
-                  <a:srgbClr val="FFFFFF"/>
-                </a:solidFill>
-                <a:latin typeface="Calibri"/>
-              </a:rPr>
-              <a:t>POLICY</a:t>
-            </a:r>
-          </a:p>
-        </p:txBody>
-      </p:sp>
-      <p:sp>
-        <p:nvSpPr>
-          <p:cNvPr id="19" name="MmBox"/>
-          <p:cNvSpPr/>
-          <p:nvPr/>
-        </p:nvSpPr>
-        <p:spPr>
-          <a:xfrm>
-            <a:off x="5074920" y="3246120"/>
-            <a:ext cx="1463040" cy="475488"/>
-          </a:xfrm>
-          <a:prstGeom prst="rect">
-            <a:avLst/>
-          </a:prstGeom>
-          <a:solidFill>
-            <a:srgbClr val="8E6F3E"/>
-          </a:solidFill>
-          <a:ln>
-            <a:noFill/>
-          </a:ln>
-          <a:effectLst/>
-        </p:spPr>
-        <p:style>
-          <a:lnRef idx="1">
-            <a:schemeClr val="accent1"/>
-          </a:lnRef>
-          <a:fillRef idx="3">
-            <a:schemeClr val="accent1"/>
-          </a:fillRef>
-          <a:effectRef idx="2">
-            <a:schemeClr val="accent1"/>
-          </a:effectRef>
-          <a:fontRef idx="minor">
-            <a:schemeClr val="lt1"/>
-          </a:fontRef>
-        </p:style>
-        <p:txBody>
-          <a:bodyPr rtlCol="0" anchor="ctr" wrap="square"/>
-          <a:lstStyle/>
-          <a:p>
-            <a:pPr algn="ctr">
-              <a:spcAft>
-                <a:spcPts val="0"/>
-              </a:spcAft>
-            </a:pPr>
-            <a:r>
-              <a:rPr sz="2000" b="1">
-                <a:solidFill>
-                  <a:srgbClr val="FFFFFF"/>
-                </a:solidFill>
-                <a:latin typeface="Calibri"/>
-              </a:rPr>
-              <a:t>AUTH</a:t>
-            </a:r>
-          </a:p>
-        </p:txBody>
-      </p:sp>
-      <p:sp>
-        <p:nvSpPr>
-          <p:cNvPr id="20" name="MmBox"/>
-          <p:cNvSpPr/>
-          <p:nvPr/>
-        </p:nvSpPr>
-        <p:spPr>
-          <a:xfrm>
-            <a:off x="6812280" y="3246120"/>
-            <a:ext cx="1463040" cy="475488"/>
-          </a:xfrm>
-          <a:prstGeom prst="rect">
-            <a:avLst/>
-          </a:prstGeom>
-          <a:solidFill>
-            <a:srgbClr val="8E6F3E"/>
-          </a:solidFill>
-          <a:ln>
-            <a:noFill/>
-          </a:ln>
-          <a:effectLst/>
-        </p:spPr>
-        <p:style>
-          <a:lnRef idx="1">
-            <a:schemeClr val="accent1"/>
-          </a:lnRef>
-          <a:fillRef idx="3">
-            <a:schemeClr val="accent1"/>
-          </a:fillRef>
-          <a:effectRef idx="2">
-            <a:schemeClr val="accent1"/>
-          </a:effectRef>
-          <a:fontRef idx="minor">
-            <a:schemeClr val="lt1"/>
-          </a:fontRef>
-        </p:style>
-        <p:txBody>
-          <a:bodyPr rtlCol="0" anchor="ctr" wrap="square"/>
-          <a:lstStyle/>
-          <a:p>
-            <a:pPr algn="ctr">
-              <a:spcAft>
-                <a:spcPts val="0"/>
-              </a:spcAft>
-            </a:pPr>
-            <a:r>
-              <a:rPr sz="2000" b="1">
-                <a:solidFill>
-                  <a:srgbClr val="FFFFFF"/>
-                </a:solidFill>
-                <a:latin typeface="Calibri"/>
-              </a:rPr>
-              <a:t>STORE</a:t>
-            </a:r>
-          </a:p>
-        </p:txBody>
-      </p:sp>
-      <p:cxnSp>
-        <p:nvCxnSpPr>
-          <p:cNvPr id="21" name="MmEdge"/>
-          <p:cNvCxnSpPr/>
-          <p:nvPr/>
-        </p:nvCxnSpPr>
-        <p:spPr>
-          <a:xfrm>
-            <a:off x="6537960" y="1883664"/>
-            <a:ext cx="274320" cy="0"/>
-          </a:xfrm>
-          <a:prstGeom prst="line">
-            <a:avLst/>
-          </a:prstGeom>
-          <a:ln w="19050">
-            <a:solidFill>
-              <a:srgbClr val="8E6F3E"/>
-            </a:solidFill>
-            <a:tailEnd type="triangle" w="med" len="med"/>
-          </a:ln>
-        </p:spPr>
-      </p:cxnSp>
-      <p:cxnSp>
-        <p:nvCxnSpPr>
-          <p:cNvPr id="22" name="MmEdge"/>
-          <p:cNvCxnSpPr/>
-          <p:nvPr/>
-        </p:nvCxnSpPr>
-        <p:spPr>
-          <a:xfrm>
-            <a:off x="5440680" y="2121408"/>
-            <a:ext cx="0" cy="1124712"/>
-          </a:xfrm>
-          <a:prstGeom prst="line">
-            <a:avLst/>
-          </a:prstGeom>
-          <a:ln w="19050">
-            <a:solidFill>
-              <a:srgbClr val="8E6F3E"/>
-            </a:solidFill>
-            <a:tailEnd type="triangle" w="med" len="med"/>
-          </a:ln>
-        </p:spPr>
-      </p:cxnSp>
-      <p:cxnSp>
-        <p:nvCxnSpPr>
-          <p:cNvPr id="23" name="MmEdge"/>
-          <p:cNvCxnSpPr/>
-          <p:nvPr/>
-        </p:nvCxnSpPr>
-        <p:spPr>
-          <a:xfrm>
-            <a:off x="7909560" y="2121408"/>
-            <a:ext cx="0" cy="1124712"/>
-          </a:xfrm>
-          <a:prstGeom prst="line">
-            <a:avLst/>
-          </a:prstGeom>
-          <a:ln w="19050">
-            <a:solidFill>
-              <a:srgbClr val="8E6F3E"/>
-            </a:solidFill>
-            <a:tailEnd type="triangle" w="med" len="med"/>
-          </a:ln>
-        </p:spPr>
-      </p:cxnSp>
-      <p:cxnSp>
-        <p:nvCxnSpPr>
-          <p:cNvPr id="24" name="MmEdge"/>
-          <p:cNvCxnSpPr/>
-          <p:nvPr/>
-        </p:nvCxnSpPr>
-        <p:spPr>
-          <a:xfrm>
-            <a:off x="6537960" y="3483864"/>
-            <a:ext cx="274320" cy="0"/>
-          </a:xfrm>
-          <a:prstGeom prst="line">
-            <a:avLst/>
-          </a:prstGeom>
-          <a:ln w="19050">
-            <a:solidFill>
-              <a:srgbClr val="8E6F3E"/>
-            </a:solidFill>
-            <a:tailEnd type="triangle" w="med" len="med"/>
-          </a:ln>
-        </p:spPr>
-      </p:cxnSp>
-      <p:sp>
-        <p:nvSpPr>
-          <p:cNvPr id="25" name="MmForbid" descr="Declared forbidden dependency: HTTP handlers must not import store internals"/>
-          <p:cNvSpPr/>
-          <p:nvPr/>
-        </p:nvSpPr>
-        <p:spPr>
-          <a:xfrm>
-            <a:off x="5760720" y="2450592"/>
-            <a:ext cx="1783080" cy="502920"/>
-          </a:xfrm>
-          <a:prstGeom prst="rect">
-            <a:avLst/>
-          </a:prstGeom>
-          <a:noFill/>
-          <a:ln>
-            <a:noFill/>
-          </a:ln>
-          <a:effectLst/>
-        </p:spPr>
-        <p:txBody>
-          <a:bodyPr rtlCol="0" anchor="ctr" wrap="square" lIns="27432" rIns="27432"/>
-          <a:lstStyle/>
-          <a:p>
-            <a:pPr algn="ctr">
-              <a:spcAft>
-                <a:spcPts val="0"/>
-              </a:spcAft>
-            </a:pPr>
-            <a:r>
-              <a:rPr sz="2000" b="1">
-                <a:solidFill>
-                  <a:srgbClr val="C01B1B"/>
-                </a:solidFill>
-                <a:latin typeface="Calibri"/>
-              </a:rPr>
-              <a:t>✗ HTTP → STORE internals</a:t>
-            </a:r>
-          </a:p>
-        </p:txBody>
-      </p:sp>
-      <p:sp>
-        <p:nvSpPr>
-          <p:cNvPr id="26" name="BandCard"/>
-          <p:cNvSpPr/>
-          <p:nvPr/>
-        </p:nvSpPr>
-        <p:spPr>
-          <a:xfrm>
-            <a:off x="411480" y="4462272"/>
-            <a:ext cx="8321040" cy="1261872"/>
-          </a:xfrm>
-          <a:prstGeom prst="rect">
-            <a:avLst/>
-          </a:prstGeom>
-          <a:solidFill>
-            <a:srgbClr val="FCFAF6"/>
-          </a:solidFill>
-          <a:ln>
-            <a:noFill/>
-          </a:ln>
-          <a:effectLst/>
-        </p:spPr>
-        <p:txBody>
-          <a:bodyPr rtlCol="0" anchor="ctr" wrap="square"/>
-          <a:lstStyle/>
-          <a:p/>
-        </p:txBody>
-      </p:sp>
-      <p:sp>
-        <p:nvSpPr>
-          <p:cNvPr id="27" name="BandText"/>
-          <p:cNvSpPr/>
-          <p:nvPr/>
-        </p:nvSpPr>
-        <p:spPr>
-          <a:xfrm>
-            <a:off x="557784" y="4535424"/>
-            <a:ext cx="8046720" cy="1133856"/>
-          </a:xfrm>
-          <a:prstGeom prst="rect">
-            <a:avLst/>
-          </a:prstGeom>
-          <a:noFill/>
-          <a:ln>
-            <a:noFill/>
-          </a:ln>
-          <a:effectLst/>
-        </p:spPr>
-        <p:txBody>
-          <a:bodyPr rtlCol="0" anchor="t" wrap="square"/>
-          <a:lstStyle/>
-          <a:p>
-            <a:pPr algn="l">
-              <a:spcAft>
-                <a:spcPts val="0"/>
-              </a:spcAft>
-            </a:pPr>
-            <a:r>
-              <a:rPr sz="2000" b="1">
-                <a:solidFill>
-                  <a:srgbClr val="5C4826"/>
-                </a:solidFill>
-                <a:latin typeface="Calibri"/>
-              </a:rPr>
-              <a:t>Both are ONE deployable unit, and both can be replicated</a:t>
-            </a:r>
-          </a:p>
-          <a:p>
-            <a:pPr algn="l">
-              <a:spcAft>
-                <a:spcPts val="0"/>
-              </a:spcAft>
-            </a:pPr>
-            <a:r>
-              <a:rPr sz="2000" b="0">
-                <a:solidFill>
-                  <a:srgbClr val="555960"/>
-                </a:solidFill>
-                <a:latin typeface="Calibri"/>
-              </a:rPr>
-              <a:t>The right panel adds declared interfaces and forbidden edges, not more deployables.</a:t>
-            </a:r>
-          </a:p>
-        </p:txBody>
-      </p:sp>
-      <p:sp>
-        <p:nvSpPr>
-          <p:cNvPr id="28" name="FooterBand"/>
-          <p:cNvSpPr/>
-          <p:nvPr/>
-        </p:nvSpPr>
-        <p:spPr>
-          <a:xfrm>
-            <a:off x="274320" y="5879592"/>
-            <a:ext cx="8595360" cy="502920"/>
-          </a:xfrm>
-          <a:prstGeom prst="rect">
-            <a:avLst/>
-          </a:prstGeom>
-          <a:solidFill>
-            <a:srgbClr val="8E6F3E"/>
-          </a:solidFill>
-          <a:ln>
-            <a:noFill/>
-          </a:ln>
-          <a:effectLst/>
-        </p:spPr>
-        <p:style>
-          <a:lnRef idx="1">
-            <a:schemeClr val="accent1"/>
-          </a:lnRef>
-          <a:fillRef idx="3">
-            <a:schemeClr val="accent1"/>
-          </a:fillRef>
-          <a:effectRef idx="2">
-            <a:schemeClr val="accent1"/>
-          </a:effectRef>
-          <a:fontRef idx="minor">
-            <a:schemeClr val="lt1"/>
-          </a:fontRef>
-        </p:style>
-        <p:txBody>
-          <a:bodyPr rtlCol="0" anchor="ctr" wrap="square"/>
-          <a:lstStyle/>
-          <a:p/>
-        </p:txBody>
-      </p:sp>
-      <p:sp>
-        <p:nvSpPr>
-          <p:cNvPr id="29" name="FooterBandText"/>
-          <p:cNvSpPr/>
-          <p:nvPr/>
-        </p:nvSpPr>
-        <p:spPr>
-          <a:xfrm>
-            <a:off x="384048" y="5897880"/>
-            <a:ext cx="8375904" cy="457200"/>
-          </a:xfrm>
-          <a:prstGeom prst="rect">
-            <a:avLst/>
-          </a:prstGeom>
-          <a:noFill/>
-          <a:ln>
-            <a:noFill/>
-          </a:ln>
-          <a:effectLst/>
-        </p:spPr>
-        <p:txBody>
-          <a:bodyPr rtlCol="0" anchor="ctr" wrap="square"/>
-          <a:lstStyle/>
-          <a:p>
-            <a:pPr algn="ctr">
-              <a:spcAft>
-                <a:spcPts val="0"/>
-              </a:spcAft>
-            </a:pPr>
-            <a:r>
-              <a:rPr sz="2000" b="1">
-                <a:solidFill>
-                  <a:srgbClr val="FFFFFF"/>
-                </a:solidFill>
-                <a:latin typeface="Calibri"/>
-              </a:rPr>
-              <a:t>Modularity is a property of boundaries, not of deployment count</a:t>
-            </a:r>
-          </a:p>
-        </p:txBody>
-      </p:sp>
-    </p:spTree>
-  </p:cSld>
-  <p:clrMapOvr>
-    <a:masterClrMapping/>
-  </p:clrMapOvr>
-</p:sld>
-</file>
-
 <file path=ppt/slides/slide17.xml><?xml version="1.0" encoding="utf-8"?>
 <p:sld xmlns:a="http://schemas.openxmlformats.org/drawingml/2006/main" xmlns:p="http://schemas.openxmlformats.org/presentationml/2006/main" xmlns:r="http://schemas.openxmlformats.org/officeDocument/2006/relationships">
   <p:cSld>
@@ -17509,7 +14668,7 @@
                 </a:solidFill>
                 <a:latin typeface="Calibri"/>
               </a:rPr>
-              <a:t>Same capabilities, three deployment boundaries</a:t>
+              <a:t>A monolith is one deployable, not one blob</a:t>
             </a:r>
           </a:p>
         </p:txBody>
@@ -17591,7 +14750,7 @@
                 </a:solidFill>
                 <a:latin typeface="Calibri"/>
               </a:rPr>
-              <a:t>B · MODULAR MONOLITH</a:t>
+              <a:t>B · MODULAR</a:t>
             </a:r>
           </a:p>
         </p:txBody>
@@ -18558,8 +15717,8 @@
         </p:nvSpPr>
         <p:spPr>
           <a:xfrm>
-            <a:off x="411480" y="4526280"/>
-            <a:ext cx="8321040" cy="822960"/>
+            <a:off x="411480" y="4480560"/>
+            <a:ext cx="8321040" cy="1298448"/>
           </a:xfrm>
           <a:prstGeom prst="rect">
             <a:avLst/>
@@ -18586,8 +15745,8 @@
         </p:nvSpPr>
         <p:spPr>
           <a:xfrm>
-            <a:off x="557784" y="4599432"/>
-            <a:ext cx="8046720" cy="685800"/>
+            <a:off x="557784" y="4553712"/>
+            <a:ext cx="8046720" cy="1170432"/>
           </a:xfrm>
           <a:prstGeom prst="rect">
             <a:avLst/>
@@ -18602,7 +15761,7 @@
           <a:bodyPr rtlCol="0" anchor="ctr" wrap="square"/>
           <a:lstStyle/>
           <a:p>
-            <a:pPr algn="ctr">
+            <a:pPr algn="l">
               <a:spcAft>
                 <a:spcPts val="0"/>
               </a:spcAft>
@@ -18614,7 +15773,23 @@
                 </a:solidFill>
                 <a:latin typeface="Calibri"/>
               </a:rPr>
-              <a:t>Same capabilities each time; what moved is the boundary and who owns the data</a:t>
+              <a:t>A and B are each one deployable; the difference is declared interfaces and forbidden edges</a:t>
+            </a:r>
+          </a:p>
+          <a:p>
+            <a:pPr algn="l">
+              <a:spcAft>
+                <a:spcPts val="0"/>
+              </a:spcAft>
+            </a:pPr>
+            <a:r>
+              <a:rPr sz="2000" b="0">
+                <a:solidFill>
+                  <a:srgbClr val="555960"/>
+                </a:solidFill>
+                <a:latin typeface="Calibri"/>
+              </a:rPr>
+              <a:t>Between B and C a local call became a network contract, and the data gained an owner.</a:t>
             </a:r>
           </a:p>
         </p:txBody>
@@ -19238,900 +16413,6 @@
 </p:sld>
 </file>
 
-<file path=ppt/slides/slide19.xml><?xml version="1.0" encoding="utf-8"?>
-<p:sld xmlns:a="http://schemas.openxmlformats.org/drawingml/2006/main" xmlns:p="http://schemas.openxmlformats.org/presentationml/2006/main" xmlns:r="http://schemas.openxmlformats.org/officeDocument/2006/relationships">
-  <p:cSld>
-    <p:spTree>
-      <p:nvGrpSpPr>
-        <p:cNvPr id="1" name=""/>
-        <p:cNvGrpSpPr/>
-        <p:nvPr/>
-      </p:nvGrpSpPr>
-      <p:grpSpPr>
-        <a:xfrm>
-          <a:off x="0" y="0"/>
-          <a:ext cx="0" cy="0"/>
-          <a:chOff x="0" y="0"/>
-          <a:chExt cx="0" cy="0"/>
-        </a:xfrm>
-      </p:grpSpPr>
-      <p:sp>
-        <p:nvSpPr>
-          <p:cNvPr id="2" name="Title"/>
-          <p:cNvSpPr>
-            <a:spLocks noGrp="1"/>
-          </p:cNvSpPr>
-          <p:nvPr>
-            <p:ph type="title"/>
-          </p:nvPr>
-        </p:nvSpPr>
-        <p:spPr>
-          <a:xfrm>
-            <a:off x="274320" y="128016"/>
-            <a:ext cx="8595360" cy="594360"/>
-          </a:xfrm>
-          <a:prstGeom prst="rect">
-            <a:avLst/>
-          </a:prstGeom>
-          <a:noFill/>
-          <a:ln>
-            <a:noFill/>
-          </a:ln>
-          <a:effectLst/>
-        </p:spPr>
-        <p:txBody>
-          <a:bodyPr rtlCol="0" anchor="ctr" wrap="square"/>
-          <a:lstStyle/>
-          <a:p>
-            <a:pPr algn="l">
-              <a:spcAft>
-                <a:spcPts val="0"/>
-              </a:spcAft>
-            </a:pPr>
-            <a:r>
-              <a:rPr sz="2400" b="0">
-                <a:solidFill>
-                  <a:srgbClr val="2D2D2D"/>
-                </a:solidFill>
-                <a:latin typeface="Calibri"/>
-              </a:rPr>
-              <a:t>Compare the patterns against named properties</a:t>
-            </a:r>
-          </a:p>
-        </p:txBody>
-      </p:sp>
-      <p:graphicFrame>
-        <p:nvGraphicFramePr>
-          <p:cNvPr id="3" name="CompareTable" descr="Comparison of monolith, modular monolith, and microservices across deployment independence, data ownership, calls, operational cost, failure isolation, and change locality"/>
-          <p:cNvGraphicFramePr/>
-          <p:nvPr/>
-        </p:nvGraphicFramePr>
-        <p:xfrm>
-          <a:off x="411480" y="914400"/>
-          <a:ext cx="8321040" cy="3200400"/>
-        </p:xfrm>
-        <a:graphic>
-          <a:graphicData uri="http://schemas.openxmlformats.org/drawingml/2006/table">
-            <a:tbl>
-              <a:tblPr firstRow="0" bandRow="0">
-                <a:tableStyleId>{5C22544A-7EE6-4342-B048-85BDC9FD1C3A}</a:tableStyleId>
-              </a:tblPr>
-              <a:tblGrid>
-                <a:gridCol w="2560320"/>
-                <a:gridCol w="1920240"/>
-                <a:gridCol w="1920240"/>
-                <a:gridCol w="1920240"/>
-              </a:tblGrid>
-              <a:tr h="457200">
-                <a:tc>
-                  <a:txBody>
-                    <a:bodyPr wrap="square"/>
-                    <a:lstStyle/>
-                    <a:p>
-                      <a:r>
-                        <a:rPr sz="2000" b="1">
-                          <a:solidFill>
-                            <a:srgbClr val="FFFFFF"/>
-                          </a:solidFill>
-                          <a:latin typeface="Calibri"/>
-                        </a:rPr>
-                        <a:t>property</a:t>
-                      </a:r>
-                    </a:p>
-                  </a:txBody>
-                  <a:tcPr marL="91440" marR="91440" marT="36576" marB="36576" anchor="ctr">
-                    <a:solidFill>
-                      <a:srgbClr val="8E6F3E"/>
-                    </a:solidFill>
-                  </a:tcPr>
-                </a:tc>
-                <a:tc>
-                  <a:txBody>
-                    <a:bodyPr wrap="square"/>
-                    <a:lstStyle/>
-                    <a:p>
-                      <a:r>
-                        <a:rPr sz="2000" b="1">
-                          <a:solidFill>
-                            <a:srgbClr val="FFFFFF"/>
-                          </a:solidFill>
-                          <a:latin typeface="Calibri"/>
-                        </a:rPr>
-                        <a:t>monolith</a:t>
-                      </a:r>
-                    </a:p>
-                  </a:txBody>
-                  <a:tcPr marL="91440" marR="91440" marT="36576" marB="36576" anchor="ctr">
-                    <a:solidFill>
-                      <a:srgbClr val="8E6F3E"/>
-                    </a:solidFill>
-                  </a:tcPr>
-                </a:tc>
-                <a:tc>
-                  <a:txBody>
-                    <a:bodyPr wrap="square"/>
-                    <a:lstStyle/>
-                    <a:p>
-                      <a:r>
-                        <a:rPr sz="2000" b="1">
-                          <a:solidFill>
-                            <a:srgbClr val="FFFFFF"/>
-                          </a:solidFill>
-                          <a:latin typeface="Calibri"/>
-                        </a:rPr>
-                        <a:t>modular monolith</a:t>
-                      </a:r>
-                    </a:p>
-                  </a:txBody>
-                  <a:tcPr marL="91440" marR="91440" marT="36576" marB="36576" anchor="ctr">
-                    <a:solidFill>
-                      <a:srgbClr val="8E6F3E"/>
-                    </a:solidFill>
-                  </a:tcPr>
-                </a:tc>
-                <a:tc>
-                  <a:txBody>
-                    <a:bodyPr wrap="square"/>
-                    <a:lstStyle/>
-                    <a:p>
-                      <a:r>
-                        <a:rPr sz="2000" b="1">
-                          <a:solidFill>
-                            <a:srgbClr val="FFFFFF"/>
-                          </a:solidFill>
-                          <a:latin typeface="Calibri"/>
-                        </a:rPr>
-                        <a:t>microservices</a:t>
-                      </a:r>
-                    </a:p>
-                  </a:txBody>
-                  <a:tcPr marL="91440" marR="91440" marT="36576" marB="36576" anchor="ctr">
-                    <a:solidFill>
-                      <a:srgbClr val="8E6F3E"/>
-                    </a:solidFill>
-                  </a:tcPr>
-                </a:tc>
-              </a:tr>
-              <a:tr h="457200">
-                <a:tc>
-                  <a:txBody>
-                    <a:bodyPr wrap="square"/>
-                    <a:lstStyle/>
-                    <a:p>
-                      <a:r>
-                        <a:rPr sz="2000" b="1">
-                          <a:solidFill>
-                            <a:srgbClr val="8E6F3E"/>
-                          </a:solidFill>
-                          <a:latin typeface="Calibri"/>
-                        </a:rPr>
-                        <a:t>independence</a:t>
-                      </a:r>
-                    </a:p>
-                  </a:txBody>
-                  <a:tcPr marL="91440" marR="91440" marT="36576" marB="36576" anchor="ctr">
-                    <a:solidFill>
-                      <a:srgbClr val="F5F1E8"/>
-                    </a:solidFill>
-                  </a:tcPr>
-                </a:tc>
-                <a:tc>
-                  <a:txBody>
-                    <a:bodyPr wrap="square"/>
-                    <a:lstStyle/>
-                    <a:p>
-                      <a:r>
-                        <a:rPr sz="2000" b="0">
-                          <a:solidFill>
-                            <a:srgbClr val="2D2D2D"/>
-                          </a:solidFill>
-                          <a:latin typeface="Calibri"/>
-                        </a:rPr>
-                        <a:t>one unit</a:t>
-                      </a:r>
-                    </a:p>
-                  </a:txBody>
-                  <a:tcPr marL="91440" marR="91440" marT="36576" marB="36576" anchor="ctr">
-                    <a:solidFill>
-                      <a:srgbClr val="F5F1E8"/>
-                    </a:solidFill>
-                  </a:tcPr>
-                </a:tc>
-                <a:tc>
-                  <a:txBody>
-                    <a:bodyPr wrap="square"/>
-                    <a:lstStyle/>
-                    <a:p>
-                      <a:r>
-                        <a:rPr sz="2000" b="0">
-                          <a:solidFill>
-                            <a:srgbClr val="2D2D2D"/>
-                          </a:solidFill>
-                          <a:latin typeface="Calibri"/>
-                        </a:rPr>
-                        <a:t>one unit</a:t>
-                      </a:r>
-                    </a:p>
-                  </a:txBody>
-                  <a:tcPr marL="91440" marR="91440" marT="36576" marB="36576" anchor="ctr">
-                    <a:solidFill>
-                      <a:srgbClr val="F5F1E8"/>
-                    </a:solidFill>
-                  </a:tcPr>
-                </a:tc>
-                <a:tc>
-                  <a:txBody>
-                    <a:bodyPr wrap="square"/>
-                    <a:lstStyle/>
-                    <a:p>
-                      <a:r>
-                        <a:rPr sz="2000" b="0">
-                          <a:solidFill>
-                            <a:srgbClr val="2D2D2D"/>
-                          </a:solidFill>
-                          <a:latin typeface="Calibri"/>
-                        </a:rPr>
-                        <a:t>per service</a:t>
-                      </a:r>
-                    </a:p>
-                  </a:txBody>
-                  <a:tcPr marL="91440" marR="91440" marT="36576" marB="36576" anchor="ctr">
-                    <a:solidFill>
-                      <a:srgbClr val="F5F1E8"/>
-                    </a:solidFill>
-                  </a:tcPr>
-                </a:tc>
-              </a:tr>
-              <a:tr h="457200">
-                <a:tc>
-                  <a:txBody>
-                    <a:bodyPr wrap="square"/>
-                    <a:lstStyle/>
-                    <a:p>
-                      <a:r>
-                        <a:rPr sz="2000" b="1">
-                          <a:solidFill>
-                            <a:srgbClr val="8E6F3E"/>
-                          </a:solidFill>
-                          <a:latin typeface="Calibri"/>
-                        </a:rPr>
-                        <a:t>data ownership</a:t>
-                      </a:r>
-                    </a:p>
-                  </a:txBody>
-                  <a:tcPr marL="91440" marR="91440" marT="36576" marB="36576" anchor="ctr">
-                    <a:solidFill>
-                      <a:srgbClr val="FCFAF6"/>
-                    </a:solidFill>
-                  </a:tcPr>
-                </a:tc>
-                <a:tc>
-                  <a:txBody>
-                    <a:bodyPr wrap="square"/>
-                    <a:lstStyle/>
-                    <a:p>
-                      <a:r>
-                        <a:rPr sz="2000" b="0">
-                          <a:solidFill>
-                            <a:srgbClr val="2D2D2D"/>
-                          </a:solidFill>
-                          <a:latin typeface="Calibri"/>
-                        </a:rPr>
-                        <a:t>one database</a:t>
-                      </a:r>
-                    </a:p>
-                  </a:txBody>
-                  <a:tcPr marL="91440" marR="91440" marT="36576" marB="36576" anchor="ctr">
-                    <a:solidFill>
-                      <a:srgbClr val="FCFAF6"/>
-                    </a:solidFill>
-                  </a:tcPr>
-                </a:tc>
-                <a:tc>
-                  <a:txBody>
-                    <a:bodyPr wrap="square"/>
-                    <a:lstStyle/>
-                    <a:p>
-                      <a:r>
-                        <a:rPr sz="2000" b="0">
-                          <a:solidFill>
-                            <a:srgbClr val="2D2D2D"/>
-                          </a:solidFill>
-                          <a:latin typeface="Calibri"/>
-                        </a:rPr>
-                        <a:t>owned modules</a:t>
-                      </a:r>
-                    </a:p>
-                  </a:txBody>
-                  <a:tcPr marL="91440" marR="91440" marT="36576" marB="36576" anchor="ctr">
-                    <a:solidFill>
-                      <a:srgbClr val="FCFAF6"/>
-                    </a:solidFill>
-                  </a:tcPr>
-                </a:tc>
-                <a:tc>
-                  <a:txBody>
-                    <a:bodyPr wrap="square"/>
-                    <a:lstStyle/>
-                    <a:p>
-                      <a:r>
-                        <a:rPr sz="2000" b="0">
-                          <a:solidFill>
-                            <a:srgbClr val="2D2D2D"/>
-                          </a:solidFill>
-                          <a:latin typeface="Calibri"/>
-                        </a:rPr>
-                        <a:t>per service</a:t>
-                      </a:r>
-                    </a:p>
-                  </a:txBody>
-                  <a:tcPr marL="91440" marR="91440" marT="36576" marB="36576" anchor="ctr">
-                    <a:solidFill>
-                      <a:srgbClr val="FCFAF6"/>
-                    </a:solidFill>
-                  </a:tcPr>
-                </a:tc>
-              </a:tr>
-              <a:tr h="457200">
-                <a:tc>
-                  <a:txBody>
-                    <a:bodyPr wrap="square"/>
-                    <a:lstStyle/>
-                    <a:p>
-                      <a:r>
-                        <a:rPr sz="2000" b="1">
-                          <a:solidFill>
-                            <a:srgbClr val="8E6F3E"/>
-                          </a:solidFill>
-                          <a:latin typeface="Calibri"/>
-                        </a:rPr>
-                        <a:t>calls</a:t>
-                      </a:r>
-                    </a:p>
-                  </a:txBody>
-                  <a:tcPr marL="91440" marR="91440" marT="36576" marB="36576" anchor="ctr">
-                    <a:solidFill>
-                      <a:srgbClr val="F5F1E8"/>
-                    </a:solidFill>
-                  </a:tcPr>
-                </a:tc>
-                <a:tc>
-                  <a:txBody>
-                    <a:bodyPr wrap="square"/>
-                    <a:lstStyle/>
-                    <a:p>
-                      <a:r>
-                        <a:rPr sz="2000" b="0">
-                          <a:solidFill>
-                            <a:srgbClr val="2D2D2D"/>
-                          </a:solidFill>
-                          <a:latin typeface="Calibri"/>
-                        </a:rPr>
-                        <a:t>in-process</a:t>
-                      </a:r>
-                    </a:p>
-                  </a:txBody>
-                  <a:tcPr marL="91440" marR="91440" marT="36576" marB="36576" anchor="ctr">
-                    <a:solidFill>
-                      <a:srgbClr val="F5F1E8"/>
-                    </a:solidFill>
-                  </a:tcPr>
-                </a:tc>
-                <a:tc>
-                  <a:txBody>
-                    <a:bodyPr wrap="square"/>
-                    <a:lstStyle/>
-                    <a:p>
-                      <a:r>
-                        <a:rPr sz="2000" b="0">
-                          <a:solidFill>
-                            <a:srgbClr val="2D2D2D"/>
-                          </a:solidFill>
-                          <a:latin typeface="Calibri"/>
-                        </a:rPr>
-                        <a:t>via interfaces</a:t>
-                      </a:r>
-                    </a:p>
-                  </a:txBody>
-                  <a:tcPr marL="91440" marR="91440" marT="36576" marB="36576" anchor="ctr">
-                    <a:solidFill>
-                      <a:srgbClr val="F5F1E8"/>
-                    </a:solidFill>
-                  </a:tcPr>
-                </a:tc>
-                <a:tc>
-                  <a:txBody>
-                    <a:bodyPr wrap="square"/>
-                    <a:lstStyle/>
-                    <a:p>
-                      <a:r>
-                        <a:rPr sz="2000" b="0">
-                          <a:solidFill>
-                            <a:srgbClr val="2D2D2D"/>
-                          </a:solidFill>
-                          <a:latin typeface="Calibri"/>
-                        </a:rPr>
-                        <a:t>network</a:t>
-                      </a:r>
-                    </a:p>
-                  </a:txBody>
-                  <a:tcPr marL="91440" marR="91440" marT="36576" marB="36576" anchor="ctr">
-                    <a:solidFill>
-                      <a:srgbClr val="F5F1E8"/>
-                    </a:solidFill>
-                  </a:tcPr>
-                </a:tc>
-              </a:tr>
-              <a:tr h="457200">
-                <a:tc>
-                  <a:txBody>
-                    <a:bodyPr wrap="square"/>
-                    <a:lstStyle/>
-                    <a:p>
-                      <a:r>
-                        <a:rPr sz="2000" b="1">
-                          <a:solidFill>
-                            <a:srgbClr val="8E6F3E"/>
-                          </a:solidFill>
-                          <a:latin typeface="Calibri"/>
-                        </a:rPr>
-                        <a:t>operations</a:t>
-                      </a:r>
-                    </a:p>
-                  </a:txBody>
-                  <a:tcPr marL="91440" marR="91440" marT="36576" marB="36576" anchor="ctr">
-                    <a:solidFill>
-                      <a:srgbClr val="FCFAF6"/>
-                    </a:solidFill>
-                  </a:tcPr>
-                </a:tc>
-                <a:tc>
-                  <a:txBody>
-                    <a:bodyPr wrap="square"/>
-                    <a:lstStyle/>
-                    <a:p>
-                      <a:r>
-                        <a:rPr sz="2000" b="0">
-                          <a:solidFill>
-                            <a:srgbClr val="2D2D2D"/>
-                          </a:solidFill>
-                          <a:latin typeface="Calibri"/>
-                        </a:rPr>
-                        <a:t>one deploy</a:t>
-                      </a:r>
-                    </a:p>
-                  </a:txBody>
-                  <a:tcPr marL="91440" marR="91440" marT="36576" marB="36576" anchor="ctr">
-                    <a:solidFill>
-                      <a:srgbClr val="FCFAF6"/>
-                    </a:solidFill>
-                  </a:tcPr>
-                </a:tc>
-                <a:tc>
-                  <a:txBody>
-                    <a:bodyPr wrap="square"/>
-                    <a:lstStyle/>
-                    <a:p>
-                      <a:r>
-                        <a:rPr sz="2000" b="0">
-                          <a:solidFill>
-                            <a:srgbClr val="2D2D2D"/>
-                          </a:solidFill>
-                          <a:latin typeface="Calibri"/>
-                        </a:rPr>
-                        <a:t>one deploy</a:t>
-                      </a:r>
-                    </a:p>
-                  </a:txBody>
-                  <a:tcPr marL="91440" marR="91440" marT="36576" marB="36576" anchor="ctr">
-                    <a:solidFill>
-                      <a:srgbClr val="FCFAF6"/>
-                    </a:solidFill>
-                  </a:tcPr>
-                </a:tc>
-                <a:tc>
-                  <a:txBody>
-                    <a:bodyPr wrap="square"/>
-                    <a:lstStyle/>
-                    <a:p>
-                      <a:r>
-                        <a:rPr sz="2000" b="0">
-                          <a:solidFill>
-                            <a:srgbClr val="2D2D2D"/>
-                          </a:solidFill>
-                          <a:latin typeface="Calibri"/>
-                        </a:rPr>
-                        <a:t>many deploys</a:t>
-                      </a:r>
-                    </a:p>
-                  </a:txBody>
-                  <a:tcPr marL="91440" marR="91440" marT="36576" marB="36576" anchor="ctr">
-                    <a:solidFill>
-                      <a:srgbClr val="FCFAF6"/>
-                    </a:solidFill>
-                  </a:tcPr>
-                </a:tc>
-              </a:tr>
-              <a:tr h="457200">
-                <a:tc>
-                  <a:txBody>
-                    <a:bodyPr wrap="square"/>
-                    <a:lstStyle/>
-                    <a:p>
-                      <a:r>
-                        <a:rPr sz="2000" b="1">
-                          <a:solidFill>
-                            <a:srgbClr val="8E6F3E"/>
-                          </a:solidFill>
-                          <a:latin typeface="Calibri"/>
-                        </a:rPr>
-                        <a:t>failure isolation</a:t>
-                      </a:r>
-                    </a:p>
-                  </a:txBody>
-                  <a:tcPr marL="91440" marR="91440" marT="36576" marB="36576" anchor="ctr">
-                    <a:solidFill>
-                      <a:srgbClr val="F5F1E8"/>
-                    </a:solidFill>
-                  </a:tcPr>
-                </a:tc>
-                <a:tc>
-                  <a:txBody>
-                    <a:bodyPr wrap="square"/>
-                    <a:lstStyle/>
-                    <a:p>
-                      <a:r>
-                        <a:rPr sz="2000" b="0">
-                          <a:solidFill>
-                            <a:srgbClr val="2D2D2D"/>
-                          </a:solidFill>
-                          <a:latin typeface="Calibri"/>
-                        </a:rPr>
-                        <a:t>shared fate</a:t>
-                      </a:r>
-                    </a:p>
-                  </a:txBody>
-                  <a:tcPr marL="91440" marR="91440" marT="36576" marB="36576" anchor="ctr">
-                    <a:solidFill>
-                      <a:srgbClr val="F5F1E8"/>
-                    </a:solidFill>
-                  </a:tcPr>
-                </a:tc>
-                <a:tc>
-                  <a:txBody>
-                    <a:bodyPr wrap="square"/>
-                    <a:lstStyle/>
-                    <a:p>
-                      <a:r>
-                        <a:rPr sz="2000" b="0">
-                          <a:solidFill>
-                            <a:srgbClr val="2D2D2D"/>
-                          </a:solidFill>
-                          <a:latin typeface="Calibri"/>
-                        </a:rPr>
-                        <a:t>shared fate</a:t>
-                      </a:r>
-                    </a:p>
-                  </a:txBody>
-                  <a:tcPr marL="91440" marR="91440" marT="36576" marB="36576" anchor="ctr">
-                    <a:solidFill>
-                      <a:srgbClr val="F5F1E8"/>
-                    </a:solidFill>
-                  </a:tcPr>
-                </a:tc>
-                <a:tc>
-                  <a:txBody>
-                    <a:bodyPr wrap="square"/>
-                    <a:lstStyle/>
-                    <a:p>
-                      <a:r>
-                        <a:rPr sz="2000" b="0">
-                          <a:solidFill>
-                            <a:srgbClr val="2D2D2D"/>
-                          </a:solidFill>
-                          <a:latin typeface="Calibri"/>
-                        </a:rPr>
-                        <a:t>if designed</a:t>
-                      </a:r>
-                    </a:p>
-                  </a:txBody>
-                  <a:tcPr marL="91440" marR="91440" marT="36576" marB="36576" anchor="ctr">
-                    <a:solidFill>
-                      <a:srgbClr val="F5F1E8"/>
-                    </a:solidFill>
-                  </a:tcPr>
-                </a:tc>
-              </a:tr>
-              <a:tr h="457200">
-                <a:tc>
-                  <a:txBody>
-                    <a:bodyPr wrap="square"/>
-                    <a:lstStyle/>
-                    <a:p>
-                      <a:r>
-                        <a:rPr sz="2000" b="1">
-                          <a:solidFill>
-                            <a:srgbClr val="8E6F3E"/>
-                          </a:solidFill>
-                          <a:latin typeface="Calibri"/>
-                        </a:rPr>
-                        <a:t>change locality</a:t>
-                      </a:r>
-                    </a:p>
-                  </a:txBody>
-                  <a:tcPr marL="91440" marR="91440" marT="36576" marB="36576" anchor="ctr">
-                    <a:solidFill>
-                      <a:srgbClr val="FCFAF6"/>
-                    </a:solidFill>
-                  </a:tcPr>
-                </a:tc>
-                <a:tc>
-                  <a:txBody>
-                    <a:bodyPr wrap="square"/>
-                    <a:lstStyle/>
-                    <a:p>
-                      <a:r>
-                        <a:rPr sz="2000" b="0">
-                          <a:solidFill>
-                            <a:srgbClr val="2D2D2D"/>
-                          </a:solidFill>
-                          <a:latin typeface="Calibri"/>
-                        </a:rPr>
-                        <a:t>unbounded</a:t>
-                      </a:r>
-                    </a:p>
-                  </a:txBody>
-                  <a:tcPr marL="91440" marR="91440" marT="36576" marB="36576" anchor="ctr">
-                    <a:solidFill>
-                      <a:srgbClr val="FCFAF6"/>
-                    </a:solidFill>
-                  </a:tcPr>
-                </a:tc>
-                <a:tc>
-                  <a:txBody>
-                    <a:bodyPr wrap="square"/>
-                    <a:lstStyle/>
-                    <a:p>
-                      <a:r>
-                        <a:rPr sz="2000" b="0">
-                          <a:solidFill>
-                            <a:srgbClr val="2D2D2D"/>
-                          </a:solidFill>
-                          <a:latin typeface="Calibri"/>
-                        </a:rPr>
-                        <a:t>module seams</a:t>
-                      </a:r>
-                    </a:p>
-                  </a:txBody>
-                  <a:tcPr marL="91440" marR="91440" marT="36576" marB="36576" anchor="ctr">
-                    <a:solidFill>
-                      <a:srgbClr val="FCFAF6"/>
-                    </a:solidFill>
-                  </a:tcPr>
-                </a:tc>
-                <a:tc>
-                  <a:txBody>
-                    <a:bodyPr wrap="square"/>
-                    <a:lstStyle/>
-                    <a:p>
-                      <a:r>
-                        <a:rPr sz="2000" b="0">
-                          <a:solidFill>
-                            <a:srgbClr val="2D2D2D"/>
-                          </a:solidFill>
-                          <a:latin typeface="Calibri"/>
-                        </a:rPr>
-                        <a:t>service seams</a:t>
-                      </a:r>
-                    </a:p>
-                  </a:txBody>
-                  <a:tcPr marL="91440" marR="91440" marT="36576" marB="36576" anchor="ctr">
-                    <a:solidFill>
-                      <a:srgbClr val="FCFAF6"/>
-                    </a:solidFill>
-                  </a:tcPr>
-                </a:tc>
-              </a:tr>
-            </a:tbl>
-          </a:graphicData>
-        </a:graphic>
-      </p:graphicFrame>
-      <p:sp>
-        <p:nvSpPr>
-          <p:cNvPr id="4" name="SoaCard"/>
-          <p:cNvSpPr/>
-          <p:nvPr/>
-        </p:nvSpPr>
-        <p:spPr>
-          <a:xfrm>
-            <a:off x="411480" y="4370832"/>
-            <a:ext cx="8321040" cy="1353312"/>
-          </a:xfrm>
-          <a:prstGeom prst="rect">
-            <a:avLst/>
-          </a:prstGeom>
-          <a:solidFill>
-            <a:srgbClr val="FCFAF6"/>
-          </a:solidFill>
-          <a:ln>
-            <a:noFill/>
-          </a:ln>
-          <a:effectLst/>
-        </p:spPr>
-        <p:txBody>
-          <a:bodyPr rtlCol="0" anchor="ctr" wrap="square"/>
-          <a:lstStyle/>
-          <a:p/>
-        </p:txBody>
-      </p:sp>
-      <p:sp>
-        <p:nvSpPr>
-          <p:cNvPr id="5" name="SoaText"/>
-          <p:cNvSpPr/>
-          <p:nvPr/>
-        </p:nvSpPr>
-        <p:spPr>
-          <a:xfrm>
-            <a:off x="557784" y="4443984"/>
-            <a:ext cx="8046720" cy="1243584"/>
-          </a:xfrm>
-          <a:prstGeom prst="rect">
-            <a:avLst/>
-          </a:prstGeom>
-          <a:noFill/>
-          <a:ln>
-            <a:noFill/>
-          </a:ln>
-          <a:effectLst/>
-        </p:spPr>
-        <p:txBody>
-          <a:bodyPr rtlCol="0" anchor="t" wrap="square"/>
-          <a:lstStyle/>
-          <a:p>
-            <a:pPr algn="l">
-              <a:spcAft>
-                <a:spcPts val="0"/>
-              </a:spcAft>
-            </a:pPr>
-            <a:r>
-              <a:rPr sz="2000" b="1">
-                <a:solidFill>
-                  <a:srgbClr val="5C4826"/>
-                </a:solidFill>
-                <a:latin typeface="Calibri"/>
-              </a:rPr>
-              <a:t>SOA names the service-contract approach; microservices are one family within it</a:t>
-            </a:r>
-          </a:p>
-          <a:p>
-            <a:pPr algn="l">
-              <a:spcAft>
-                <a:spcPts val="0"/>
-              </a:spcAft>
-            </a:pPr>
-            <a:r>
-              <a:rPr sz="2000" b="0">
-                <a:solidFill>
-                  <a:srgbClr val="555960"/>
-                </a:solidFill>
-                <a:latin typeface="Calibri"/>
-              </a:rPr>
-              <a:t>Granularity follows change and ownership boundaries, not lines of code. Claims above are tendencies, not laws.</a:t>
-            </a:r>
-          </a:p>
-        </p:txBody>
-      </p:sp>
-      <p:sp>
-        <p:nvSpPr>
-          <p:cNvPr id="6" name="FooterBand"/>
-          <p:cNvSpPr/>
-          <p:nvPr/>
-        </p:nvSpPr>
-        <p:spPr>
-          <a:xfrm>
-            <a:off x="274320" y="5879592"/>
-            <a:ext cx="8595360" cy="502920"/>
-          </a:xfrm>
-          <a:prstGeom prst="rect">
-            <a:avLst/>
-          </a:prstGeom>
-          <a:solidFill>
-            <a:srgbClr val="8E6F3E"/>
-          </a:solidFill>
-          <a:ln>
-            <a:noFill/>
-          </a:ln>
-          <a:effectLst/>
-        </p:spPr>
-        <p:style>
-          <a:lnRef idx="1">
-            <a:schemeClr val="accent1"/>
-          </a:lnRef>
-          <a:fillRef idx="3">
-            <a:schemeClr val="accent1"/>
-          </a:fillRef>
-          <a:effectRef idx="2">
-            <a:schemeClr val="accent1"/>
-          </a:effectRef>
-          <a:fontRef idx="minor">
-            <a:schemeClr val="lt1"/>
-          </a:fontRef>
-        </p:style>
-        <p:txBody>
-          <a:bodyPr rtlCol="0" anchor="ctr" wrap="square"/>
-          <a:lstStyle/>
-          <a:p/>
-        </p:txBody>
-      </p:sp>
-      <p:sp>
-        <p:nvSpPr>
-          <p:cNvPr id="7" name="FooterBandText"/>
-          <p:cNvSpPr/>
-          <p:nvPr/>
-        </p:nvSpPr>
-        <p:spPr>
-          <a:xfrm>
-            <a:off x="384048" y="5897880"/>
-            <a:ext cx="8375904" cy="457200"/>
-          </a:xfrm>
-          <a:prstGeom prst="rect">
-            <a:avLst/>
-          </a:prstGeom>
-          <a:noFill/>
-          <a:ln>
-            <a:noFill/>
-          </a:ln>
-          <a:effectLst/>
-        </p:spPr>
-        <p:txBody>
-          <a:bodyPr rtlCol="0" anchor="ctr" wrap="square"/>
-          <a:lstStyle/>
-          <a:p>
-            <a:pPr algn="ctr">
-              <a:spcAft>
-                <a:spcPts val="0"/>
-              </a:spcAft>
-            </a:pPr>
-            <a:r>
-              <a:rPr sz="2000" b="1">
-                <a:solidFill>
-                  <a:srgbClr val="FFFFFF"/>
-                </a:solidFill>
-                <a:latin typeface="Calibri"/>
-              </a:rPr>
-              <a:t>No column dominates; requirements pick the column</a:t>
-            </a:r>
-          </a:p>
-        </p:txBody>
-      </p:sp>
-    </p:spTree>
-  </p:cSld>
-  <p:clrMapOvr>
-    <a:masterClrMapping/>
-  </p:clrMapOvr>
-</p:sld>
-</file>
-
 <file path=ppt/slides/slide2.xml><?xml version="1.0" encoding="utf-8"?>
 <p:sld xmlns:a="http://schemas.openxmlformats.org/drawingml/2006/main" xmlns:p="http://schemas.openxmlformats.org/presentationml/2006/main" xmlns:r="http://schemas.openxmlformats.org/officeDocument/2006/relationships">
   <p:cSld>
@@ -20189,7 +16470,7 @@
                 </a:solidFill>
                 <a:latin typeface="Calibri"/>
               </a:rPr>
-              <a:t>Today: five engineering questions</a:t>
+              <a:t>Today: three engineering questions</a:t>
             </a:r>
           </a:p>
         </p:txBody>
@@ -20202,8 +16483,8 @@
         </p:nvSpPr>
         <p:spPr>
           <a:xfrm>
-            <a:off x="411480" y="1051560"/>
-            <a:ext cx="8321040" cy="841248"/>
+            <a:off x="411480" y="1371600"/>
+            <a:ext cx="8321040" cy="1005840"/>
           </a:xfrm>
           <a:prstGeom prst="rect">
             <a:avLst/>
@@ -20230,8 +16511,8 @@
         </p:nvSpPr>
         <p:spPr>
           <a:xfrm>
-            <a:off x="557784" y="1088136"/>
-            <a:ext cx="2788920" cy="768096"/>
+            <a:off x="557784" y="1417320"/>
+            <a:ext cx="2788920" cy="914400"/>
           </a:xfrm>
           <a:prstGeom prst="rect">
             <a:avLst/>
@@ -20258,7 +16539,7 @@
                 </a:solidFill>
                 <a:latin typeface="Calibri"/>
               </a:rPr>
-              <a:t>Mud, erosion and debt</a:t>
+              <a:t>The structure we built</a:t>
             </a:r>
           </a:p>
         </p:txBody>
@@ -20271,8 +16552,8 @@
         </p:nvSpPr>
         <p:spPr>
           <a:xfrm>
-            <a:off x="3438144" y="1088136"/>
-            <a:ext cx="5166360" cy="768096"/>
+            <a:off x="3438144" y="1417320"/>
+            <a:ext cx="5166360" cy="914400"/>
           </a:xfrm>
           <a:prstGeom prst="rect">
             <a:avLst/>
@@ -20299,7 +16580,7 @@
                 </a:solidFill>
                 <a:latin typeface="Calibri"/>
               </a:rPr>
-              <a:t>Why can a working system become difficult to change?</a:t>
+              <a:t>What structure did we build, and what will it cost to change?</a:t>
             </a:r>
           </a:p>
         </p:txBody>
@@ -20312,8 +16593,8 @@
         </p:nvSpPr>
         <p:spPr>
           <a:xfrm>
-            <a:off x="411480" y="2002536"/>
-            <a:ext cx="8321040" cy="841248"/>
+            <a:off x="411480" y="2788920"/>
+            <a:ext cx="8321040" cy="1005840"/>
           </a:xfrm>
           <a:prstGeom prst="rect">
             <a:avLst/>
@@ -20340,8 +16621,8 @@
         </p:nvSpPr>
         <p:spPr>
           <a:xfrm>
-            <a:off x="557784" y="2039112"/>
-            <a:ext cx="2788920" cy="768096"/>
+            <a:off x="557784" y="2834639"/>
+            <a:ext cx="2788920" cy="914400"/>
           </a:xfrm>
           <a:prstGeom prst="rect">
             <a:avLst/>
@@ -20368,7 +16649,7 @@
                 </a:solidFill>
                 <a:latin typeface="Calibri"/>
               </a:rPr>
-              <a:t>The architecture we built</a:t>
+              <a:t>The components we inherited</a:t>
             </a:r>
           </a:p>
         </p:txBody>
@@ -20381,8 +16662,8 @@
         </p:nvSpPr>
         <p:spPr>
           <a:xfrm>
-            <a:off x="3438144" y="2039112"/>
-            <a:ext cx="5166360" cy="768096"/>
+            <a:off x="3438144" y="2834639"/>
+            <a:ext cx="5166360" cy="914400"/>
           </a:xfrm>
           <a:prstGeom prst="rect">
             <a:avLst/>
@@ -20409,7 +16690,7 @@
                 </a:solidFill>
                 <a:latin typeface="Calibri"/>
               </a:rPr>
-              <a:t>What structure did the implementation actually take?</a:t>
+              <a:t>What components and obligations did we inherit?</a:t>
             </a:r>
           </a:p>
         </p:txBody>
@@ -20422,8 +16703,8 @@
         </p:nvSpPr>
         <p:spPr>
           <a:xfrm>
-            <a:off x="411480" y="2953512"/>
-            <a:ext cx="8321040" cy="841248"/>
+            <a:off x="411480" y="4206240"/>
+            <a:ext cx="8321040" cy="1005840"/>
           </a:xfrm>
           <a:prstGeom prst="rect">
             <a:avLst/>
@@ -20450,8 +16731,8 @@
         </p:nvSpPr>
         <p:spPr>
           <a:xfrm>
-            <a:off x="557784" y="2990088"/>
-            <a:ext cx="2788920" cy="768096"/>
+            <a:off x="557784" y="4251959"/>
+            <a:ext cx="2788920" cy="914400"/>
           </a:xfrm>
           <a:prstGeom prst="rect">
             <a:avLst/>
@@ -20478,7 +16759,7 @@
                 </a:solidFill>
                 <a:latin typeface="Calibri"/>
               </a:rPr>
-              <a:t>Architectural alternatives</a:t>
+              <a:t>Evidence and controls</a:t>
             </a:r>
           </a:p>
         </p:txBody>
@@ -20491,8 +16772,8 @@
         </p:nvSpPr>
         <p:spPr>
           <a:xfrm>
-            <a:off x="3438144" y="2990088"/>
-            <a:ext cx="5166360" cy="768096"/>
+            <a:off x="3438144" y="4251959"/>
+            <a:ext cx="5166360" cy="914400"/>
           </a:xfrm>
           <a:prstGeom prst="rect">
             <a:avLst/>
@@ -20519,227 +16800,7 @@
                 </a:solidFill>
                 <a:latin typeface="Calibri"/>
               </a:rPr>
-              <a:t>Which patterns fit our needs, at what cost?</a:t>
-            </a:r>
-          </a:p>
-        </p:txBody>
-      </p:sp>
-      <p:sp>
-        <p:nvSpPr>
-          <p:cNvPr id="12" name="Card"/>
-          <p:cNvSpPr/>
-          <p:nvPr/>
-        </p:nvSpPr>
-        <p:spPr>
-          <a:xfrm>
-            <a:off x="411480" y="3904488"/>
-            <a:ext cx="8321040" cy="841248"/>
-          </a:xfrm>
-          <a:prstGeom prst="rect">
-            <a:avLst/>
-          </a:prstGeom>
-          <a:solidFill>
-            <a:srgbClr val="FCFAF6"/>
-          </a:solidFill>
-          <a:ln>
-            <a:noFill/>
-          </a:ln>
-          <a:effectLst/>
-        </p:spPr>
-        <p:txBody>
-          <a:bodyPr rtlCol="0" anchor="ctr" wrap="square"/>
-          <a:lstStyle/>
-          <a:p/>
-        </p:txBody>
-      </p:sp>
-      <p:sp>
-        <p:nvSpPr>
-          <p:cNvPr id="13" name="RowLabel"/>
-          <p:cNvSpPr/>
-          <p:nvPr/>
-        </p:nvSpPr>
-        <p:spPr>
-          <a:xfrm>
-            <a:off x="557784" y="3941064"/>
-            <a:ext cx="2788920" cy="768096"/>
-          </a:xfrm>
-          <a:prstGeom prst="rect">
-            <a:avLst/>
-          </a:prstGeom>
-          <a:noFill/>
-          <a:ln>
-            <a:noFill/>
-          </a:ln>
-          <a:effectLst/>
-        </p:spPr>
-        <p:txBody>
-          <a:bodyPr rtlCol="0" anchor="ctr" wrap="square"/>
-          <a:lstStyle/>
-          <a:p>
-            <a:pPr algn="l">
-              <a:spcAft>
-                <a:spcPts val="0"/>
-              </a:spcAft>
-            </a:pPr>
-            <a:r>
-              <a:rPr sz="2200" b="1">
-                <a:solidFill>
-                  <a:srgbClr val="8E6F3E"/>
-                </a:solidFill>
-                <a:latin typeface="Calibri"/>
-              </a:rPr>
-              <a:t>Software supply chains</a:t>
-            </a:r>
-          </a:p>
-        </p:txBody>
-      </p:sp>
-      <p:sp>
-        <p:nvSpPr>
-          <p:cNvPr id="14" name="RowBody"/>
-          <p:cNvSpPr/>
-          <p:nvPr/>
-        </p:nvSpPr>
-        <p:spPr>
-          <a:xfrm>
-            <a:off x="3438144" y="3941064"/>
-            <a:ext cx="5166360" cy="768096"/>
-          </a:xfrm>
-          <a:prstGeom prst="rect">
-            <a:avLst/>
-          </a:prstGeom>
-          <a:noFill/>
-          <a:ln>
-            <a:noFill/>
-          </a:ln>
-          <a:effectLst/>
-        </p:spPr>
-        <p:txBody>
-          <a:bodyPr rtlCol="0" anchor="ctr" wrap="square"/>
-          <a:lstStyle/>
-          <a:p>
-            <a:pPr algn="l">
-              <a:spcAft>
-                <a:spcPts val="0"/>
-              </a:spcAft>
-            </a:pPr>
-            <a:r>
-              <a:rPr sz="2000" b="0">
-                <a:solidFill>
-                  <a:srgbClr val="555960"/>
-                </a:solidFill>
-                <a:latin typeface="Calibri"/>
-              </a:rPr>
-              <a:t>What code and obligations did we inherit?</a:t>
-            </a:r>
-          </a:p>
-        </p:txBody>
-      </p:sp>
-      <p:sp>
-        <p:nvSpPr>
-          <p:cNvPr id="15" name="Card"/>
-          <p:cNvSpPr/>
-          <p:nvPr/>
-        </p:nvSpPr>
-        <p:spPr>
-          <a:xfrm>
-            <a:off x="411480" y="4855464"/>
-            <a:ext cx="8321040" cy="841248"/>
-          </a:xfrm>
-          <a:prstGeom prst="rect">
-            <a:avLst/>
-          </a:prstGeom>
-          <a:solidFill>
-            <a:srgbClr val="F5F1E8"/>
-          </a:solidFill>
-          <a:ln>
-            <a:noFill/>
-          </a:ln>
-          <a:effectLst/>
-        </p:spPr>
-        <p:txBody>
-          <a:bodyPr rtlCol="0" anchor="ctr" wrap="square"/>
-          <a:lstStyle/>
-          <a:p/>
-        </p:txBody>
-      </p:sp>
-      <p:sp>
-        <p:nvSpPr>
-          <p:cNvPr id="16" name="RowLabel"/>
-          <p:cNvSpPr/>
-          <p:nvPr/>
-        </p:nvSpPr>
-        <p:spPr>
-          <a:xfrm>
-            <a:off x="557784" y="4892040"/>
-            <a:ext cx="2788920" cy="768096"/>
-          </a:xfrm>
-          <a:prstGeom prst="rect">
-            <a:avLst/>
-          </a:prstGeom>
-          <a:noFill/>
-          <a:ln>
-            <a:noFill/>
-          </a:ln>
-          <a:effectLst/>
-        </p:spPr>
-        <p:txBody>
-          <a:bodyPr rtlCol="0" anchor="ctr" wrap="square"/>
-          <a:lstStyle/>
-          <a:p>
-            <a:pPr algn="l">
-              <a:spcAft>
-                <a:spcPts val="0"/>
-              </a:spcAft>
-            </a:pPr>
-            <a:r>
-              <a:rPr sz="2200" b="1">
-                <a:solidFill>
-                  <a:srgbClr val="8E6F3E"/>
-                </a:solidFill>
-                <a:latin typeface="Calibri"/>
-              </a:rPr>
-              <a:t>Judgment and controls</a:t>
-            </a:r>
-          </a:p>
-        </p:txBody>
-      </p:sp>
-      <p:sp>
-        <p:nvSpPr>
-          <p:cNvPr id="17" name="RowBody"/>
-          <p:cNvSpPr/>
-          <p:nvPr/>
-        </p:nvSpPr>
-        <p:spPr>
-          <a:xfrm>
-            <a:off x="3438144" y="4892040"/>
-            <a:ext cx="5166360" cy="768096"/>
-          </a:xfrm>
-          <a:prstGeom prst="rect">
-            <a:avLst/>
-          </a:prstGeom>
-          <a:noFill/>
-          <a:ln>
-            <a:noFill/>
-          </a:ln>
-          <a:effectLst/>
-        </p:spPr>
-        <p:txBody>
-          <a:bodyPr rtlCol="0" anchor="ctr" wrap="square"/>
-          <a:lstStyle/>
-          <a:p>
-            <a:pPr algn="l">
-              <a:spcAft>
-                <a:spcPts val="0"/>
-              </a:spcAft>
-            </a:pPr>
-            <a:r>
-              <a:rPr sz="2000" b="0">
-                <a:solidFill>
-                  <a:srgbClr val="555960"/>
-                </a:solidFill>
-                <a:latin typeface="Calibri"/>
-              </a:rPr>
-              <a:t>What makes the system worthy of reliance?</a:t>
+              <a:t>What evidence and controls justify continued reliance?</a:t>
             </a:r>
           </a:p>
         </p:txBody>
@@ -21520,7 +17581,7 @@
                 </a:solidFill>
                 <a:latin typeface="Calibri"/>
               </a:rPr>
-              <a:t>Exercise: organize the reservation service</a:t>
+              <a:t>Exercise: restructure the reservation service?</a:t>
             </a:r>
           </a:p>
         </p:txBody>
@@ -21534,7 +17595,7 @@
         <p:spPr>
           <a:xfrm>
             <a:off x="411480" y="914400"/>
-            <a:ext cx="8321040" cy="1234440"/>
+            <a:ext cx="8321040" cy="1463040"/>
           </a:xfrm>
           <a:prstGeom prst="rect">
             <a:avLst/>
@@ -21589,7 +17650,7 @@
                 </a:solidFill>
                 <a:latin typeface="Calibri"/>
               </a:rPr>
-              <a:t>REQUIREMENTS</a:t>
+              <a:t>THE SITUATION</a:t>
             </a:r>
           </a:p>
         </p:txBody>
@@ -21603,7 +17664,7 @@
         <p:spPr>
           <a:xfrm>
             <a:off x="557784" y="1371600"/>
-            <a:ext cx="8046720" cy="731520"/>
+            <a:ext cx="8046720" cy="960120"/>
           </a:xfrm>
           <a:prstGeom prst="rect">
             <a:avLst/>
@@ -21630,7 +17691,7 @@
                 </a:solidFill>
                 <a:latin typeface="Calibri"/>
               </a:rPr>
-              <a:t>a team of four · hundreds of users · several policy changes per semester · bookings stay atomic · no requirement for independent deployment</a:t>
+              <a:t>your agent produced a working reservation service with weak internal boundaries · the lab-policy change now touches four of five components · more policy changes arrive each semester</a:t>
             </a:r>
           </a:p>
         </p:txBody>
@@ -21643,8 +17704,8 @@
         </p:nvSpPr>
         <p:spPr>
           <a:xfrm>
-            <a:off x="411480" y="2331720"/>
-            <a:ext cx="4023360" cy="2377440"/>
+            <a:off x="411480" y="2560320"/>
+            <a:ext cx="4023360" cy="2560320"/>
           </a:xfrm>
           <a:prstGeom prst="rect">
             <a:avLst/>
@@ -21671,7 +17732,7 @@
         </p:nvSpPr>
         <p:spPr>
           <a:xfrm>
-            <a:off x="557784" y="2404872"/>
+            <a:off x="557784" y="2633472"/>
             <a:ext cx="3749040" cy="365760"/>
           </a:xfrm>
           <a:prstGeom prst="rect">
@@ -21712,8 +17773,8 @@
         </p:nvSpPr>
         <p:spPr>
           <a:xfrm>
-            <a:off x="557784" y="2788920"/>
-            <a:ext cx="3749040" cy="1828800"/>
+            <a:off x="557784" y="3017520"/>
+            <a:ext cx="3749040" cy="2011680"/>
           </a:xfrm>
           <a:prstGeom prst="rect">
             <a:avLst/>
@@ -21740,7 +17801,7 @@
                 </a:solidFill>
                 <a:latin typeface="Calibri"/>
               </a:rPr>
-              <a:t>choose: monolith, modular monolith, or services</a:t>
+              <a:t>retain the current structure, refactor to a modular monolith, or extract services?</a:t>
             </a:r>
           </a:p>
           <a:p>
@@ -21756,7 +17817,7 @@
                 </a:solidFill>
                 <a:latin typeface="Calibri"/>
               </a:rPr>
-              <a:t>justify the tradeoffs against the requirements</a:t>
+              <a:t>argue from the expected changes</a:t>
             </a:r>
           </a:p>
           <a:p>
@@ -21772,7 +17833,7 @@
                 </a:solidFill>
                 <a:latin typeface="Calibri"/>
               </a:rPr>
-              <a:t>name the evidence that would change your choice</a:t>
+              <a:t>name the evidence that would justify the restructuring cost</a:t>
             </a:r>
           </a:p>
         </p:txBody>
@@ -21785,8 +17846,8 @@
         </p:nvSpPr>
         <p:spPr>
           <a:xfrm>
-            <a:off x="4617720" y="2331720"/>
-            <a:ext cx="4114800" cy="2377440"/>
+            <a:off x="4617720" y="2560320"/>
+            <a:ext cx="4114800" cy="2560320"/>
           </a:xfrm>
           <a:prstGeom prst="rect">
             <a:avLst/>
@@ -21813,7 +17874,7 @@
         </p:nvSpPr>
         <p:spPr>
           <a:xfrm>
-            <a:off x="4764024" y="2404872"/>
+            <a:off x="4764024" y="2633472"/>
             <a:ext cx="3840480" cy="365760"/>
           </a:xfrm>
           <a:prstGeom prst="rect">
@@ -21854,8 +17915,8 @@
         </p:nvSpPr>
         <p:spPr>
           <a:xfrm>
-            <a:off x="4764024" y="2788920"/>
-            <a:ext cx="3840480" cy="1828800"/>
+            <a:off x="4764024" y="3017520"/>
+            <a:ext cx="3840480" cy="2011680"/>
           </a:xfrm>
           <a:prstGeom prst="rect">
             <a:avLst/>
@@ -21882,7 +17943,7 @@
                 </a:solidFill>
                 <a:latin typeface="Calibri"/>
               </a:rPr>
-              <a:t>two separate owning teams</a:t>
+              <a:t>only one more policy change is ever expected</a:t>
             </a:r>
           </a:p>
           <a:p>
@@ -21898,7 +17959,7 @@
                 </a:solidFill>
                 <a:latin typeface="Calibri"/>
               </a:rPr>
-              <a:t>policy reads 100x the booking load</a:t>
+              <a:t>a second owning team takes over approvals</a:t>
             </a:r>
           </a:p>
           <a:p>
@@ -21997,7 +18058,7 @@
                 </a:solidFill>
                 <a:latin typeface="Calibri"/>
               </a:rPr>
-              <a:t>Which organization, under these requirements? Defend the tradeoff.</a:t>
+              <a:t>Retain, refactor, or extract? Name the evidence that justifies the cost.</a:t>
             </a:r>
           </a:p>
         </p:txBody>
@@ -22067,7 +18128,7 @@
                 </a:solidFill>
                 <a:latin typeface="Calibri"/>
               </a:rPr>
-              <a:t>What did we inherit from dependencies?</a:t>
+              <a:t>What components and obligations did we inherit?</a:t>
             </a:r>
           </a:p>
         </p:txBody>
@@ -22108,7 +18169,7 @@
                 </a:solidFill>
                 <a:latin typeface="Calibri"/>
               </a:rPr>
-              <a:t>SECTION 4</a:t>
+              <a:t>QUESTION 2</a:t>
             </a:r>
           </a:p>
         </p:txBody>
@@ -23526,8 +19587,8 @@
         </p:nvSpPr>
         <p:spPr>
           <a:xfrm>
-            <a:off x="411480" y="2944368"/>
-            <a:ext cx="8321040" cy="329184"/>
+            <a:off x="411480" y="2871216"/>
+            <a:ext cx="8321040" cy="310896"/>
           </a:xfrm>
           <a:prstGeom prst="rect">
             <a:avLst/>
@@ -23567,8 +19628,8 @@
         </p:nvSpPr>
         <p:spPr>
           <a:xfrm>
-            <a:off x="411480" y="3310128"/>
-            <a:ext cx="8321040" cy="502920"/>
+            <a:off x="411480" y="3200400"/>
+            <a:ext cx="8321040" cy="475488"/>
           </a:xfrm>
           <a:prstGeom prst="rect">
             <a:avLst/>
@@ -23595,8 +19656,8 @@
         </p:nvSpPr>
         <p:spPr>
           <a:xfrm>
-            <a:off x="557784" y="3337560"/>
-            <a:ext cx="2788920" cy="448056"/>
+            <a:off x="557784" y="3227832"/>
+            <a:ext cx="2788920" cy="420624"/>
           </a:xfrm>
           <a:prstGeom prst="rect">
             <a:avLst/>
@@ -23636,8 +19697,8 @@
         </p:nvSpPr>
         <p:spPr>
           <a:xfrm>
-            <a:off x="3438144" y="3337560"/>
-            <a:ext cx="5166360" cy="448056"/>
+            <a:off x="3438144" y="3227832"/>
+            <a:ext cx="5166360" cy="420624"/>
           </a:xfrm>
           <a:prstGeom prst="rect">
             <a:avLst/>
@@ -23677,8 +19738,8 @@
         </p:nvSpPr>
         <p:spPr>
           <a:xfrm>
-            <a:off x="411480" y="3840480"/>
-            <a:ext cx="8321040" cy="502920"/>
+            <a:off x="411480" y="3694176"/>
+            <a:ext cx="8321040" cy="475488"/>
           </a:xfrm>
           <a:prstGeom prst="rect">
             <a:avLst/>
@@ -23705,8 +19766,8 @@
         </p:nvSpPr>
         <p:spPr>
           <a:xfrm>
-            <a:off x="557784" y="3867912"/>
-            <a:ext cx="2788920" cy="448056"/>
+            <a:off x="557784" y="3721608"/>
+            <a:ext cx="2788920" cy="420624"/>
           </a:xfrm>
           <a:prstGeom prst="rect">
             <a:avLst/>
@@ -23746,8 +19807,8 @@
         </p:nvSpPr>
         <p:spPr>
           <a:xfrm>
-            <a:off x="3438144" y="3867912"/>
-            <a:ext cx="5166360" cy="448056"/>
+            <a:off x="3438144" y="3721608"/>
+            <a:ext cx="5166360" cy="420624"/>
           </a:xfrm>
           <a:prstGeom prst="rect">
             <a:avLst/>
@@ -23787,8 +19848,8 @@
         </p:nvSpPr>
         <p:spPr>
           <a:xfrm>
-            <a:off x="411480" y="4370832"/>
-            <a:ext cx="8321040" cy="502920"/>
+            <a:off x="411480" y="4187952"/>
+            <a:ext cx="8321040" cy="475488"/>
           </a:xfrm>
           <a:prstGeom prst="rect">
             <a:avLst/>
@@ -23815,8 +19876,8 @@
         </p:nvSpPr>
         <p:spPr>
           <a:xfrm>
-            <a:off x="557784" y="4398264"/>
-            <a:ext cx="2788920" cy="448056"/>
+            <a:off x="557784" y="4215384"/>
+            <a:ext cx="2788920" cy="420624"/>
           </a:xfrm>
           <a:prstGeom prst="rect">
             <a:avLst/>
@@ -23856,8 +19917,8 @@
         </p:nvSpPr>
         <p:spPr>
           <a:xfrm>
-            <a:off x="3438144" y="4398264"/>
-            <a:ext cx="5166360" cy="448056"/>
+            <a:off x="3438144" y="4215384"/>
+            <a:ext cx="5166360" cy="420624"/>
           </a:xfrm>
           <a:prstGeom prst="rect">
             <a:avLst/>
@@ -23897,8 +19958,8 @@
         </p:nvSpPr>
         <p:spPr>
           <a:xfrm>
-            <a:off x="411480" y="4901184"/>
-            <a:ext cx="8321040" cy="502920"/>
+            <a:off x="411480" y="4681728"/>
+            <a:ext cx="8321040" cy="475488"/>
           </a:xfrm>
           <a:prstGeom prst="rect">
             <a:avLst/>
@@ -23925,8 +19986,8 @@
         </p:nvSpPr>
         <p:spPr>
           <a:xfrm>
-            <a:off x="557784" y="4928616"/>
-            <a:ext cx="2788920" cy="448056"/>
+            <a:off x="557784" y="4709160"/>
+            <a:ext cx="2788920" cy="420624"/>
           </a:xfrm>
           <a:prstGeom prst="rect">
             <a:avLst/>
@@ -23966,8 +20027,8 @@
         </p:nvSpPr>
         <p:spPr>
           <a:xfrm>
-            <a:off x="3438144" y="4928616"/>
-            <a:ext cx="5166360" cy="448056"/>
+            <a:off x="3438144" y="4709160"/>
+            <a:ext cx="5166360" cy="420624"/>
           </a:xfrm>
           <a:prstGeom prst="rect">
             <a:avLst/>
@@ -23994,7 +20055,7 @@
                 </a:solidFill>
                 <a:latin typeface="Calibri"/>
               </a:rPr>
-              <a:t>shareable inventory of what ships</a:t>
+              <a:t>generated inventory of what ships</a:t>
             </a:r>
           </a:p>
         </p:txBody>
@@ -24007,8 +20068,8 @@
         </p:nvSpPr>
         <p:spPr>
           <a:xfrm>
-            <a:off x="411480" y="5468112"/>
-            <a:ext cx="8321040" cy="301752"/>
+            <a:off x="411480" y="5248656"/>
+            <a:ext cx="8321040" cy="292608"/>
           </a:xfrm>
           <a:prstGeom prst="rect">
             <a:avLst/>
@@ -24048,8 +20109,8 @@
         </p:nvSpPr>
         <p:spPr>
           <a:xfrm>
-            <a:off x="274320" y="5879592"/>
-            <a:ext cx="8595360" cy="502920"/>
+            <a:off x="274320" y="5669280"/>
+            <a:ext cx="8595360" cy="713232"/>
           </a:xfrm>
           <a:prstGeom prst="rect">
             <a:avLst/>
@@ -24090,8 +20151,8 @@
         </p:nvSpPr>
         <p:spPr>
           <a:xfrm>
-            <a:off x="384048" y="5897880"/>
-            <a:ext cx="8375904" cy="457200"/>
+            <a:off x="384048" y="5687568"/>
+            <a:ext cx="8375904" cy="658368"/>
           </a:xfrm>
           <a:prstGeom prst="rect">
             <a:avLst/>
@@ -24118,7 +20179,7 @@
                 </a:solidFill>
                 <a:latin typeface="Calibri"/>
               </a:rPr>
-              <a:t>An SBOM records what is known, not whether it is safe</a:t>
+              <a:t>An SBOM is a generated inventory, not necessarily a complete one; it records what is known, not whether it is safe</a:t>
             </a:r>
           </a:p>
         </p:txBody>
@@ -25627,7 +21688,7 @@
         <p:spPr>
           <a:xfrm>
             <a:off x="411480" y="914400"/>
-            <a:ext cx="3017520" cy="3246120"/>
+            <a:ext cx="2514600" cy="3520440"/>
           </a:xfrm>
           <a:prstGeom prst="rect">
             <a:avLst/>
@@ -25655,7 +21716,7 @@
         <p:spPr>
           <a:xfrm>
             <a:off x="557784" y="1005840"/>
-            <a:ext cx="2743200" cy="3063240"/>
+            <a:ext cx="2240280" cy="3337560"/>
           </a:xfrm>
           <a:prstGeom prst="rect">
             <a:avLst/>
@@ -25753,13 +21814,13 @@
       </p:sp>
       <p:graphicFrame>
         <p:nvGraphicFramePr>
-          <p:cNvPr id="5" name="ProvTable" descr="Provenance mechanisms and the distinct risk each addresses: pinning, hashes, signatures, build attestations, trusted registries"/>
+          <p:cNvPr id="5" name="ProvTable" descr="Provenance mechanisms, the assurance each provides, and the assumption that assurance rests on: pinning, hashes, signatures, build attestations, trusted registries"/>
           <p:cNvGraphicFramePr/>
           <p:nvPr/>
         </p:nvGraphicFramePr>
         <p:xfrm>
-          <a:off x="3657600" y="914400"/>
-          <a:ext cx="5074920" cy="3236976"/>
+          <a:off x="3017520" y="914400"/>
+          <a:ext cx="5623560" cy="3236976"/>
         </p:xfrm>
         <a:graphic>
           <a:graphicData uri="http://schemas.openxmlformats.org/drawingml/2006/table">
@@ -25768,8 +21829,9 @@
                 <a:tableStyleId>{5C22544A-7EE6-4342-B048-85BDC9FD1C3A}</a:tableStyleId>
               </a:tblPr>
               <a:tblGrid>
-                <a:gridCol w="2240280"/>
-                <a:gridCol w="2834640"/>
+                <a:gridCol w="1691640"/>
+                <a:gridCol w="1874519"/>
+                <a:gridCol w="2057400"/>
               </a:tblGrid>
               <a:tr h="539496">
                 <a:tc>
@@ -25788,7 +21850,7 @@
                       </a:r>
                     </a:p>
                   </a:txBody>
-                  <a:tcPr marL="91440" marR="91440" marT="36576" marB="36576" anchor="ctr">
+                  <a:tcPr marL="91440" marR="91440" marT="18288" marB="18288" anchor="ctr">
                     <a:solidFill>
                       <a:srgbClr val="8E6F3E"/>
                     </a:solidFill>
@@ -25806,11 +21868,33 @@
                           </a:solidFill>
                           <a:latin typeface="Calibri"/>
                         </a:rPr>
-                        <a:t>risk it addresses</a:t>
+                        <a:t>assurance provided</a:t>
                       </a:r>
                     </a:p>
                   </a:txBody>
-                  <a:tcPr marL="91440" marR="91440" marT="36576" marB="36576" anchor="ctr">
+                  <a:tcPr marL="91440" marR="91440" marT="18288" marB="18288" anchor="ctr">
+                    <a:solidFill>
+                      <a:srgbClr val="8E6F3E"/>
+                    </a:solidFill>
+                  </a:tcPr>
+                </a:tc>
+                <a:tc>
+                  <a:txBody>
+                    <a:bodyPr wrap="square"/>
+                    <a:lstStyle/>
+                    <a:p>
+                      <a:r>
+                        <a:rPr sz="2000" b="1">
+                          <a:solidFill>
+                            <a:srgbClr val="FFFFFF"/>
+                          </a:solidFill>
+                          <a:latin typeface="Calibri"/>
+                        </a:rPr>
+                        <a:t>assumption it rests on</a:t>
+                      </a:r>
+                    </a:p>
+                  </a:txBody>
+                  <a:tcPr marL="91440" marR="91440" marT="18288" marB="18288" anchor="ctr">
                     <a:solidFill>
                       <a:srgbClr val="8E6F3E"/>
                     </a:solidFill>
@@ -25834,7 +21918,7 @@
                       </a:r>
                     </a:p>
                   </a:txBody>
-                  <a:tcPr marL="91440" marR="91440" marT="36576" marB="36576" anchor="ctr">
+                  <a:tcPr marL="91440" marR="91440" marT="18288" marB="18288" anchor="ctr">
                     <a:solidFill>
                       <a:srgbClr val="F5F1E8"/>
                     </a:solidFill>
@@ -25852,11 +21936,33 @@
                           </a:solidFill>
                           <a:latin typeface="Calibri"/>
                         </a:rPr>
-                        <a:t>surprise updates</a:t>
+                        <a:t>no surprise updates</a:t>
                       </a:r>
                     </a:p>
                   </a:txBody>
-                  <a:tcPr marL="91440" marR="91440" marT="36576" marB="36576" anchor="ctr">
+                  <a:tcPr marL="91440" marR="91440" marT="18288" marB="18288" anchor="ctr">
+                    <a:solidFill>
+                      <a:srgbClr val="F5F1E8"/>
+                    </a:solidFill>
+                  </a:tcPr>
+                </a:tc>
+                <a:tc>
+                  <a:txBody>
+                    <a:bodyPr wrap="square"/>
+                    <a:lstStyle/>
+                    <a:p>
+                      <a:r>
+                        <a:rPr sz="2000" b="0">
+                          <a:solidFill>
+                            <a:srgbClr val="2D2D2D"/>
+                          </a:solidFill>
+                          <a:latin typeface="Calibri"/>
+                        </a:rPr>
+                        <a:t>the pinned bytes were right</a:t>
+                      </a:r>
+                    </a:p>
+                  </a:txBody>
+                  <a:tcPr marL="91440" marR="91440" marT="18288" marB="18288" anchor="ctr">
                     <a:solidFill>
                       <a:srgbClr val="F5F1E8"/>
                     </a:solidFill>
@@ -25880,7 +21986,7 @@
                       </a:r>
                     </a:p>
                   </a:txBody>
-                  <a:tcPr marL="91440" marR="91440" marT="36576" marB="36576" anchor="ctr">
+                  <a:tcPr marL="91440" marR="91440" marT="18288" marB="18288" anchor="ctr">
                     <a:solidFill>
                       <a:srgbClr val="FCFAF6"/>
                     </a:solidFill>
@@ -25898,11 +22004,33 @@
                           </a:solidFill>
                           <a:latin typeface="Calibri"/>
                         </a:rPr>
-                        <a:t>tampering in transit</a:t>
+                        <a:t>bytes match the record</a:t>
                       </a:r>
                     </a:p>
                   </a:txBody>
-                  <a:tcPr marL="91440" marR="91440" marT="36576" marB="36576" anchor="ctr">
+                  <a:tcPr marL="91440" marR="91440" marT="18288" marB="18288" anchor="ctr">
+                    <a:solidFill>
+                      <a:srgbClr val="FCFAF6"/>
+                    </a:solidFill>
+                  </a:tcPr>
+                </a:tc>
+                <a:tc>
+                  <a:txBody>
+                    <a:bodyPr wrap="square"/>
+                    <a:lstStyle/>
+                    <a:p>
+                      <a:r>
+                        <a:rPr sz="2000" b="0">
+                          <a:solidFill>
+                            <a:srgbClr val="2D2D2D"/>
+                          </a:solidFill>
+                          <a:latin typeface="Calibri"/>
+                        </a:rPr>
+                        <a:t>the recorded hash is authentic</a:t>
+                      </a:r>
+                    </a:p>
+                  </a:txBody>
+                  <a:tcPr marL="91440" marR="91440" marT="18288" marB="18288" anchor="ctr">
                     <a:solidFill>
                       <a:srgbClr val="FCFAF6"/>
                     </a:solidFill>
@@ -25926,7 +22054,7 @@
                       </a:r>
                     </a:p>
                   </a:txBody>
-                  <a:tcPr marL="91440" marR="91440" marT="36576" marB="36576" anchor="ctr">
+                  <a:tcPr marL="91440" marR="91440" marT="18288" marB="18288" anchor="ctr">
                     <a:solidFill>
                       <a:srgbClr val="F5F1E8"/>
                     </a:solidFill>
@@ -25944,11 +22072,33 @@
                           </a:solidFill>
                           <a:latin typeface="Calibri"/>
                         </a:rPr>
-                        <a:t>substitution by a stranger</a:t>
+                        <a:t>a key holder endorsed it</a:t>
                       </a:r>
                     </a:p>
                   </a:txBody>
-                  <a:tcPr marL="91440" marR="91440" marT="36576" marB="36576" anchor="ctr">
+                  <a:tcPr marL="91440" marR="91440" marT="18288" marB="18288" anchor="ctr">
+                    <a:solidFill>
+                      <a:srgbClr val="F5F1E8"/>
+                    </a:solidFill>
+                  </a:tcPr>
+                </a:tc>
+                <a:tc>
+                  <a:txBody>
+                    <a:bodyPr wrap="square"/>
+                    <a:lstStyle/>
+                    <a:p>
+                      <a:r>
+                        <a:rPr sz="2000" b="0">
+                          <a:solidFill>
+                            <a:srgbClr val="2D2D2D"/>
+                          </a:solidFill>
+                          <a:latin typeface="Calibri"/>
+                        </a:rPr>
+                        <a:t>the signing key and identity</a:t>
+                      </a:r>
+                    </a:p>
+                  </a:txBody>
+                  <a:tcPr marL="91440" marR="91440" marT="18288" marB="18288" anchor="ctr">
                     <a:solidFill>
                       <a:srgbClr val="F5F1E8"/>
                     </a:solidFill>
@@ -25972,7 +22122,7 @@
                       </a:r>
                     </a:p>
                   </a:txBody>
-                  <a:tcPr marL="91440" marR="91440" marT="36576" marB="36576" anchor="ctr">
+                  <a:tcPr marL="91440" marR="91440" marT="18288" marB="18288" anchor="ctr">
                     <a:solidFill>
                       <a:srgbClr val="FCFAF6"/>
                     </a:solidFill>
@@ -25990,11 +22140,33 @@
                           </a:solidFill>
                           <a:latin typeface="Calibri"/>
                         </a:rPr>
-                        <a:t>a tampered pipeline</a:t>
+                        <a:t>built as described</a:t>
                       </a:r>
                     </a:p>
                   </a:txBody>
-                  <a:tcPr marL="91440" marR="91440" marT="36576" marB="36576" anchor="ctr">
+                  <a:tcPr marL="91440" marR="91440" marT="18288" marB="18288" anchor="ctr">
+                    <a:solidFill>
+                      <a:srgbClr val="FCFAF6"/>
+                    </a:solidFill>
+                  </a:tcPr>
+                </a:tc>
+                <a:tc>
+                  <a:txBody>
+                    <a:bodyPr wrap="square"/>
+                    <a:lstStyle/>
+                    <a:p>
+                      <a:r>
+                        <a:rPr sz="2000" b="0">
+                          <a:solidFill>
+                            <a:srgbClr val="2D2D2D"/>
+                          </a:solidFill>
+                          <a:latin typeface="Calibri"/>
+                        </a:rPr>
+                        <a:t>the attesting pipeline is honest</a:t>
+                      </a:r>
+                    </a:p>
+                  </a:txBody>
+                  <a:tcPr marL="91440" marR="91440" marT="18288" marB="18288" anchor="ctr">
                     <a:solidFill>
                       <a:srgbClr val="FCFAF6"/>
                     </a:solidFill>
@@ -26018,7 +22190,7 @@
                       </a:r>
                     </a:p>
                   </a:txBody>
-                  <a:tcPr marL="91440" marR="91440" marT="36576" marB="36576" anchor="ctr">
+                  <a:tcPr marL="91440" marR="91440" marT="18288" marB="18288" anchor="ctr">
                     <a:solidFill>
                       <a:srgbClr val="F5F1E8"/>
                     </a:solidFill>
@@ -26036,11 +22208,33 @@
                           </a:solidFill>
                           <a:latin typeface="Calibri"/>
                         </a:rPr>
-                        <a:t>registry compromise</a:t>
+                        <a:t>substitution is harder</a:t>
                       </a:r>
                     </a:p>
                   </a:txBody>
-                  <a:tcPr marL="91440" marR="91440" marT="36576" marB="36576" anchor="ctr">
+                  <a:tcPr marL="91440" marR="91440" marT="18288" marB="18288" anchor="ctr">
+                    <a:solidFill>
+                      <a:srgbClr val="F5F1E8"/>
+                    </a:solidFill>
+                  </a:tcPr>
+                </a:tc>
+                <a:tc>
+                  <a:txBody>
+                    <a:bodyPr wrap="square"/>
+                    <a:lstStyle/>
+                    <a:p>
+                      <a:r>
+                        <a:rPr sz="2000" b="0">
+                          <a:solidFill>
+                            <a:srgbClr val="2D2D2D"/>
+                          </a:solidFill>
+                          <a:latin typeface="Calibri"/>
+                        </a:rPr>
+                        <a:t>the registry's own integrity</a:t>
+                      </a:r>
+                    </a:p>
+                  </a:txBody>
+                  <a:tcPr marL="91440" marR="91440" marT="18288" marB="18288" anchor="ctr">
                     <a:solidFill>
                       <a:srgbClr val="F5F1E8"/>
                     </a:solidFill>
@@ -26059,8 +22253,8 @@
         </p:nvSpPr>
         <p:spPr>
           <a:xfrm>
-            <a:off x="411480" y="4370832"/>
-            <a:ext cx="8321040" cy="1078992"/>
+            <a:off x="411480" y="5074920"/>
+            <a:ext cx="8321040" cy="713232"/>
           </a:xfrm>
           <a:prstGeom prst="rect">
             <a:avLst/>
@@ -26087,8 +22281,8 @@
         </p:nvSpPr>
         <p:spPr>
           <a:xfrm>
-            <a:off x="557784" y="4425696"/>
-            <a:ext cx="8046720" cy="987552"/>
+            <a:off x="557784" y="5120640"/>
+            <a:ext cx="8046720" cy="621792"/>
           </a:xfrm>
           <a:prstGeom prst="rect">
             <a:avLst/>
@@ -26115,23 +22309,7 @@
                 </a:solidFill>
                 <a:latin typeface="Calibri"/>
               </a:rPr>
-              <a:t>No mechanism here establishes absence of malicious code</a:t>
-            </a:r>
-          </a:p>
-          <a:p>
-            <a:pPr algn="l">
-              <a:spcAft>
-                <a:spcPts val="0"/>
-              </a:spcAft>
-            </a:pPr>
-            <a:r>
-              <a:rPr sz="2000" b="0">
-                <a:solidFill>
-                  <a:srgbClr val="555960"/>
-                </a:solidFill>
-                <a:latin typeface="Calibri"/>
-              </a:rPr>
-              <a:t>Each bounds a different substitution or tampering risk; together they narrow, never close, the gap.</a:t>
+              <a:t>A trusted registry is itself a trust dependency; it does not protect against its own compromise</a:t>
             </a:r>
           </a:p>
         </p:txBody>
@@ -28238,7 +24416,7 @@
                 </a:solidFill>
                 <a:latin typeface="Calibri"/>
               </a:rPr>
-              <a:t>It works, but is it reliable?</a:t>
+              <a:t>It works. What did we inherit?</a:t>
             </a:r>
           </a:p>
         </p:txBody>
@@ -28744,7 +24922,7 @@
       </p:sp>
       <p:sp>
         <p:nvSpPr>
-          <p:cNvPr id="14" name="SketchCard" descr="Illustrative sketch of the generated implementation: handlers, policy, auth, and storage modules with entangled dependencies, every module reaching storage directly"/>
+          <p:cNvPr id="14" name="SketchCard" descr="Illustrative sketch of the internal architecture of the generated implementation: handlers, policy, auth, and storage modules with entangled dependencies, every module reaching storage directly"/>
           <p:cNvSpPr/>
           <p:nvPr/>
         </p:nvSpPr>
@@ -28806,7 +24984,7 @@
                 </a:solidFill>
                 <a:latin typeface="Calibri"/>
               </a:rPr>
-              <a:t>INSIDE THE IMPLEMENTATION WE ACCEPTED</a:t>
+              <a:t>THE INTERNAL ARCHITECTURE WE ACCEPTED</a:t>
             </a:r>
             <a:r>
               <a:rPr sz="2000" b="0">
@@ -29240,7 +25418,7 @@
                 </a:solidFill>
                 <a:latin typeface="Calibri"/>
               </a:rPr>
-              <a:t>Which files and obligations must change? Which inherited packages can we trust and update?</a:t>
+              <a:t>Inside: which modules must change? Outside: which inherited packages can we trust and update?</a:t>
             </a:r>
           </a:p>
         </p:txBody>
@@ -29439,7 +25617,7 @@
                 </a:solidFill>
                 <a:latin typeface="Calibri"/>
               </a:rPr>
-              <a:t>What makes the system worthy of reliance?</a:t>
+              <a:t>What evidence and controls justify continued reliance?</a:t>
             </a:r>
           </a:p>
         </p:txBody>
@@ -29480,7 +25658,7 @@
                 </a:solidFill>
                 <a:latin typeface="Calibri"/>
               </a:rPr>
-              <a:t>SECTION 5</a:t>
+              <a:t>QUESTION 3</a:t>
             </a:r>
           </a:p>
         </p:txBody>
@@ -29521,7 +25699,7 @@
                 </a:solidFill>
                 <a:latin typeface="Calibri"/>
               </a:rPr>
-              <a:t>One picture of what we built and what we inherited, then the method that turns examination into standing obligations.</a:t>
+              <a:t>Judgments decay unless something holds them: a safety net for restructuring, standing controls for inherited obligations, one picture of both graphs.</a:t>
             </a:r>
           </a:p>
         </p:txBody>
@@ -30399,7 +26577,7 @@
                 </a:solidFill>
                 <a:latin typeface="Calibri"/>
               </a:rPr>
-              <a:t>The reliability question through the Act III method</a:t>
+              <a:t>The reliance question through the Act III method</a:t>
             </a:r>
           </a:p>
         </p:txBody>
@@ -31389,7 +27567,7 @@
                 </a:solidFill>
                 <a:latin typeface="Calibri"/>
               </a:rPr>
-              <a:t>The structure and the inherited components have been examined.</a:t>
+              <a:t>We have examined the system's structure and dependencies.</a:t>
             </a:r>
           </a:p>
           <a:p>
@@ -31405,7 +27583,808 @@
                 </a:solidFill>
                 <a:latin typeface="Calibri"/>
               </a:rPr>
-              <a:t>Next: does the system meet quantitative demands under load and failure?</a:t>
+              <a:t>Next we ask whether its behavior satisfies quantitative requirements under load and failure.</a:t>
+            </a:r>
+          </a:p>
+        </p:txBody>
+      </p:sp>
+    </p:spTree>
+  </p:cSld>
+  <p:clrMapOvr>
+    <a:masterClrMapping/>
+  </p:clrMapOvr>
+</p:sld>
+</file>
+
+<file path=ppt/slides/slide33.xml><?xml version="1.0" encoding="utf-8"?>
+<p:sld xmlns:a="http://schemas.openxmlformats.org/drawingml/2006/main" xmlns:p="http://schemas.openxmlformats.org/presentationml/2006/main" xmlns:r="http://schemas.openxmlformats.org/officeDocument/2006/relationships">
+  <p:cSld>
+    <p:spTree>
+      <p:nvGrpSpPr>
+        <p:cNvPr id="1" name=""/>
+        <p:cNvGrpSpPr/>
+        <p:nvPr/>
+      </p:nvGrpSpPr>
+      <p:grpSpPr/>
+      <p:sp>
+        <p:nvSpPr>
+          <p:cNvPr id="2" name="Title"/>
+          <p:cNvSpPr>
+            <a:spLocks noGrp="1"/>
+          </p:cNvSpPr>
+          <p:nvPr>
+            <p:ph type="title"/>
+          </p:nvPr>
+        </p:nvSpPr>
+        <p:spPr>
+          <a:xfrm>
+            <a:off x="274320" y="128016"/>
+            <a:ext cx="8595360" cy="594360"/>
+          </a:xfrm>
+          <a:prstGeom prst="rect">
+            <a:avLst/>
+          </a:prstGeom>
+          <a:noFill/>
+          <a:ln>
+            <a:noFill/>
+          </a:ln>
+          <a:effectLst/>
+        </p:spPr>
+        <p:txBody>
+          <a:bodyPr rtlCol="0" anchor="ctr" wrap="square"/>
+          <a:lstStyle/>
+          <a:p>
+            <a:pPr algn="l">
+              <a:spcAft>
+                <a:spcPts val="0"/>
+              </a:spcAft>
+            </a:pPr>
+            <a:r>
+              <a:rPr sz="2400" b="0">
+                <a:solidFill>
+                  <a:srgbClr val="2D2D2D"/>
+                </a:solidFill>
+                <a:latin typeface="Calibri"/>
+              </a:rPr>
+              <a:t>Two graphs we do not yet understand</a:t>
+            </a:r>
+          </a:p>
+        </p:txBody>
+      </p:sp>
+      <p:sp>
+        <p:nvSpPr>
+          <p:cNvPr id="3" name="IntContainer" descr="Internal subgraph: handlers, booking policy with the lab change, persistence, joined by structural coupling edges; persistence reaches the database as a runtime service"/>
+          <p:cNvSpPr/>
+          <p:nvPr/>
+        </p:nvSpPr>
+        <p:spPr>
+          <a:xfrm>
+            <a:off x="411480" y="914400"/>
+            <a:ext cx="3931920" cy="3246120"/>
+          </a:xfrm>
+          <a:prstGeom prst="rect">
+            <a:avLst/>
+          </a:prstGeom>
+          <a:solidFill>
+            <a:srgbClr val="FCFAF6"/>
+          </a:solidFill>
+          <a:ln w="19050">
+            <a:solidFill>
+              <a:srgbClr val="8E6F3E"/>
+            </a:solidFill>
+          </a:ln>
+          <a:effectLst/>
+        </p:spPr>
+        <p:txBody>
+          <a:bodyPr rtlCol="0" anchor="t" wrap="square"/>
+          <a:lstStyle/>
+          <a:p>
+            <a:pPr algn="l">
+              <a:spcAft>
+                <a:spcPts val="0"/>
+              </a:spcAft>
+            </a:pPr>
+            <a:r>
+              <a:rPr sz="2000" b="1">
+                <a:solidFill>
+                  <a:srgbClr val="8E6F3E"/>
+                </a:solidFill>
+                <a:latin typeface="Calibri"/>
+              </a:rPr>
+              <a:t>INTERNAL ARCHITECTURE</a:t>
+            </a:r>
+          </a:p>
+        </p:txBody>
+      </p:sp>
+      <p:sp>
+        <p:nvSpPr>
+          <p:cNvPr id="4" name="InhContainer" descr="Inherited subgraph: web framework at a pinned version bringing an HTTP parser, and the date-interval library used by booking policy"/>
+          <p:cNvSpPr/>
+          <p:nvPr/>
+        </p:nvSpPr>
+        <p:spPr>
+          <a:xfrm>
+            <a:off x="4800600" y="914400"/>
+            <a:ext cx="3931920" cy="3246120"/>
+          </a:xfrm>
+          <a:prstGeom prst="rect">
+            <a:avLst/>
+          </a:prstGeom>
+          <a:solidFill>
+            <a:srgbClr val="FCFAF6"/>
+          </a:solidFill>
+          <a:ln w="19050">
+            <a:solidFill>
+              <a:srgbClr val="555960"/>
+            </a:solidFill>
+          </a:ln>
+          <a:effectLst/>
+        </p:spPr>
+        <p:txBody>
+          <a:bodyPr rtlCol="0" anchor="t" wrap="square"/>
+          <a:lstStyle/>
+          <a:p>
+            <a:pPr algn="l">
+              <a:spcAft>
+                <a:spcPts val="0"/>
+              </a:spcAft>
+            </a:pPr>
+            <a:r>
+              <a:rPr sz="2000" b="1">
+                <a:solidFill>
+                  <a:srgbClr val="8E6F3E"/>
+                </a:solidFill>
+                <a:latin typeface="Calibri"/>
+              </a:rPr>
+              <a:t>EXTERNAL DEPENDENCIES</a:t>
+            </a:r>
+          </a:p>
+        </p:txBody>
+      </p:sp>
+      <p:sp>
+        <p:nvSpPr>
+          <p:cNvPr id="5" name="IntNode"/>
+          <p:cNvSpPr/>
+          <p:nvPr/>
+        </p:nvSpPr>
+        <p:spPr>
+          <a:xfrm>
+            <a:off x="777240" y="1417320"/>
+            <a:ext cx="2377440" cy="548640"/>
+          </a:xfrm>
+          <a:prstGeom prst="rect">
+            <a:avLst/>
+          </a:prstGeom>
+          <a:solidFill>
+            <a:srgbClr val="8E6F3E"/>
+          </a:solidFill>
+          <a:ln>
+            <a:noFill/>
+          </a:ln>
+          <a:effectLst/>
+        </p:spPr>
+        <p:style>
+          <a:lnRef idx="1">
+            <a:schemeClr val="accent1"/>
+          </a:lnRef>
+          <a:fillRef idx="3">
+            <a:schemeClr val="accent1"/>
+          </a:fillRef>
+          <a:effectRef idx="2">
+            <a:schemeClr val="accent1"/>
+          </a:effectRef>
+          <a:fontRef idx="minor">
+            <a:schemeClr val="lt1"/>
+          </a:fontRef>
+        </p:style>
+        <p:txBody>
+          <a:bodyPr rtlCol="0" anchor="ctr" wrap="square"/>
+          <a:lstStyle/>
+          <a:p>
+            <a:pPr algn="ctr">
+              <a:spcAft>
+                <a:spcPts val="0"/>
+              </a:spcAft>
+            </a:pPr>
+            <a:r>
+              <a:rPr sz="2000" b="1">
+                <a:solidFill>
+                  <a:srgbClr val="FFFFFF"/>
+                </a:solidFill>
+                <a:latin typeface="Calibri"/>
+              </a:rPr>
+              <a:t>HANDLERS</a:t>
+            </a:r>
+          </a:p>
+        </p:txBody>
+      </p:sp>
+      <p:sp>
+        <p:nvSpPr>
+          <p:cNvPr id="6" name="IntNode" descr="Booking policy, carrying the laboratory policy change request"/>
+          <p:cNvSpPr/>
+          <p:nvPr/>
+        </p:nvSpPr>
+        <p:spPr>
+          <a:xfrm>
+            <a:off x="777240" y="2286000"/>
+            <a:ext cx="2377440" cy="685800"/>
+          </a:xfrm>
+          <a:prstGeom prst="rect">
+            <a:avLst/>
+          </a:prstGeom>
+          <a:solidFill>
+            <a:srgbClr val="8E6F3E"/>
+          </a:solidFill>
+          <a:ln>
+            <a:noFill/>
+          </a:ln>
+          <a:effectLst/>
+        </p:spPr>
+        <p:style>
+          <a:lnRef idx="1">
+            <a:schemeClr val="accent1"/>
+          </a:lnRef>
+          <a:fillRef idx="3">
+            <a:schemeClr val="accent1"/>
+          </a:fillRef>
+          <a:effectRef idx="2">
+            <a:schemeClr val="accent1"/>
+          </a:effectRef>
+          <a:fontRef idx="minor">
+            <a:schemeClr val="lt1"/>
+          </a:fontRef>
+        </p:style>
+        <p:txBody>
+          <a:bodyPr rtlCol="0" anchor="ctr" wrap="square"/>
+          <a:lstStyle/>
+          <a:p>
+            <a:pPr algn="ctr">
+              <a:spcAft>
+                <a:spcPts val="0"/>
+              </a:spcAft>
+            </a:pPr>
+            <a:r>
+              <a:rPr sz="2000" b="1">
+                <a:solidFill>
+                  <a:srgbClr val="FFFFFF"/>
+                </a:solidFill>
+                <a:latin typeface="Calibri"/>
+              </a:rPr>
+              <a:t>BOOKING POLICY</a:t>
+            </a:r>
+          </a:p>
+          <a:p>
+            <a:pPr algn="ctr">
+              <a:spcAft>
+                <a:spcPts val="0"/>
+              </a:spcAft>
+            </a:pPr>
+            <a:r>
+              <a:rPr sz="2000" b="0">
+                <a:solidFill>
+                  <a:srgbClr val="FFFFFF"/>
+                </a:solidFill>
+                <a:latin typeface="Calibri"/>
+              </a:rPr>
+              <a:t>Δ lab policy</a:t>
+            </a:r>
+          </a:p>
+        </p:txBody>
+      </p:sp>
+      <p:sp>
+        <p:nvSpPr>
+          <p:cNvPr id="7" name="IntNode"/>
+          <p:cNvSpPr/>
+          <p:nvPr/>
+        </p:nvSpPr>
+        <p:spPr>
+          <a:xfrm>
+            <a:off x="777240" y="3291840"/>
+            <a:ext cx="2377440" cy="548640"/>
+          </a:xfrm>
+          <a:prstGeom prst="rect">
+            <a:avLst/>
+          </a:prstGeom>
+          <a:solidFill>
+            <a:srgbClr val="8E6F3E"/>
+          </a:solidFill>
+          <a:ln>
+            <a:noFill/>
+          </a:ln>
+          <a:effectLst/>
+        </p:spPr>
+        <p:style>
+          <a:lnRef idx="1">
+            <a:schemeClr val="accent1"/>
+          </a:lnRef>
+          <a:fillRef idx="3">
+            <a:schemeClr val="accent1"/>
+          </a:fillRef>
+          <a:effectRef idx="2">
+            <a:schemeClr val="accent1"/>
+          </a:effectRef>
+          <a:fontRef idx="minor">
+            <a:schemeClr val="lt1"/>
+          </a:fontRef>
+        </p:style>
+        <p:txBody>
+          <a:bodyPr rtlCol="0" anchor="ctr" wrap="square"/>
+          <a:lstStyle/>
+          <a:p>
+            <a:pPr algn="ctr">
+              <a:spcAft>
+                <a:spcPts val="0"/>
+              </a:spcAft>
+            </a:pPr>
+            <a:r>
+              <a:rPr sz="2000" b="1">
+                <a:solidFill>
+                  <a:srgbClr val="FFFFFF"/>
+                </a:solidFill>
+                <a:latin typeface="Calibri"/>
+              </a:rPr>
+              <a:t>PERSISTENCE</a:t>
+            </a:r>
+          </a:p>
+        </p:txBody>
+      </p:sp>
+      <p:cxnSp>
+        <p:nvCxnSpPr>
+          <p:cNvPr id="8" name="IntEdge"/>
+          <p:cNvCxnSpPr/>
+          <p:nvPr/>
+        </p:nvCxnSpPr>
+        <p:spPr>
+          <a:xfrm>
+            <a:off x="1965960" y="1965960"/>
+            <a:ext cx="0" cy="320040"/>
+          </a:xfrm>
+          <a:prstGeom prst="line">
+            <a:avLst/>
+          </a:prstGeom>
+          <a:ln w="19050">
+            <a:solidFill>
+              <a:srgbClr val="8E6F3E"/>
+            </a:solidFill>
+            <a:tailEnd type="triangle" w="med" len="med"/>
+          </a:ln>
+        </p:spPr>
+      </p:cxnSp>
+      <p:cxnSp>
+        <p:nvCxnSpPr>
+          <p:cNvPr id="9" name="IntEdge"/>
+          <p:cNvCxnSpPr/>
+          <p:nvPr/>
+        </p:nvCxnSpPr>
+        <p:spPr>
+          <a:xfrm>
+            <a:off x="1965960" y="2971800"/>
+            <a:ext cx="0" cy="320040"/>
+          </a:xfrm>
+          <a:prstGeom prst="line">
+            <a:avLst/>
+          </a:prstGeom>
+          <a:ln w="19050">
+            <a:solidFill>
+              <a:srgbClr val="8E6F3E"/>
+            </a:solidFill>
+            <a:tailEnd type="triangle" w="med" len="med"/>
+          </a:ln>
+        </p:spPr>
+      </p:cxnSp>
+      <p:sp>
+        <p:nvSpPr>
+          <p:cNvPr id="10" name="InhNode"/>
+          <p:cNvSpPr/>
+          <p:nvPr/>
+        </p:nvSpPr>
+        <p:spPr>
+          <a:xfrm>
+            <a:off x="5074920" y="1417320"/>
+            <a:ext cx="2286000" cy="548640"/>
+          </a:xfrm>
+          <a:prstGeom prst="rect">
+            <a:avLst/>
+          </a:prstGeom>
+          <a:solidFill>
+            <a:srgbClr val="F5F1E8"/>
+          </a:solidFill>
+          <a:ln w="15875">
+            <a:solidFill>
+              <a:srgbClr val="555960"/>
+            </a:solidFill>
+          </a:ln>
+          <a:effectLst/>
+        </p:spPr>
+        <p:txBody>
+          <a:bodyPr rtlCol="0" anchor="ctr" wrap="square" lIns="27432" rIns="27432"/>
+          <a:lstStyle/>
+          <a:p>
+            <a:pPr algn="ctr">
+              <a:spcAft>
+                <a:spcPts val="0"/>
+              </a:spcAft>
+            </a:pPr>
+            <a:r>
+              <a:rPr sz="2000" b="1">
+                <a:solidFill>
+                  <a:srgbClr val="2D2D2D"/>
+                </a:solidFill>
+                <a:latin typeface="Calibri"/>
+              </a:rPr>
+              <a:t>WEB FRAMEWORK</a:t>
+            </a:r>
+          </a:p>
+        </p:txBody>
+      </p:sp>
+      <p:sp>
+        <p:nvSpPr>
+          <p:cNvPr id="11" name="InhNode"/>
+          <p:cNvSpPr/>
+          <p:nvPr/>
+        </p:nvSpPr>
+        <p:spPr>
+          <a:xfrm>
+            <a:off x="5074920" y="2423160"/>
+            <a:ext cx="2286000" cy="548640"/>
+          </a:xfrm>
+          <a:prstGeom prst="rect">
+            <a:avLst/>
+          </a:prstGeom>
+          <a:solidFill>
+            <a:srgbClr val="F5F1E8"/>
+          </a:solidFill>
+          <a:ln w="15875">
+            <a:solidFill>
+              <a:srgbClr val="555960"/>
+            </a:solidFill>
+          </a:ln>
+          <a:effectLst/>
+        </p:spPr>
+        <p:txBody>
+          <a:bodyPr rtlCol="0" anchor="ctr" wrap="square" lIns="27432" rIns="27432"/>
+          <a:lstStyle/>
+          <a:p>
+            <a:pPr algn="ctr">
+              <a:spcAft>
+                <a:spcPts val="0"/>
+              </a:spcAft>
+            </a:pPr>
+            <a:r>
+              <a:rPr sz="2000" b="1">
+                <a:solidFill>
+                  <a:srgbClr val="2D2D2D"/>
+                </a:solidFill>
+                <a:latin typeface="Calibri"/>
+              </a:rPr>
+              <a:t>DATE LIB</a:t>
+            </a:r>
+          </a:p>
+        </p:txBody>
+      </p:sp>
+      <p:sp>
+        <p:nvSpPr>
+          <p:cNvPr id="12" name="InhNode"/>
+          <p:cNvSpPr/>
+          <p:nvPr/>
+        </p:nvSpPr>
+        <p:spPr>
+          <a:xfrm>
+            <a:off x="6400800" y="3291840"/>
+            <a:ext cx="2103120" cy="548640"/>
+          </a:xfrm>
+          <a:prstGeom prst="rect">
+            <a:avLst/>
+          </a:prstGeom>
+          <a:solidFill>
+            <a:srgbClr val="F5F1E8"/>
+          </a:solidFill>
+          <a:ln w="15875">
+            <a:solidFill>
+              <a:srgbClr val="555960"/>
+            </a:solidFill>
+          </a:ln>
+          <a:effectLst/>
+        </p:spPr>
+        <p:txBody>
+          <a:bodyPr rtlCol="0" anchor="ctr" wrap="square" lIns="27432" rIns="27432"/>
+          <a:lstStyle/>
+          <a:p>
+            <a:pPr algn="ctr">
+              <a:spcAft>
+                <a:spcPts val="0"/>
+              </a:spcAft>
+            </a:pPr>
+            <a:r>
+              <a:rPr sz="2000" b="1">
+                <a:solidFill>
+                  <a:srgbClr val="2D2D2D"/>
+                </a:solidFill>
+                <a:latin typeface="Calibri"/>
+              </a:rPr>
+              <a:t>HTTP PARSER</a:t>
+            </a:r>
+          </a:p>
+        </p:txBody>
+      </p:sp>
+      <p:sp>
+        <p:nvSpPr>
+          <p:cNvPr id="13" name="InhEdge" descr="the web framework brings the HTTP parser transitively"/>
+          <p:cNvSpPr/>
+          <p:nvPr/>
+        </p:nvSpPr>
+        <p:spPr>
+          <a:xfrm>
+            <a:off x="7360920" y="1691640"/>
+            <a:ext cx="640079" cy="1600200"/>
+          </a:xfrm>
+          <a:custGeom>
+            <a:avLst/>
+            <a:gdLst/>
+            <a:ahLst/>
+            <a:cxnLst/>
+            <a:rect l="0" t="0" r="0" b="0"/>
+            <a:pathLst>
+              <a:path w="640079" h="1600200" fill="none">
+                <a:moveTo>
+                  <a:pt x="0" y="0"/>
+                </a:moveTo>
+                <a:lnTo>
+                  <a:pt x="640080" y="0"/>
+                </a:lnTo>
+                <a:lnTo>
+                  <a:pt x="640080" y="1600200"/>
+                </a:lnTo>
+              </a:path>
+            </a:pathLst>
+          </a:custGeom>
+          <a:noFill/>
+          <a:ln w="19050">
+            <a:solidFill>
+              <a:srgbClr val="555960"/>
+            </a:solidFill>
+            <a:prstDash val="dash"/>
+            <a:tailEnd type="triangle" w="med" len="med"/>
+          </a:ln>
+        </p:spPr>
+        <p:txBody>
+          <a:bodyPr rtlCol="0" anchor="ctr" wrap="square"/>
+          <a:lstStyle/>
+          <a:p/>
+        </p:txBody>
+      </p:sp>
+      <p:cxnSp>
+        <p:nvCxnSpPr>
+          <p:cNvPr id="14" name="CrossEdge"/>
+          <p:cNvCxnSpPr/>
+          <p:nvPr/>
+        </p:nvCxnSpPr>
+        <p:spPr>
+          <a:xfrm>
+            <a:off x="3154680" y="1691640"/>
+            <a:ext cx="1920240" cy="0"/>
+          </a:xfrm>
+          <a:prstGeom prst="line">
+            <a:avLst/>
+          </a:prstGeom>
+          <a:ln w="19050">
+            <a:solidFill>
+              <a:srgbClr val="555960"/>
+            </a:solidFill>
+            <a:prstDash val="dash"/>
+            <a:tailEnd type="triangle" w="med" len="med"/>
+          </a:ln>
+        </p:spPr>
+      </p:cxnSp>
+      <p:cxnSp>
+        <p:nvCxnSpPr>
+          <p:cNvPr id="15" name="CrossEdge2"/>
+          <p:cNvCxnSpPr/>
+          <p:nvPr/>
+        </p:nvCxnSpPr>
+        <p:spPr>
+          <a:xfrm>
+            <a:off x="3154680" y="2697480"/>
+            <a:ext cx="1920240" cy="0"/>
+          </a:xfrm>
+          <a:prstGeom prst="line">
+            <a:avLst/>
+          </a:prstGeom>
+          <a:ln w="19050">
+            <a:solidFill>
+              <a:srgbClr val="555960"/>
+            </a:solidFill>
+            <a:prstDash val="dash"/>
+            <a:tailEnd type="triangle" w="med" len="med"/>
+          </a:ln>
+        </p:spPr>
+      </p:cxnSp>
+      <p:sp>
+        <p:nvSpPr>
+          <p:cNvPr id="16" name="DbNode"/>
+          <p:cNvSpPr/>
+          <p:nvPr/>
+        </p:nvSpPr>
+        <p:spPr>
+          <a:xfrm>
+            <a:off x="777240" y="4526280"/>
+            <a:ext cx="2377440" cy="502920"/>
+          </a:xfrm>
+          <a:prstGeom prst="rect">
+            <a:avLst/>
+          </a:prstGeom>
+          <a:solidFill>
+            <a:srgbClr val="5C4826"/>
+          </a:solidFill>
+          <a:ln>
+            <a:noFill/>
+          </a:ln>
+          <a:effectLst/>
+        </p:spPr>
+        <p:txBody>
+          <a:bodyPr rtlCol="0" anchor="ctr" wrap="square"/>
+          <a:lstStyle/>
+          <a:p>
+            <a:pPr algn="ctr">
+              <a:spcAft>
+                <a:spcPts val="0"/>
+              </a:spcAft>
+            </a:pPr>
+            <a:r>
+              <a:rPr sz="2000" b="1">
+                <a:solidFill>
+                  <a:srgbClr val="FFFFFF"/>
+                </a:solidFill>
+                <a:latin typeface="Calibri"/>
+              </a:rPr>
+              <a:t>DATABASE</a:t>
+            </a:r>
+          </a:p>
+        </p:txBody>
+      </p:sp>
+      <p:cxnSp>
+        <p:nvCxnSpPr>
+          <p:cNvPr id="17" name="RtEdge"/>
+          <p:cNvCxnSpPr/>
+          <p:nvPr/>
+        </p:nvCxnSpPr>
+        <p:spPr>
+          <a:xfrm>
+            <a:off x="1965960" y="3840480"/>
+            <a:ext cx="0" cy="685800"/>
+          </a:xfrm>
+          <a:prstGeom prst="line">
+            <a:avLst/>
+          </a:prstGeom>
+          <a:ln w="19050">
+            <a:solidFill>
+              <a:srgbClr val="5C4826"/>
+            </a:solidFill>
+            <a:prstDash val="sysDot"/>
+            <a:tailEnd type="triangle" w="med" len="med"/>
+          </a:ln>
+        </p:spPr>
+      </p:cxnSp>
+      <p:sp>
+        <p:nvSpPr>
+          <p:cNvPr id="18" name="Legend"/>
+          <p:cNvSpPr/>
+          <p:nvPr/>
+        </p:nvSpPr>
+        <p:spPr>
+          <a:xfrm>
+            <a:off x="3337560" y="4480560"/>
+            <a:ext cx="5394960" cy="594360"/>
+          </a:xfrm>
+          <a:prstGeom prst="rect">
+            <a:avLst/>
+          </a:prstGeom>
+          <a:noFill/>
+          <a:ln>
+            <a:noFill/>
+          </a:ln>
+          <a:effectLst/>
+        </p:spPr>
+        <p:txBody>
+          <a:bodyPr rtlCol="0" anchor="ctr" wrap="square"/>
+          <a:lstStyle/>
+          <a:p>
+            <a:pPr algn="l">
+              <a:spcAft>
+                <a:spcPts val="0"/>
+              </a:spcAft>
+            </a:pPr>
+            <a:r>
+              <a:rPr sz="2000" b="0">
+                <a:solidFill>
+                  <a:srgbClr val="555960"/>
+                </a:solidFill>
+                <a:latin typeface="Calibri"/>
+              </a:rPr>
+              <a:t>solid: structural coupling   ·   dashed: package at a pinned version   ·   dotted: runtime service</a:t>
+            </a:r>
+          </a:p>
+        </p:txBody>
+      </p:sp>
+      <p:sp>
+        <p:nvSpPr>
+          <p:cNvPr id="19" name="FooterBand"/>
+          <p:cNvSpPr/>
+          <p:nvPr/>
+        </p:nvSpPr>
+        <p:spPr>
+          <a:xfrm>
+            <a:off x="274320" y="5513832"/>
+            <a:ext cx="8595360" cy="822960"/>
+          </a:xfrm>
+          <a:prstGeom prst="rect">
+            <a:avLst/>
+          </a:prstGeom>
+          <a:solidFill>
+            <a:srgbClr val="8E6F3E"/>
+          </a:solidFill>
+          <a:ln>
+            <a:noFill/>
+          </a:ln>
+          <a:effectLst/>
+        </p:spPr>
+        <p:style>
+          <a:lnRef idx="1">
+            <a:schemeClr val="accent1"/>
+          </a:lnRef>
+          <a:fillRef idx="3">
+            <a:schemeClr val="accent1"/>
+          </a:fillRef>
+          <a:effectRef idx="2">
+            <a:schemeClr val="accent1"/>
+          </a:effectRef>
+          <a:fontRef idx="minor">
+            <a:schemeClr val="lt1"/>
+          </a:fontRef>
+        </p:style>
+        <p:txBody>
+          <a:bodyPr rtlCol="0" anchor="ctr" wrap="square"/>
+          <a:lstStyle/>
+          <a:p/>
+        </p:txBody>
+      </p:sp>
+      <p:sp>
+        <p:nvSpPr>
+          <p:cNvPr id="20" name="FooterBandText"/>
+          <p:cNvSpPr/>
+          <p:nvPr/>
+        </p:nvSpPr>
+        <p:spPr>
+          <a:xfrm>
+            <a:off x="384048" y="5532120"/>
+            <a:ext cx="8375904" cy="777240"/>
+          </a:xfrm>
+          <a:prstGeom prst="rect">
+            <a:avLst/>
+          </a:prstGeom>
+          <a:noFill/>
+          <a:ln>
+            <a:noFill/>
+          </a:ln>
+          <a:effectLst/>
+        </p:spPr>
+        <p:txBody>
+          <a:bodyPr rtlCol="0" anchor="ctr" wrap="square"/>
+          <a:lstStyle/>
+          <a:p>
+            <a:pPr algn="ctr">
+              <a:spcAft>
+                <a:spcPts val="0"/>
+              </a:spcAft>
+            </a:pPr>
+            <a:r>
+              <a:rPr sz="2000" b="1">
+                <a:solidFill>
+                  <a:srgbClr val="FFFFFF"/>
+                </a:solidFill>
+                <a:latin typeface="Calibri"/>
+              </a:rPr>
+              <a:t>Recover the internal graph, examine the inherited graph, decide which obligations need controls</a:t>
             </a:r>
           </a:p>
         </p:txBody>
@@ -31475,7 +28454,7 @@
                 </a:solidFill>
                 <a:latin typeface="Calibri"/>
               </a:rPr>
-              <a:t>What can make working software difficult to trust?</a:t>
+              <a:t>What structure did we build, and what will it cost to change?</a:t>
             </a:r>
           </a:p>
         </p:txBody>
@@ -31516,7 +28495,7 @@
                 </a:solidFill>
                 <a:latin typeface="Calibri"/>
               </a:rPr>
-              <a:t>SECTION 1</a:t>
+              <a:t>QUESTION 1</a:t>
             </a:r>
           </a:p>
         </p:txBody>
@@ -31557,7 +28536,7 @@
                 </a:solidFill>
                 <a:latin typeface="Calibri"/>
               </a:rPr>
-              <a:t>Mud, erosion, and debt name three different failure shapes. None of them shows up in a green test run.</a:t>
+              <a:t>Act I drew the model first and built second. Here the build came first: name the failure shapes, recover the structure, price the restructuring.</a:t>
             </a:r>
           </a:p>
         </p:txBody>
@@ -34426,8 +31405,8 @@
         </p:nvSpPr>
         <p:spPr>
           <a:xfrm>
-            <a:off x="411480" y="3749040"/>
-            <a:ext cx="8321040" cy="1207008"/>
+            <a:off x="411480" y="3703320"/>
+            <a:ext cx="8321040" cy="1600200"/>
           </a:xfrm>
           <a:prstGeom prst="rect">
             <a:avLst/>
@@ -34454,8 +31433,8 @@
         </p:nvSpPr>
         <p:spPr>
           <a:xfrm>
-            <a:off x="557784" y="3822192"/>
-            <a:ext cx="8046720" cy="1078992"/>
+            <a:off x="557784" y="3776472"/>
+            <a:ext cx="8046720" cy="1463040"/>
           </a:xfrm>
           <a:prstGeom prst="rect">
             <a:avLst/>
@@ -34482,7 +31461,7 @@
                 </a:solidFill>
                 <a:latin typeface="Calibri"/>
               </a:rPr>
-              <a:t>Agentic debt: the 10 and the 2 shrink; the 0.5 does not</a:t>
+              <a:t>Agentic development changes the economics: implementation becomes cheaper, but future maintenance costs need not decline proportionally</a:t>
             </a:r>
           </a:p>
           <a:p>
@@ -34511,7 +31490,7 @@
         </p:nvSpPr>
         <p:spPr>
           <a:xfrm>
-            <a:off x="411480" y="5102352"/>
+            <a:off x="411480" y="5394960"/>
             <a:ext cx="8321040" cy="347472"/>
           </a:xfrm>
           <a:prstGeom prst="rect">
@@ -34651,158 +31630,6 @@
       </p:par>
     </p:tnLst>
   </p:timing>
-</p:sld>
-</file>
-
-<file path=ppt/slides/slide9.xml><?xml version="1.0" encoding="utf-8"?>
-<p:sld xmlns:a="http://schemas.openxmlformats.org/drawingml/2006/main" xmlns:p="http://schemas.openxmlformats.org/presentationml/2006/main" xmlns:r="http://schemas.openxmlformats.org/officeDocument/2006/relationships">
-  <p:cSld>
-    <p:spTree>
-      <p:nvGrpSpPr>
-        <p:cNvPr id="1" name=""/>
-        <p:cNvGrpSpPr/>
-        <p:nvPr/>
-      </p:nvGrpSpPr>
-      <p:grpSpPr>
-        <a:xfrm>
-          <a:off x="0" y="0"/>
-          <a:ext cx="0" cy="0"/>
-          <a:chOff x="0" y="0"/>
-          <a:chExt cx="0" cy="0"/>
-        </a:xfrm>
-      </p:grpSpPr>
-      <p:sp>
-        <p:nvSpPr>
-          <p:cNvPr id="2" name="Title"/>
-          <p:cNvSpPr>
-            <a:spLocks noGrp="1"/>
-          </p:cNvSpPr>
-          <p:nvPr>
-            <p:ph type="title"/>
-          </p:nvPr>
-        </p:nvSpPr>
-        <p:spPr>
-          <a:xfrm>
-            <a:off x="274320" y="128016"/>
-            <a:ext cx="8595360" cy="594360"/>
-          </a:xfrm>
-          <a:prstGeom prst="rect">
-            <a:avLst/>
-          </a:prstGeom>
-          <a:noFill/>
-          <a:ln>
-            <a:noFill/>
-          </a:ln>
-          <a:effectLst/>
-        </p:spPr>
-        <p:txBody>
-          <a:bodyPr rtlCol="0" anchor="ctr" wrap="square"/>
-          <a:lstStyle/>
-          <a:p>
-            <a:pPr algn="l">
-              <a:spcAft>
-                <a:spcPts val="0"/>
-              </a:spcAft>
-            </a:pPr>
-            <a:r>
-              <a:rPr sz="2400" b="0">
-                <a:solidFill>
-                  <a:srgbClr val="2D2D2D"/>
-                </a:solidFill>
-                <a:latin typeface="Calibri"/>
-              </a:rPr>
-              <a:t>What architecture did we actually build?</a:t>
-            </a:r>
-          </a:p>
-        </p:txBody>
-      </p:sp>
-      <p:sp>
-        <p:nvSpPr>
-          <p:cNvPr id="3" name="SectionLabel"/>
-          <p:cNvSpPr/>
-          <p:nvPr/>
-        </p:nvSpPr>
-        <p:spPr>
-          <a:xfrm>
-            <a:off x="640080" y="2240280"/>
-            <a:ext cx="7863840" cy="868680"/>
-          </a:xfrm>
-          <a:prstGeom prst="rect">
-            <a:avLst/>
-          </a:prstGeom>
-          <a:noFill/>
-          <a:ln>
-            <a:noFill/>
-          </a:ln>
-          <a:effectLst/>
-        </p:spPr>
-        <p:txBody>
-          <a:bodyPr rtlCol="0" anchor="ctr" wrap="square"/>
-          <a:lstStyle/>
-          <a:p>
-            <a:pPr algn="ctr">
-              <a:spcAft>
-                <a:spcPts val="0"/>
-              </a:spcAft>
-            </a:pPr>
-            <a:r>
-              <a:rPr sz="3600" b="1">
-                <a:solidFill>
-                  <a:srgbClr val="8E6F3E"/>
-                </a:solidFill>
-                <a:latin typeface="Calibri"/>
-              </a:rPr>
-              <a:t>SECTION 2</a:t>
-            </a:r>
-          </a:p>
-        </p:txBody>
-      </p:sp>
-      <p:sp>
-        <p:nvSpPr>
-          <p:cNvPr id="4" name="OrientingSentence"/>
-          <p:cNvSpPr/>
-          <p:nvPr/>
-        </p:nvSpPr>
-        <p:spPr>
-          <a:xfrm>
-            <a:off x="914400" y="3474720"/>
-            <a:ext cx="7315200" cy="1097280"/>
-          </a:xfrm>
-          <a:prstGeom prst="rect">
-            <a:avLst/>
-          </a:prstGeom>
-          <a:noFill/>
-          <a:ln>
-            <a:noFill/>
-          </a:ln>
-          <a:effectLst/>
-        </p:spPr>
-        <p:txBody>
-          <a:bodyPr rtlCol="0" anchor="t" wrap="square"/>
-          <a:lstStyle/>
-          <a:p>
-            <a:pPr algn="ctr">
-              <a:spcAft>
-                <a:spcPts val="0"/>
-              </a:spcAft>
-            </a:pPr>
-            <a:r>
-              <a:rPr sz="2200" b="0">
-                <a:solidFill>
-                  <a:srgbClr val="555960"/>
-                </a:solidFill>
-                <a:latin typeface="Calibri"/>
-              </a:rPr>
-              <a:t>Act I chose structure before building. A generated system asks us to work backward: recover the structure from what was built.</a:t>
-            </a:r>
-          </a:p>
-        </p:txBody>
-      </p:sp>
-    </p:spTree>
-  </p:cSld>
-  <p:clrMapOvr>
-    <a:masterClrMapping/>
-  </p:clrMapOvr>
 </p:sld>
 </file>
 
